--- a/VProfile-DevSecOps-Platform.pptx
+++ b/VProfile-DevSecOps-Platform.pptx
@@ -149,18 +149,7 @@
                 <a:uFillTx/>
                 <a:latin typeface="Arial"/>
               </a:rPr>
-              <a:t>Click to edit the </a:t>
-            </a:r>
-            <a:r>
-              <a:rPr lang="en-US" sz="2000" b="0" u="none" strike="noStrike">
-                <a:solidFill>
-                  <a:srgbClr val="000000"/>
-                </a:solidFill>
-                <a:effectLst/>
-                <a:uFillTx/>
-                <a:latin typeface="Arial"/>
-              </a:rPr>
-              <a:t>notes format</a:t>
+              <a:t>Click to edit the notes format</a:t>
             </a:r>
             <a:endParaRPr lang="en-US" sz="2000" b="0" u="none" strike="noStrike">
               <a:solidFill>
@@ -402,7 +391,7 @@
             <a:pPr indent="0" algn="r">
               <a:buNone/>
             </a:pPr>
-            <a:fld id="{619D46BB-E6F9-49C5-9B70-5C4E3AF64314}" type="slidenum">
+            <a:fld id="{AECE8D6B-4605-4745-995D-5C21A23A8B67}" type="slidenum">
               <a:rPr lang="en-US" sz="1400" b="0" u="none" strike="noStrike">
                 <a:solidFill>
                   <a:srgbClr val="000000"/>
@@ -460,7 +449,7 @@
         <p:spPr>
           <a:xfrm>
             <a:off x="685800" y="1143000"/>
-            <a:ext cx="5485680" cy="3085560"/>
+            <a:ext cx="5484960" cy="3084840"/>
           </a:xfrm>
           <a:prstGeom prst="rect">
             <a:avLst/>
@@ -483,7 +472,7 @@
         <p:spPr>
           <a:xfrm>
             <a:off x="685800" y="4400640"/>
-            <a:ext cx="5485680" cy="3599640"/>
+            <a:ext cx="5484960" cy="3598920"/>
           </a:xfrm>
           <a:prstGeom prst="rect">
             <a:avLst/>
@@ -542,7 +531,7 @@
         <p:spPr>
           <a:xfrm>
             <a:off x="3884760" y="8685360"/>
-            <a:ext cx="2971080" cy="457920"/>
+            <a:ext cx="2970360" cy="457200"/>
           </a:xfrm>
           <a:prstGeom prst="rect">
             <a:avLst/>
@@ -586,7 +575,7 @@
                 <a:tab pos="0" algn="l"/>
               </a:tabLst>
             </a:pPr>
-            <a:fld id="{2E1517FA-0B4C-4A42-9940-4987D7CEFF2A}" type="slidenum">
+            <a:fld id="{34FB0BCC-6FE3-4427-AD90-83436B64DDC9}" type="slidenum">
               <a:rPr lang="en-US" sz="1200" b="0" u="none" strike="noStrike">
                 <a:solidFill>
                   <a:schemeClr val="dk1"/>
@@ -644,7 +633,7 @@
         <p:spPr>
           <a:xfrm>
             <a:off x="685800" y="1143000"/>
-            <a:ext cx="5485680" cy="3085560"/>
+            <a:ext cx="5484960" cy="3084840"/>
           </a:xfrm>
           <a:prstGeom prst="rect">
             <a:avLst/>
@@ -667,7 +656,7 @@
         <p:spPr>
           <a:xfrm>
             <a:off x="685800" y="4400640"/>
-            <a:ext cx="5485680" cy="3599640"/>
+            <a:ext cx="5484960" cy="3598920"/>
           </a:xfrm>
           <a:prstGeom prst="rect">
             <a:avLst/>
@@ -726,7 +715,7 @@
         <p:spPr>
           <a:xfrm>
             <a:off x="3884760" y="8685360"/>
-            <a:ext cx="2971080" cy="457920"/>
+            <a:ext cx="2970360" cy="457200"/>
           </a:xfrm>
           <a:prstGeom prst="rect">
             <a:avLst/>
@@ -770,7 +759,7 @@
                 <a:tab pos="0" algn="l"/>
               </a:tabLst>
             </a:pPr>
-            <a:fld id="{E7C0A110-419D-400C-A6B0-6052E76C8E3B}" type="slidenum">
+            <a:fld id="{30778E53-A4C6-4991-89C9-A97B132A31B5}" type="slidenum">
               <a:rPr lang="en-US" sz="1200" b="0" u="none" strike="noStrike">
                 <a:solidFill>
                   <a:schemeClr val="dk1"/>
@@ -828,7 +817,7 @@
         <p:spPr>
           <a:xfrm>
             <a:off x="685800" y="1143000"/>
-            <a:ext cx="5485680" cy="3085560"/>
+            <a:ext cx="5484960" cy="3084840"/>
           </a:xfrm>
           <a:prstGeom prst="rect">
             <a:avLst/>
@@ -851,7 +840,7 @@
         <p:spPr>
           <a:xfrm>
             <a:off x="685800" y="4400640"/>
-            <a:ext cx="5485680" cy="3599640"/>
+            <a:ext cx="5484960" cy="3598920"/>
           </a:xfrm>
           <a:prstGeom prst="rect">
             <a:avLst/>
@@ -910,7 +899,7 @@
         <p:spPr>
           <a:xfrm>
             <a:off x="3884760" y="8685360"/>
-            <a:ext cx="2971080" cy="457920"/>
+            <a:ext cx="2970360" cy="457200"/>
           </a:xfrm>
           <a:prstGeom prst="rect">
             <a:avLst/>
@@ -954,7 +943,7 @@
                 <a:tab pos="0" algn="l"/>
               </a:tabLst>
             </a:pPr>
-            <a:fld id="{C5B9229D-E6C7-4EFA-A6F2-D70BF8C2E3B2}" type="slidenum">
+            <a:fld id="{D0015365-975D-467B-A64C-181A9A59FC64}" type="slidenum">
               <a:rPr lang="en-US" sz="1200" b="0" u="none" strike="noStrike">
                 <a:solidFill>
                   <a:schemeClr val="dk1"/>
@@ -1012,7 +1001,7 @@
         <p:spPr>
           <a:xfrm>
             <a:off x="685800" y="1143000"/>
-            <a:ext cx="5485680" cy="3085560"/>
+            <a:ext cx="5484960" cy="3084840"/>
           </a:xfrm>
           <a:prstGeom prst="rect">
             <a:avLst/>
@@ -1035,7 +1024,7 @@
         <p:spPr>
           <a:xfrm>
             <a:off x="685800" y="4400640"/>
-            <a:ext cx="5485680" cy="3599640"/>
+            <a:ext cx="5484960" cy="3598920"/>
           </a:xfrm>
           <a:prstGeom prst="rect">
             <a:avLst/>
@@ -1094,7 +1083,7 @@
         <p:spPr>
           <a:xfrm>
             <a:off x="3884760" y="8685360"/>
-            <a:ext cx="2971080" cy="457920"/>
+            <a:ext cx="2970360" cy="457200"/>
           </a:xfrm>
           <a:prstGeom prst="rect">
             <a:avLst/>
@@ -1138,7 +1127,7 @@
                 <a:tab pos="0" algn="l"/>
               </a:tabLst>
             </a:pPr>
-            <a:fld id="{93E3E6F5-EE01-4F13-96CA-5A6AD8BC67D8}" type="slidenum">
+            <a:fld id="{FEC3901A-2A50-46BE-8E00-1A8EF4DB6A6C}" type="slidenum">
               <a:rPr lang="en-US" sz="1200" b="0" u="none" strike="noStrike">
                 <a:solidFill>
                   <a:schemeClr val="dk1"/>
@@ -1148,7 +1137,7 @@
                 <a:latin typeface="+mn-lt"/>
                 <a:ea typeface="+mn-ea"/>
               </a:rPr>
-              <a:t>&lt;number&gt;</a:t>
+              <a:t>1</a:t>
             </a:fld>
             <a:endParaRPr lang="en-US" sz="1200" b="0" u="none" strike="noStrike">
               <a:solidFill>
@@ -1196,7 +1185,7 @@
         <p:spPr>
           <a:xfrm>
             <a:off x="685800" y="1143000"/>
-            <a:ext cx="5485680" cy="3085560"/>
+            <a:ext cx="5484960" cy="3084840"/>
           </a:xfrm>
           <a:prstGeom prst="rect">
             <a:avLst/>
@@ -1219,7 +1208,7 @@
         <p:spPr>
           <a:xfrm>
             <a:off x="685800" y="4400640"/>
-            <a:ext cx="5485680" cy="3599640"/>
+            <a:ext cx="5484960" cy="3598920"/>
           </a:xfrm>
           <a:prstGeom prst="rect">
             <a:avLst/>
@@ -1278,7 +1267,7 @@
         <p:spPr>
           <a:xfrm>
             <a:off x="3884760" y="8685360"/>
-            <a:ext cx="2971080" cy="457920"/>
+            <a:ext cx="2970360" cy="457200"/>
           </a:xfrm>
           <a:prstGeom prst="rect">
             <a:avLst/>
@@ -1322,7 +1311,7 @@
                 <a:tab pos="0" algn="l"/>
               </a:tabLst>
             </a:pPr>
-            <a:fld id="{A344D910-33FB-426D-99CA-D179FCC1E1CF}" type="slidenum">
+            <a:fld id="{FAFDCEBA-2809-4B58-A7B5-7DBE4D0E4897}" type="slidenum">
               <a:rPr lang="en-US" sz="1200" b="0" u="none" strike="noStrike">
                 <a:solidFill>
                   <a:schemeClr val="dk1"/>
@@ -1332,7 +1321,7 @@
                 <a:latin typeface="+mn-lt"/>
                 <a:ea typeface="+mn-ea"/>
               </a:rPr>
-              <a:t>&lt;number&gt;</a:t>
+              <a:t>1</a:t>
             </a:fld>
             <a:endParaRPr lang="en-US" sz="1200" b="0" u="none" strike="noStrike">
               <a:solidFill>
@@ -1380,7 +1369,7 @@
         <p:spPr>
           <a:xfrm>
             <a:off x="685800" y="1143000"/>
-            <a:ext cx="5485680" cy="3085560"/>
+            <a:ext cx="5484960" cy="3084840"/>
           </a:xfrm>
           <a:prstGeom prst="rect">
             <a:avLst/>
@@ -1403,7 +1392,7 @@
         <p:spPr>
           <a:xfrm>
             <a:off x="685800" y="4400640"/>
-            <a:ext cx="5485680" cy="3599640"/>
+            <a:ext cx="5484960" cy="3598920"/>
           </a:xfrm>
           <a:prstGeom prst="rect">
             <a:avLst/>
@@ -1462,7 +1451,7 @@
         <p:spPr>
           <a:xfrm>
             <a:off x="3884760" y="8685360"/>
-            <a:ext cx="2971080" cy="457920"/>
+            <a:ext cx="2970360" cy="457200"/>
           </a:xfrm>
           <a:prstGeom prst="rect">
             <a:avLst/>
@@ -1506,7 +1495,7 @@
                 <a:tab pos="0" algn="l"/>
               </a:tabLst>
             </a:pPr>
-            <a:fld id="{A4FBDB68-BBBA-4533-8BCC-7312DE8B153F}" type="slidenum">
+            <a:fld id="{F3915739-CB3D-4655-B522-B4DF0C46368D}" type="slidenum">
               <a:rPr lang="en-US" sz="1200" b="0" u="none" strike="noStrike">
                 <a:solidFill>
                   <a:schemeClr val="dk1"/>
@@ -1516,7 +1505,7 @@
                 <a:latin typeface="+mn-lt"/>
                 <a:ea typeface="+mn-ea"/>
               </a:rPr>
-              <a:t>&lt;number&gt;</a:t>
+              <a:t>1</a:t>
             </a:fld>
             <a:endParaRPr lang="en-US" sz="1200" b="0" u="none" strike="noStrike">
               <a:solidFill>
@@ -1564,7 +1553,7 @@
         <p:spPr>
           <a:xfrm>
             <a:off x="685800" y="1143000"/>
-            <a:ext cx="5485680" cy="3085560"/>
+            <a:ext cx="5484960" cy="3084840"/>
           </a:xfrm>
           <a:prstGeom prst="rect">
             <a:avLst/>
@@ -1587,7 +1576,7 @@
         <p:spPr>
           <a:xfrm>
             <a:off x="685800" y="4400640"/>
-            <a:ext cx="5485680" cy="3599640"/>
+            <a:ext cx="5484960" cy="3598920"/>
           </a:xfrm>
           <a:prstGeom prst="rect">
             <a:avLst/>
@@ -1646,7 +1635,7 @@
         <p:spPr>
           <a:xfrm>
             <a:off x="3884760" y="8685360"/>
-            <a:ext cx="2971080" cy="457920"/>
+            <a:ext cx="2970360" cy="457200"/>
           </a:xfrm>
           <a:prstGeom prst="rect">
             <a:avLst/>
@@ -1690,7 +1679,7 @@
                 <a:tab pos="0" algn="l"/>
               </a:tabLst>
             </a:pPr>
-            <a:fld id="{EE409C92-D7D3-4A5D-B404-B8351D56E1F4}" type="slidenum">
+            <a:fld id="{B15BC2C7-DFE0-4741-A25E-4C303D118D00}" type="slidenum">
               <a:rPr lang="en-US" sz="1200" b="0" u="none" strike="noStrike">
                 <a:solidFill>
                   <a:schemeClr val="dk1"/>
@@ -1700,7 +1689,7 @@
                 <a:latin typeface="+mn-lt"/>
                 <a:ea typeface="+mn-ea"/>
               </a:rPr>
-              <a:t>&lt;number&gt;</a:t>
+              <a:t>1</a:t>
             </a:fld>
             <a:endParaRPr lang="en-US" sz="1200" b="0" u="none" strike="noStrike">
               <a:solidFill>
@@ -1748,7 +1737,7 @@
         <p:spPr>
           <a:xfrm>
             <a:off x="685800" y="1143000"/>
-            <a:ext cx="5485680" cy="3085560"/>
+            <a:ext cx="5484960" cy="3084840"/>
           </a:xfrm>
           <a:prstGeom prst="rect">
             <a:avLst/>
@@ -1771,7 +1760,7 @@
         <p:spPr>
           <a:xfrm>
             <a:off x="685800" y="4400640"/>
-            <a:ext cx="5485680" cy="3599640"/>
+            <a:ext cx="5484960" cy="3598920"/>
           </a:xfrm>
           <a:prstGeom prst="rect">
             <a:avLst/>
@@ -1830,7 +1819,7 @@
         <p:spPr>
           <a:xfrm>
             <a:off x="3884760" y="8685360"/>
-            <a:ext cx="2971080" cy="457920"/>
+            <a:ext cx="2970360" cy="457200"/>
           </a:xfrm>
           <a:prstGeom prst="rect">
             <a:avLst/>
@@ -1874,7 +1863,7 @@
                 <a:tab pos="0" algn="l"/>
               </a:tabLst>
             </a:pPr>
-            <a:fld id="{4175B819-5721-468F-B63E-3747E0B6453C}" type="slidenum">
+            <a:fld id="{51146EA7-4F30-4D38-A252-FDC5D423ABDB}" type="slidenum">
               <a:rPr lang="en-US" sz="1200" b="0" u="none" strike="noStrike">
                 <a:solidFill>
                   <a:schemeClr val="dk1"/>
@@ -1932,7 +1921,7 @@
         <p:spPr>
           <a:xfrm>
             <a:off x="685800" y="1143000"/>
-            <a:ext cx="5485680" cy="3085560"/>
+            <a:ext cx="5484960" cy="3084840"/>
           </a:xfrm>
           <a:prstGeom prst="rect">
             <a:avLst/>
@@ -1955,7 +1944,7 @@
         <p:spPr>
           <a:xfrm>
             <a:off x="685800" y="4400640"/>
-            <a:ext cx="5485680" cy="3599640"/>
+            <a:ext cx="5484960" cy="3598920"/>
           </a:xfrm>
           <a:prstGeom prst="rect">
             <a:avLst/>
@@ -2014,7 +2003,7 @@
         <p:spPr>
           <a:xfrm>
             <a:off x="3884760" y="8685360"/>
-            <a:ext cx="2971080" cy="457920"/>
+            <a:ext cx="2970360" cy="457200"/>
           </a:xfrm>
           <a:prstGeom prst="rect">
             <a:avLst/>
@@ -2058,7 +2047,7 @@
                 <a:tab pos="0" algn="l"/>
               </a:tabLst>
             </a:pPr>
-            <a:fld id="{29D257E7-E0EF-4E18-BB03-82CDD5B76731}" type="slidenum">
+            <a:fld id="{D17EF5FD-FEA5-4E5E-9A19-BF2D0030BCF2}" type="slidenum">
               <a:rPr lang="en-US" sz="1200" b="0" u="none" strike="noStrike">
                 <a:solidFill>
                   <a:schemeClr val="dk1"/>
@@ -2116,7 +2105,7 @@
         <p:spPr>
           <a:xfrm>
             <a:off x="685800" y="1143000"/>
-            <a:ext cx="5485680" cy="3085560"/>
+            <a:ext cx="5484960" cy="3084840"/>
           </a:xfrm>
           <a:prstGeom prst="rect">
             <a:avLst/>
@@ -2139,7 +2128,7 @@
         <p:spPr>
           <a:xfrm>
             <a:off x="685800" y="4400640"/>
-            <a:ext cx="5485680" cy="3599640"/>
+            <a:ext cx="5484960" cy="3598920"/>
           </a:xfrm>
           <a:prstGeom prst="rect">
             <a:avLst/>
@@ -2198,7 +2187,7 @@
         <p:spPr>
           <a:xfrm>
             <a:off x="3884760" y="8685360"/>
-            <a:ext cx="2971080" cy="457920"/>
+            <a:ext cx="2970360" cy="457200"/>
           </a:xfrm>
           <a:prstGeom prst="rect">
             <a:avLst/>
@@ -2242,7 +2231,7 @@
                 <a:tab pos="0" algn="l"/>
               </a:tabLst>
             </a:pPr>
-            <a:fld id="{F834211C-9E77-4C94-9299-9595376FBC50}" type="slidenum">
+            <a:fld id="{777D6784-76DA-4D82-960C-6126F51E5A48}" type="slidenum">
               <a:rPr lang="en-US" sz="1200" b="0" u="none" strike="noStrike">
                 <a:solidFill>
                   <a:schemeClr val="dk1"/>
@@ -2300,7 +2289,7 @@
         <p:spPr>
           <a:xfrm>
             <a:off x="685800" y="1143000"/>
-            <a:ext cx="5485680" cy="3085560"/>
+            <a:ext cx="5484960" cy="3084840"/>
           </a:xfrm>
           <a:prstGeom prst="rect">
             <a:avLst/>
@@ -2323,7 +2312,7 @@
         <p:spPr>
           <a:xfrm>
             <a:off x="685800" y="4400640"/>
-            <a:ext cx="5485680" cy="3599640"/>
+            <a:ext cx="5484960" cy="3598920"/>
           </a:xfrm>
           <a:prstGeom prst="rect">
             <a:avLst/>
@@ -2382,7 +2371,7 @@
         <p:spPr>
           <a:xfrm>
             <a:off x="3884760" y="8685360"/>
-            <a:ext cx="2971080" cy="457920"/>
+            <a:ext cx="2970360" cy="457200"/>
           </a:xfrm>
           <a:prstGeom prst="rect">
             <a:avLst/>
@@ -2426,7 +2415,7 @@
                 <a:tab pos="0" algn="l"/>
               </a:tabLst>
             </a:pPr>
-            <a:fld id="{111BB0D5-B44D-4CD5-9BA0-A6A00C884BCC}" type="slidenum">
+            <a:fld id="{6C4D110E-5736-47AE-8A42-7CD2C3D5579B}" type="slidenum">
               <a:rPr lang="en-US" sz="1200" b="0" u="none" strike="noStrike">
                 <a:solidFill>
                   <a:schemeClr val="dk1"/>
@@ -2484,7 +2473,7 @@
         <p:spPr>
           <a:xfrm>
             <a:off x="685800" y="1143000"/>
-            <a:ext cx="5485680" cy="3085560"/>
+            <a:ext cx="5484960" cy="3084840"/>
           </a:xfrm>
           <a:prstGeom prst="rect">
             <a:avLst/>
@@ -2507,7 +2496,7 @@
         <p:spPr>
           <a:xfrm>
             <a:off x="685800" y="4400640"/>
-            <a:ext cx="5485680" cy="3599640"/>
+            <a:ext cx="5484960" cy="3598920"/>
           </a:xfrm>
           <a:prstGeom prst="rect">
             <a:avLst/>
@@ -2566,7 +2555,7 @@
         <p:spPr>
           <a:xfrm>
             <a:off x="3884760" y="8685360"/>
-            <a:ext cx="2971080" cy="457920"/>
+            <a:ext cx="2970360" cy="457200"/>
           </a:xfrm>
           <a:prstGeom prst="rect">
             <a:avLst/>
@@ -2610,7 +2599,7 @@
                 <a:tab pos="0" algn="l"/>
               </a:tabLst>
             </a:pPr>
-            <a:fld id="{1262F53A-A1DC-4496-9020-57E83D68E4FF}" type="slidenum">
+            <a:fld id="{0B0C37B7-9C92-44BC-A14F-5ED82E7058DB}" type="slidenum">
               <a:rPr lang="en-US" sz="1200" b="0" u="none" strike="noStrike">
                 <a:solidFill>
                   <a:schemeClr val="dk1"/>
@@ -2668,7 +2657,7 @@
         <p:spPr>
           <a:xfrm>
             <a:off x="685800" y="1143000"/>
-            <a:ext cx="5485680" cy="3085560"/>
+            <a:ext cx="5484960" cy="3084840"/>
           </a:xfrm>
           <a:prstGeom prst="rect">
             <a:avLst/>
@@ -2691,7 +2680,7 @@
         <p:spPr>
           <a:xfrm>
             <a:off x="685800" y="4400640"/>
-            <a:ext cx="5485680" cy="3599640"/>
+            <a:ext cx="5484960" cy="3598920"/>
           </a:xfrm>
           <a:prstGeom prst="rect">
             <a:avLst/>
@@ -2750,7 +2739,7 @@
         <p:spPr>
           <a:xfrm>
             <a:off x="3884760" y="8685360"/>
-            <a:ext cx="2971080" cy="457920"/>
+            <a:ext cx="2970360" cy="457200"/>
           </a:xfrm>
           <a:prstGeom prst="rect">
             <a:avLst/>
@@ -2794,7 +2783,7 @@
                 <a:tab pos="0" algn="l"/>
               </a:tabLst>
             </a:pPr>
-            <a:fld id="{C944E0F7-5B0F-48D0-B217-1CC91D220723}" type="slidenum">
+            <a:fld id="{036444AD-0324-4DEF-9536-BCBDCFC97994}" type="slidenum">
               <a:rPr lang="en-US" sz="1200" b="0" u="none" strike="noStrike">
                 <a:solidFill>
                   <a:schemeClr val="dk1"/>
@@ -2852,7 +2841,7 @@
         <p:spPr>
           <a:xfrm>
             <a:off x="685800" y="1143000"/>
-            <a:ext cx="5485680" cy="3085560"/>
+            <a:ext cx="5484960" cy="3084840"/>
           </a:xfrm>
           <a:prstGeom prst="rect">
             <a:avLst/>
@@ -2875,7 +2864,7 @@
         <p:spPr>
           <a:xfrm>
             <a:off x="685800" y="4400640"/>
-            <a:ext cx="5485680" cy="3599640"/>
+            <a:ext cx="5484960" cy="3598920"/>
           </a:xfrm>
           <a:prstGeom prst="rect">
             <a:avLst/>
@@ -2934,7 +2923,7 @@
         <p:spPr>
           <a:xfrm>
             <a:off x="3884760" y="8685360"/>
-            <a:ext cx="2971080" cy="457920"/>
+            <a:ext cx="2970360" cy="457200"/>
           </a:xfrm>
           <a:prstGeom prst="rect">
             <a:avLst/>
@@ -2978,7 +2967,7 @@
                 <a:tab pos="0" algn="l"/>
               </a:tabLst>
             </a:pPr>
-            <a:fld id="{14437FCC-2D52-4F47-898A-AF17BB19556F}" type="slidenum">
+            <a:fld id="{74B71F52-20BB-436B-B602-6100BBBC9613}" type="slidenum">
               <a:rPr lang="en-US" sz="1200" b="0" u="none" strike="noStrike">
                 <a:solidFill>
                   <a:schemeClr val="dk1"/>
@@ -3036,7 +3025,7 @@
         <p:spPr>
           <a:xfrm>
             <a:off x="685800" y="1143000"/>
-            <a:ext cx="5485680" cy="3085560"/>
+            <a:ext cx="5484960" cy="3084840"/>
           </a:xfrm>
           <a:prstGeom prst="rect">
             <a:avLst/>
@@ -3059,7 +3048,7 @@
         <p:spPr>
           <a:xfrm>
             <a:off x="685800" y="4400640"/>
-            <a:ext cx="5485680" cy="3599640"/>
+            <a:ext cx="5484960" cy="3598920"/>
           </a:xfrm>
           <a:prstGeom prst="rect">
             <a:avLst/>
@@ -3118,7 +3107,7 @@
         <p:spPr>
           <a:xfrm>
             <a:off x="3884760" y="8685360"/>
-            <a:ext cx="2971080" cy="457920"/>
+            <a:ext cx="2970360" cy="457200"/>
           </a:xfrm>
           <a:prstGeom prst="rect">
             <a:avLst/>
@@ -3162,7 +3151,7 @@
                 <a:tab pos="0" algn="l"/>
               </a:tabLst>
             </a:pPr>
-            <a:fld id="{C170113D-C373-43A6-B79B-E67965A89F32}" type="slidenum">
+            <a:fld id="{0D5CA489-EC7C-429C-A8ED-ADACE9733AAC}" type="slidenum">
               <a:rPr lang="en-US" sz="1200" b="0" u="none" strike="noStrike">
                 <a:solidFill>
                   <a:schemeClr val="dk1"/>
@@ -3220,7 +3209,7 @@
         <p:spPr>
           <a:xfrm>
             <a:off x="685800" y="1143000"/>
-            <a:ext cx="5485680" cy="3085560"/>
+            <a:ext cx="5484960" cy="3084840"/>
           </a:xfrm>
           <a:prstGeom prst="rect">
             <a:avLst/>
@@ -3243,7 +3232,7 @@
         <p:spPr>
           <a:xfrm>
             <a:off x="685800" y="4400640"/>
-            <a:ext cx="5485680" cy="3599640"/>
+            <a:ext cx="5484960" cy="3598920"/>
           </a:xfrm>
           <a:prstGeom prst="rect">
             <a:avLst/>
@@ -3302,7 +3291,7 @@
         <p:spPr>
           <a:xfrm>
             <a:off x="3884760" y="8685360"/>
-            <a:ext cx="2971080" cy="457920"/>
+            <a:ext cx="2970360" cy="457200"/>
           </a:xfrm>
           <a:prstGeom prst="rect">
             <a:avLst/>
@@ -3346,7 +3335,7 @@
                 <a:tab pos="0" algn="l"/>
               </a:tabLst>
             </a:pPr>
-            <a:fld id="{E0471873-7644-4275-84E1-88B85DB27E3F}" type="slidenum">
+            <a:fld id="{A8D743C8-15E6-4B49-BE81-00052665B140}" type="slidenum">
               <a:rPr lang="en-US" sz="1200" b="0" u="none" strike="noStrike">
                 <a:solidFill>
                   <a:schemeClr val="dk1"/>
@@ -3404,7 +3393,7 @@
         <p:spPr>
           <a:xfrm>
             <a:off x="685800" y="1143000"/>
-            <a:ext cx="5485680" cy="3085560"/>
+            <a:ext cx="5484960" cy="3084840"/>
           </a:xfrm>
           <a:prstGeom prst="rect">
             <a:avLst/>
@@ -3427,7 +3416,7 @@
         <p:spPr>
           <a:xfrm>
             <a:off x="685800" y="4400640"/>
-            <a:ext cx="5485680" cy="3599640"/>
+            <a:ext cx="5484960" cy="3598920"/>
           </a:xfrm>
           <a:prstGeom prst="rect">
             <a:avLst/>
@@ -3486,7 +3475,7 @@
         <p:spPr>
           <a:xfrm>
             <a:off x="3884760" y="8685360"/>
-            <a:ext cx="2971080" cy="457920"/>
+            <a:ext cx="2970360" cy="457200"/>
           </a:xfrm>
           <a:prstGeom prst="rect">
             <a:avLst/>
@@ -3530,7 +3519,7 @@
                 <a:tab pos="0" algn="l"/>
               </a:tabLst>
             </a:pPr>
-            <a:fld id="{4EC0FAB8-AC42-432E-90EA-D705A7DEC706}" type="slidenum">
+            <a:fld id="{0593B463-C209-4B83-8FB2-A529C91DE580}" type="slidenum">
               <a:rPr lang="en-US" sz="1200" b="0" u="none" strike="noStrike">
                 <a:solidFill>
                   <a:schemeClr val="dk1"/>
@@ -3588,7 +3577,7 @@
         <p:spPr>
           <a:xfrm>
             <a:off x="685800" y="1143000"/>
-            <a:ext cx="5485680" cy="3085560"/>
+            <a:ext cx="5484960" cy="3084840"/>
           </a:xfrm>
           <a:prstGeom prst="rect">
             <a:avLst/>
@@ -3611,7 +3600,7 @@
         <p:spPr>
           <a:xfrm>
             <a:off x="685800" y="4400640"/>
-            <a:ext cx="5485680" cy="3599640"/>
+            <a:ext cx="5484960" cy="3598920"/>
           </a:xfrm>
           <a:prstGeom prst="rect">
             <a:avLst/>
@@ -3670,7 +3659,7 @@
         <p:spPr>
           <a:xfrm>
             <a:off x="3884760" y="8685360"/>
-            <a:ext cx="2971080" cy="457920"/>
+            <a:ext cx="2970360" cy="457200"/>
           </a:xfrm>
           <a:prstGeom prst="rect">
             <a:avLst/>
@@ -3714,7 +3703,7 @@
                 <a:tab pos="0" algn="l"/>
               </a:tabLst>
             </a:pPr>
-            <a:fld id="{B565CDC7-CA82-4102-B726-0C1908D69FA7}" type="slidenum">
+            <a:fld id="{5FCD4B4C-E633-47FA-96EF-C90ACA66AD74}" type="slidenum">
               <a:rPr lang="en-US" sz="1200" b="0" u="none" strike="noStrike">
                 <a:solidFill>
                   <a:schemeClr val="dk1"/>
@@ -3772,7 +3761,7 @@
         <p:spPr>
           <a:xfrm>
             <a:off x="685800" y="1143000"/>
-            <a:ext cx="5485680" cy="3085560"/>
+            <a:ext cx="5484960" cy="3084840"/>
           </a:xfrm>
           <a:prstGeom prst="rect">
             <a:avLst/>
@@ -3795,7 +3784,7 @@
         <p:spPr>
           <a:xfrm>
             <a:off x="685800" y="4400640"/>
-            <a:ext cx="5485680" cy="3599640"/>
+            <a:ext cx="5484960" cy="3598920"/>
           </a:xfrm>
           <a:prstGeom prst="rect">
             <a:avLst/>
@@ -3854,7 +3843,7 @@
         <p:spPr>
           <a:xfrm>
             <a:off x="3884760" y="8685360"/>
-            <a:ext cx="2971080" cy="457920"/>
+            <a:ext cx="2970360" cy="457200"/>
           </a:xfrm>
           <a:prstGeom prst="rect">
             <a:avLst/>
@@ -3898,7 +3887,7 @@
                 <a:tab pos="0" algn="l"/>
               </a:tabLst>
             </a:pPr>
-            <a:fld id="{07975CAB-DD85-4CCC-B2DF-9917EB30E44F}" type="slidenum">
+            <a:fld id="{C64323C0-E7AD-4E1E-B68D-B36A3C980F7A}" type="slidenum">
               <a:rPr lang="en-US" sz="1200" b="0" u="none" strike="noStrike">
                 <a:solidFill>
                   <a:schemeClr val="dk1"/>
@@ -3956,7 +3945,7 @@
         <p:spPr>
           <a:xfrm>
             <a:off x="685800" y="1143000"/>
-            <a:ext cx="5485680" cy="3085560"/>
+            <a:ext cx="5484960" cy="3084840"/>
           </a:xfrm>
           <a:prstGeom prst="rect">
             <a:avLst/>
@@ -3979,7 +3968,7 @@
         <p:spPr>
           <a:xfrm>
             <a:off x="685800" y="4400640"/>
-            <a:ext cx="5485680" cy="3599640"/>
+            <a:ext cx="5484960" cy="3598920"/>
           </a:xfrm>
           <a:prstGeom prst="rect">
             <a:avLst/>
@@ -4038,7 +4027,7 @@
         <p:spPr>
           <a:xfrm>
             <a:off x="3884760" y="8685360"/>
-            <a:ext cx="2971080" cy="457920"/>
+            <a:ext cx="2970360" cy="457200"/>
           </a:xfrm>
           <a:prstGeom prst="rect">
             <a:avLst/>
@@ -4082,7 +4071,7 @@
                 <a:tab pos="0" algn="l"/>
               </a:tabLst>
             </a:pPr>
-            <a:fld id="{0F574787-0F55-4991-8D07-47CA827A64CD}" type="slidenum">
+            <a:fld id="{6B236B80-EC51-47C2-B4FB-15BDAFE27821}" type="slidenum">
               <a:rPr lang="en-US" sz="1200" b="0" u="none" strike="noStrike">
                 <a:solidFill>
                   <a:schemeClr val="dk1"/>
@@ -4140,7 +4129,7 @@
         <p:spPr>
           <a:xfrm>
             <a:off x="685800" y="1143000"/>
-            <a:ext cx="5485680" cy="3085560"/>
+            <a:ext cx="5484960" cy="3084840"/>
           </a:xfrm>
           <a:prstGeom prst="rect">
             <a:avLst/>
@@ -4163,7 +4152,7 @@
         <p:spPr>
           <a:xfrm>
             <a:off x="685800" y="4400640"/>
-            <a:ext cx="5485680" cy="3599640"/>
+            <a:ext cx="5484960" cy="3598920"/>
           </a:xfrm>
           <a:prstGeom prst="rect">
             <a:avLst/>
@@ -4222,7 +4211,7 @@
         <p:spPr>
           <a:xfrm>
             <a:off x="3884760" y="8685360"/>
-            <a:ext cx="2971080" cy="457920"/>
+            <a:ext cx="2970360" cy="457200"/>
           </a:xfrm>
           <a:prstGeom prst="rect">
             <a:avLst/>
@@ -4266,7 +4255,7 @@
                 <a:tab pos="0" algn="l"/>
               </a:tabLst>
             </a:pPr>
-            <a:fld id="{2F8987C7-1E1F-4C2F-90A6-5AEF18CD1672}" type="slidenum">
+            <a:fld id="{86225DB3-F320-4E3A-9311-3E0FF856089B}" type="slidenum">
               <a:rPr lang="en-US" sz="1200" b="0" u="none" strike="noStrike">
                 <a:solidFill>
                   <a:schemeClr val="dk1"/>
@@ -4324,7 +4313,7 @@
         <p:spPr>
           <a:xfrm>
             <a:off x="685800" y="1143000"/>
-            <a:ext cx="5485680" cy="3085560"/>
+            <a:ext cx="5484960" cy="3084840"/>
           </a:xfrm>
           <a:prstGeom prst="rect">
             <a:avLst/>
@@ -4347,7 +4336,7 @@
         <p:spPr>
           <a:xfrm>
             <a:off x="685800" y="4400640"/>
-            <a:ext cx="5485680" cy="3599640"/>
+            <a:ext cx="5484960" cy="3598920"/>
           </a:xfrm>
           <a:prstGeom prst="rect">
             <a:avLst/>
@@ -4406,7 +4395,7 @@
         <p:spPr>
           <a:xfrm>
             <a:off x="3884760" y="8685360"/>
-            <a:ext cx="2971080" cy="457920"/>
+            <a:ext cx="2970360" cy="457200"/>
           </a:xfrm>
           <a:prstGeom prst="rect">
             <a:avLst/>
@@ -4450,7 +4439,7 @@
                 <a:tab pos="0" algn="l"/>
               </a:tabLst>
             </a:pPr>
-            <a:fld id="{47824EC6-0C37-49EC-877C-7CFC388FAE0B}" type="slidenum">
+            <a:fld id="{854219D3-1214-4253-99A5-46B1A9D8EB36}" type="slidenum">
               <a:rPr lang="en-US" sz="1200" b="0" u="none" strike="noStrike">
                 <a:solidFill>
                   <a:schemeClr val="dk1"/>
@@ -4508,7 +4497,7 @@
         <p:spPr>
           <a:xfrm>
             <a:off x="685800" y="1143000"/>
-            <a:ext cx="5485680" cy="3085560"/>
+            <a:ext cx="5484960" cy="3084840"/>
           </a:xfrm>
           <a:prstGeom prst="rect">
             <a:avLst/>
@@ -4531,7 +4520,7 @@
         <p:spPr>
           <a:xfrm>
             <a:off x="685800" y="4400640"/>
-            <a:ext cx="5485680" cy="3599640"/>
+            <a:ext cx="5484960" cy="3598920"/>
           </a:xfrm>
           <a:prstGeom prst="rect">
             <a:avLst/>
@@ -4590,7 +4579,7 @@
         <p:spPr>
           <a:xfrm>
             <a:off x="3884760" y="8685360"/>
-            <a:ext cx="2971080" cy="457920"/>
+            <a:ext cx="2970360" cy="457200"/>
           </a:xfrm>
           <a:prstGeom prst="rect">
             <a:avLst/>
@@ -4634,7 +4623,7 @@
                 <a:tab pos="0" algn="l"/>
               </a:tabLst>
             </a:pPr>
-            <a:fld id="{04BB1DF3-7452-4A95-AC2F-B88144752B9D}" type="slidenum">
+            <a:fld id="{A266DCC1-048E-45B4-9A4F-F4A7EC1EA1FD}" type="slidenum">
               <a:rPr lang="en-US" sz="1200" b="0" u="none" strike="noStrike">
                 <a:solidFill>
                   <a:schemeClr val="dk1"/>
@@ -4692,7 +4681,7 @@
         <p:spPr>
           <a:xfrm>
             <a:off x="685800" y="1143000"/>
-            <a:ext cx="5485680" cy="3085560"/>
+            <a:ext cx="5484960" cy="3084840"/>
           </a:xfrm>
           <a:prstGeom prst="rect">
             <a:avLst/>
@@ -4715,7 +4704,7 @@
         <p:spPr>
           <a:xfrm>
             <a:off x="685800" y="4400640"/>
-            <a:ext cx="5485680" cy="3599640"/>
+            <a:ext cx="5484960" cy="3598920"/>
           </a:xfrm>
           <a:prstGeom prst="rect">
             <a:avLst/>
@@ -4774,7 +4763,7 @@
         <p:spPr>
           <a:xfrm>
             <a:off x="3884760" y="8685360"/>
-            <a:ext cx="2971080" cy="457920"/>
+            <a:ext cx="2970360" cy="457200"/>
           </a:xfrm>
           <a:prstGeom prst="rect">
             <a:avLst/>
@@ -4818,7 +4807,7 @@
                 <a:tab pos="0" algn="l"/>
               </a:tabLst>
             </a:pPr>
-            <a:fld id="{BBFF3BA8-322C-4E1C-B170-676C0E857708}" type="slidenum">
+            <a:fld id="{3209C222-6D03-496A-ADFD-0504AA4814A1}" type="slidenum">
               <a:rPr lang="en-US" sz="1200" b="0" u="none" strike="noStrike">
                 <a:solidFill>
                   <a:schemeClr val="dk1"/>
@@ -4876,7 +4865,7 @@
         <p:spPr>
           <a:xfrm>
             <a:off x="685800" y="1143000"/>
-            <a:ext cx="5485680" cy="3085560"/>
+            <a:ext cx="5484960" cy="3084840"/>
           </a:xfrm>
           <a:prstGeom prst="rect">
             <a:avLst/>
@@ -4899,7 +4888,7 @@
         <p:spPr>
           <a:xfrm>
             <a:off x="685800" y="4400640"/>
-            <a:ext cx="5485680" cy="3599640"/>
+            <a:ext cx="5484960" cy="3598920"/>
           </a:xfrm>
           <a:prstGeom prst="rect">
             <a:avLst/>
@@ -4958,7 +4947,7 @@
         <p:spPr>
           <a:xfrm>
             <a:off x="3884760" y="8685360"/>
-            <a:ext cx="2971080" cy="457920"/>
+            <a:ext cx="2970360" cy="457200"/>
           </a:xfrm>
           <a:prstGeom prst="rect">
             <a:avLst/>
@@ -5002,7 +4991,7 @@
                 <a:tab pos="0" algn="l"/>
               </a:tabLst>
             </a:pPr>
-            <a:fld id="{5F75500C-AE96-43F5-9238-3E698E87FEA6}" type="slidenum">
+            <a:fld id="{EDF34DBD-DD5C-47B8-9DB0-75889650210C}" type="slidenum">
               <a:rPr lang="en-US" sz="1200" b="0" u="none" strike="noStrike">
                 <a:solidFill>
                   <a:schemeClr val="dk1"/>
@@ -5060,7 +5049,7 @@
         <p:spPr>
           <a:xfrm>
             <a:off x="685800" y="1143000"/>
-            <a:ext cx="5485680" cy="3085560"/>
+            <a:ext cx="5484960" cy="3084840"/>
           </a:xfrm>
           <a:prstGeom prst="rect">
             <a:avLst/>
@@ -5083,7 +5072,7 @@
         <p:spPr>
           <a:xfrm>
             <a:off x="685800" y="4400640"/>
-            <a:ext cx="5485680" cy="3599640"/>
+            <a:ext cx="5484960" cy="3598920"/>
           </a:xfrm>
           <a:prstGeom prst="rect">
             <a:avLst/>
@@ -5142,7 +5131,7 @@
         <p:spPr>
           <a:xfrm>
             <a:off x="3884760" y="8685360"/>
-            <a:ext cx="2971080" cy="457920"/>
+            <a:ext cx="2970360" cy="457200"/>
           </a:xfrm>
           <a:prstGeom prst="rect">
             <a:avLst/>
@@ -5186,7 +5175,7 @@
                 <a:tab pos="0" algn="l"/>
               </a:tabLst>
             </a:pPr>
-            <a:fld id="{70F01D2B-471D-4739-8751-D0D8827755D7}" type="slidenum">
+            <a:fld id="{806282C1-ECA7-4C52-8B4A-1DE416B5DA98}" type="slidenum">
               <a:rPr lang="en-US" sz="1200" b="0" u="none" strike="noStrike">
                 <a:solidFill>
                   <a:schemeClr val="dk1"/>
@@ -5244,7 +5233,7 @@
         <p:spPr>
           <a:xfrm>
             <a:off x="685800" y="1143000"/>
-            <a:ext cx="5485680" cy="3085560"/>
+            <a:ext cx="5484960" cy="3084840"/>
           </a:xfrm>
           <a:prstGeom prst="rect">
             <a:avLst/>
@@ -5267,7 +5256,7 @@
         <p:spPr>
           <a:xfrm>
             <a:off x="685800" y="4400640"/>
-            <a:ext cx="5485680" cy="3599640"/>
+            <a:ext cx="5484960" cy="3598920"/>
           </a:xfrm>
           <a:prstGeom prst="rect">
             <a:avLst/>
@@ -5326,7 +5315,7 @@
         <p:spPr>
           <a:xfrm>
             <a:off x="3884760" y="8685360"/>
-            <a:ext cx="2971080" cy="457920"/>
+            <a:ext cx="2970360" cy="457200"/>
           </a:xfrm>
           <a:prstGeom prst="rect">
             <a:avLst/>
@@ -5370,7 +5359,7 @@
                 <a:tab pos="0" algn="l"/>
               </a:tabLst>
             </a:pPr>
-            <a:fld id="{29DB60FB-D02B-4F6B-8DB8-8AAFC3966110}" type="slidenum">
+            <a:fld id="{CC0C0B7F-D86A-4EEF-A6F5-998297850D4F}" type="slidenum">
               <a:rPr lang="en-US" sz="1200" b="0" u="none" strike="noStrike">
                 <a:solidFill>
                   <a:schemeClr val="dk1"/>
@@ -5428,7 +5417,7 @@
         <p:spPr>
           <a:xfrm>
             <a:off x="685800" y="1143000"/>
-            <a:ext cx="5485680" cy="3085560"/>
+            <a:ext cx="5484960" cy="3084840"/>
           </a:xfrm>
           <a:prstGeom prst="rect">
             <a:avLst/>
@@ -5451,7 +5440,7 @@
         <p:spPr>
           <a:xfrm>
             <a:off x="685800" y="4400640"/>
-            <a:ext cx="5485680" cy="3599640"/>
+            <a:ext cx="5484960" cy="3598920"/>
           </a:xfrm>
           <a:prstGeom prst="rect">
             <a:avLst/>
@@ -5510,7 +5499,7 @@
         <p:spPr>
           <a:xfrm>
             <a:off x="3884760" y="8685360"/>
-            <a:ext cx="2971080" cy="457920"/>
+            <a:ext cx="2970360" cy="457200"/>
           </a:xfrm>
           <a:prstGeom prst="rect">
             <a:avLst/>
@@ -5554,7 +5543,7 @@
                 <a:tab pos="0" algn="l"/>
               </a:tabLst>
             </a:pPr>
-            <a:fld id="{AB9E2165-DEB0-4610-A0FE-B1C03F61A284}" type="slidenum">
+            <a:fld id="{AC92A7BC-A37E-4716-B97C-A21DD43191A4}" type="slidenum">
               <a:rPr lang="en-US" sz="1200" b="0" u="none" strike="noStrike">
                 <a:solidFill>
                   <a:schemeClr val="dk1"/>
@@ -6130,7 +6119,7 @@
         <p:spPr>
           <a:xfrm>
             <a:off x="640080" y="2057400"/>
-            <a:ext cx="10057680" cy="822240"/>
+            <a:ext cx="10056960" cy="821520"/>
           </a:xfrm>
           <a:prstGeom prst="rect">
             <a:avLst/>
@@ -6191,7 +6180,7 @@
         <p:spPr>
           <a:xfrm>
             <a:off x="640080" y="2880360"/>
-            <a:ext cx="10057680" cy="639360"/>
+            <a:ext cx="10056960" cy="638640"/>
           </a:xfrm>
           <a:prstGeom prst="rect">
             <a:avLst/>
@@ -6230,31 +6219,7 @@
                 <a:latin typeface="Cambria"/>
                 <a:ea typeface="Cambria"/>
               </a:rPr>
-              <a:t>DevSecOps </a:t>
-            </a:r>
-            <a:r>
-              <a:rPr lang="en-US" sz="3000" b="0" u="none" strike="noStrike">
-                <a:solidFill>
-                  <a:srgbClr val="D8CCBC"/>
-                </a:solidFill>
-                <a:effectLst/>
-                <a:uFillTx/>
-                <a:latin typeface="Cambria"/>
-                <a:ea typeface="Cambria"/>
-              </a:rPr>
-              <a:t>Platform on </a:t>
-            </a:r>
-            <a:r>
-              <a:rPr lang="en-US" sz="3000" b="0" u="none" strike="noStrike">
-                <a:solidFill>
-                  <a:srgbClr val="D8CCBC"/>
-                </a:solidFill>
-                <a:effectLst/>
-                <a:uFillTx/>
-                <a:latin typeface="Cambria"/>
-                <a:ea typeface="Cambria"/>
-              </a:rPr>
-              <a:t>Amazon EKS</a:t>
+              <a:t>DevSecOps Platform on Amazon EKS</a:t>
             </a:r>
             <a:endParaRPr lang="en-US" sz="3000" b="0" u="none" strike="noStrike">
               <a:solidFill>
@@ -6319,7 +6284,7 @@
         <p:spPr>
           <a:xfrm>
             <a:off x="640080" y="4069080"/>
-            <a:ext cx="10789560" cy="822240"/>
+            <a:ext cx="10788840" cy="821520"/>
           </a:xfrm>
           <a:prstGeom prst="rect">
             <a:avLst/>
@@ -6410,7 +6375,7 @@
         <p:spPr>
           <a:xfrm>
             <a:off x="640080" y="5852160"/>
-            <a:ext cx="5485680" cy="328320"/>
+            <a:ext cx="5484960" cy="327600"/>
           </a:xfrm>
           <a:prstGeom prst="rect">
             <a:avLst/>
@@ -6449,7 +6414,7 @@
                 <a:latin typeface="Calibri"/>
                 <a:ea typeface="Calibri"/>
               </a:rPr>
-              <a:t>ALnaqib  ·  DevOps Engineer</a:t>
+              <a:t>Yousef Salem  ·  DevOps Engineer</a:t>
             </a:r>
             <a:endParaRPr lang="en-US" sz="1400" b="0" u="none" strike="noStrike">
               <a:solidFill>
@@ -6471,7 +6436,7 @@
         <p:spPr>
           <a:xfrm>
             <a:off x="640080" y="6199560"/>
-            <a:ext cx="8228880" cy="273600"/>
+            <a:ext cx="8228160" cy="272880"/>
           </a:xfrm>
           <a:prstGeom prst="rect">
             <a:avLst/>
@@ -6501,7 +6466,7 @@
               </a:tabLst>
             </a:pPr>
             <a:r>
-              <a:rPr lang="en-US" sz="1200" b="0" u="none" strike="noStrike">
+              <a:rPr lang="en-US" sz="1200" b="1" u="none" strike="noStrike">
                 <a:solidFill>
                   <a:srgbClr val="8C8078"/>
                 </a:solidFill>
@@ -6569,7 +6534,7 @@
         <p:spPr>
           <a:xfrm>
             <a:off x="640080" y="311040"/>
-            <a:ext cx="7314480" cy="255240"/>
+            <a:ext cx="7313760" cy="254520"/>
           </a:xfrm>
           <a:prstGeom prst="rect">
             <a:avLst/>
@@ -6630,7 +6595,7 @@
         <p:spPr>
           <a:xfrm>
             <a:off x="640080" y="603360"/>
-            <a:ext cx="10880640" cy="657720"/>
+            <a:ext cx="10879920" cy="657000"/>
           </a:xfrm>
           <a:prstGeom prst="rect">
             <a:avLst/>
@@ -6691,7 +6656,7 @@
         <p:spPr>
           <a:xfrm>
             <a:off x="640080" y="1691640"/>
-            <a:ext cx="2376720" cy="1050840"/>
+            <a:ext cx="2376000" cy="1050120"/>
           </a:xfrm>
           <a:prstGeom prst="roundRect">
             <a:avLst>
@@ -6746,7 +6711,7 @@
         <p:spPr>
           <a:xfrm>
             <a:off x="749880" y="1874520"/>
-            <a:ext cx="2157120" cy="273600"/>
+            <a:ext cx="2156400" cy="272880"/>
           </a:xfrm>
           <a:prstGeom prst="rect">
             <a:avLst/>
@@ -6807,7 +6772,7 @@
         <p:spPr>
           <a:xfrm>
             <a:off x="749880" y="2176200"/>
-            <a:ext cx="2157120" cy="410760"/>
+            <a:ext cx="2156400" cy="410040"/>
           </a:xfrm>
           <a:prstGeom prst="rect">
             <a:avLst/>
@@ -6912,7 +6877,7 @@
         <p:spPr>
           <a:xfrm>
             <a:off x="3474720" y="1691640"/>
-            <a:ext cx="2376720" cy="1050840"/>
+            <a:ext cx="2376000" cy="1050120"/>
           </a:xfrm>
           <a:prstGeom prst="roundRect">
             <a:avLst>
@@ -6967,7 +6932,7 @@
         <p:spPr>
           <a:xfrm>
             <a:off x="3584520" y="1874520"/>
-            <a:ext cx="2157120" cy="273600"/>
+            <a:ext cx="2156400" cy="272880"/>
           </a:xfrm>
           <a:prstGeom prst="rect">
             <a:avLst/>
@@ -7028,7 +6993,7 @@
         <p:spPr>
           <a:xfrm>
             <a:off x="3584520" y="2176200"/>
-            <a:ext cx="2157120" cy="410760"/>
+            <a:ext cx="2156400" cy="410040"/>
           </a:xfrm>
           <a:prstGeom prst="rect">
             <a:avLst/>
@@ -7133,7 +7098,7 @@
         <p:spPr>
           <a:xfrm>
             <a:off x="6309360" y="1691640"/>
-            <a:ext cx="2376720" cy="1050840"/>
+            <a:ext cx="2376000" cy="1050120"/>
           </a:xfrm>
           <a:prstGeom prst="roundRect">
             <a:avLst>
@@ -7188,7 +7153,7 @@
         <p:spPr>
           <a:xfrm>
             <a:off x="6419160" y="1874520"/>
-            <a:ext cx="2157120" cy="273600"/>
+            <a:ext cx="2156400" cy="272880"/>
           </a:xfrm>
           <a:prstGeom prst="rect">
             <a:avLst/>
@@ -7249,7 +7214,7 @@
         <p:spPr>
           <a:xfrm>
             <a:off x="6419160" y="2176200"/>
-            <a:ext cx="2157120" cy="410760"/>
+            <a:ext cx="2156400" cy="410040"/>
           </a:xfrm>
           <a:prstGeom prst="rect">
             <a:avLst/>
@@ -7354,7 +7319,7 @@
         <p:spPr>
           <a:xfrm>
             <a:off x="9144000" y="1691640"/>
-            <a:ext cx="2376720" cy="1050840"/>
+            <a:ext cx="2376000" cy="1050120"/>
           </a:xfrm>
           <a:prstGeom prst="roundRect">
             <a:avLst>
@@ -7409,7 +7374,7 @@
         <p:spPr>
           <a:xfrm>
             <a:off x="9253800" y="1874520"/>
-            <a:ext cx="2157120" cy="273600"/>
+            <a:ext cx="2156400" cy="272880"/>
           </a:xfrm>
           <a:prstGeom prst="rect">
             <a:avLst/>
@@ -7470,7 +7435,7 @@
         <p:spPr>
           <a:xfrm>
             <a:off x="9253800" y="2176200"/>
-            <a:ext cx="2157120" cy="410760"/>
+            <a:ext cx="2156400" cy="410040"/>
           </a:xfrm>
           <a:prstGeom prst="rect">
             <a:avLst/>
@@ -7531,7 +7496,7 @@
         <p:spPr>
           <a:xfrm>
             <a:off x="640080" y="3794760"/>
-            <a:ext cx="3492360" cy="1370880"/>
+            <a:ext cx="3491640" cy="1370160"/>
           </a:xfrm>
           <a:prstGeom prst="roundRect">
             <a:avLst>
@@ -7586,7 +7551,7 @@
         <p:spPr>
           <a:xfrm>
             <a:off x="896040" y="3977640"/>
-            <a:ext cx="2980080" cy="273600"/>
+            <a:ext cx="2979360" cy="272880"/>
           </a:xfrm>
           <a:prstGeom prst="rect">
             <a:avLst/>
@@ -7647,7 +7612,7 @@
         <p:spPr>
           <a:xfrm>
             <a:off x="896040" y="4279320"/>
-            <a:ext cx="2980080" cy="685080"/>
+            <a:ext cx="2979360" cy="684360"/>
           </a:xfrm>
           <a:prstGeom prst="rect">
             <a:avLst/>
@@ -7782,7 +7747,7 @@
         <p:spPr>
           <a:xfrm>
             <a:off x="4352400" y="3794760"/>
-            <a:ext cx="3492360" cy="1370880"/>
+            <a:ext cx="3491640" cy="1370160"/>
           </a:xfrm>
           <a:prstGeom prst="roundRect">
             <a:avLst>
@@ -7837,7 +7802,7 @@
         <p:spPr>
           <a:xfrm>
             <a:off x="4608720" y="3977640"/>
-            <a:ext cx="2980080" cy="273600"/>
+            <a:ext cx="2979360" cy="272880"/>
           </a:xfrm>
           <a:prstGeom prst="rect">
             <a:avLst/>
@@ -7898,7 +7863,7 @@
         <p:spPr>
           <a:xfrm>
             <a:off x="4608720" y="4279320"/>
-            <a:ext cx="2980080" cy="685080"/>
+            <a:ext cx="2979360" cy="684360"/>
           </a:xfrm>
           <a:prstGeom prst="rect">
             <a:avLst/>
@@ -8033,7 +7998,7 @@
         <p:spPr>
           <a:xfrm>
             <a:off x="8065080" y="3794760"/>
-            <a:ext cx="3492360" cy="1370880"/>
+            <a:ext cx="3491640" cy="1370160"/>
           </a:xfrm>
           <a:prstGeom prst="roundRect">
             <a:avLst>
@@ -8088,7 +8053,7 @@
         <p:spPr>
           <a:xfrm>
             <a:off x="8321040" y="3977640"/>
-            <a:ext cx="2980080" cy="273600"/>
+            <a:ext cx="2979360" cy="272880"/>
           </a:xfrm>
           <a:prstGeom prst="rect">
             <a:avLst/>
@@ -8149,7 +8114,7 @@
         <p:spPr>
           <a:xfrm>
             <a:off x="8321040" y="4279320"/>
-            <a:ext cx="2980080" cy="685080"/>
+            <a:ext cx="2979360" cy="684360"/>
           </a:xfrm>
           <a:prstGeom prst="rect">
             <a:avLst/>
@@ -8321,7 +8286,7 @@
         <p:spPr>
           <a:xfrm>
             <a:off x="640080" y="311040"/>
-            <a:ext cx="7314480" cy="255240"/>
+            <a:ext cx="7313760" cy="254520"/>
           </a:xfrm>
           <a:prstGeom prst="rect">
             <a:avLst/>
@@ -8382,7 +8347,7 @@
         <p:spPr>
           <a:xfrm>
             <a:off x="640080" y="603360"/>
-            <a:ext cx="12618360" cy="657720"/>
+            <a:ext cx="12617640" cy="657000"/>
           </a:xfrm>
           <a:prstGeom prst="rect">
             <a:avLst/>
@@ -8443,7 +8408,7 @@
         <p:spPr>
           <a:xfrm>
             <a:off x="640080" y="1353240"/>
-            <a:ext cx="10880640" cy="383400"/>
+            <a:ext cx="10879920" cy="382680"/>
           </a:xfrm>
           <a:prstGeom prst="rect">
             <a:avLst/>
@@ -8504,7 +8469,7 @@
         <p:spPr>
           <a:xfrm>
             <a:off x="640080" y="2057400"/>
-            <a:ext cx="5348520" cy="2422440"/>
+            <a:ext cx="5347800" cy="2421720"/>
           </a:xfrm>
           <a:prstGeom prst="roundRect">
             <a:avLst>
@@ -8559,7 +8524,7 @@
         <p:spPr>
           <a:xfrm>
             <a:off x="960120" y="2267640"/>
-            <a:ext cx="3656880" cy="310320"/>
+            <a:ext cx="3656160" cy="309600"/>
           </a:xfrm>
           <a:prstGeom prst="rect">
             <a:avLst/>
@@ -8620,7 +8585,7 @@
         <p:spPr>
           <a:xfrm>
             <a:off x="960120" y="2670120"/>
-            <a:ext cx="4708440" cy="1645200"/>
+            <a:ext cx="4707720" cy="1644480"/>
           </a:xfrm>
           <a:prstGeom prst="rect">
             <a:avLst/>
@@ -8791,7 +8756,7 @@
         <p:spPr>
           <a:xfrm>
             <a:off x="6263640" y="2057400"/>
-            <a:ext cx="5257080" cy="2422440"/>
+            <a:ext cx="5256360" cy="2421720"/>
           </a:xfrm>
           <a:prstGeom prst="roundRect">
             <a:avLst>
@@ -8846,7 +8811,7 @@
         <p:spPr>
           <a:xfrm>
             <a:off x="6583680" y="2267640"/>
-            <a:ext cx="3656880" cy="310320"/>
+            <a:ext cx="3656160" cy="309600"/>
           </a:xfrm>
           <a:prstGeom prst="rect">
             <a:avLst/>
@@ -8907,7 +8872,7 @@
         <p:spPr>
           <a:xfrm>
             <a:off x="6583680" y="2670120"/>
-            <a:ext cx="4617000" cy="1645200"/>
+            <a:ext cx="4616280" cy="1644480"/>
           </a:xfrm>
           <a:prstGeom prst="rect">
             <a:avLst/>
@@ -9078,7 +9043,7 @@
         <p:spPr>
           <a:xfrm>
             <a:off x="640080" y="4709160"/>
-            <a:ext cx="10880640" cy="1005120"/>
+            <a:ext cx="10879920" cy="1004400"/>
           </a:xfrm>
           <a:prstGeom prst="roundRect">
             <a:avLst>
@@ -9133,7 +9098,7 @@
         <p:spPr>
           <a:xfrm>
             <a:off x="960120" y="4956120"/>
-            <a:ext cx="10240560" cy="547920"/>
+            <a:ext cx="10239840" cy="547200"/>
           </a:xfrm>
           <a:prstGeom prst="rect">
             <a:avLst/>
@@ -9231,7 +9196,7 @@
         <p:spPr>
           <a:xfrm>
             <a:off x="640080" y="311040"/>
-            <a:ext cx="7314480" cy="255240"/>
+            <a:ext cx="7313760" cy="254520"/>
           </a:xfrm>
           <a:prstGeom prst="rect">
             <a:avLst/>
@@ -9292,7 +9257,7 @@
         <p:spPr>
           <a:xfrm>
             <a:off x="640080" y="603360"/>
-            <a:ext cx="10880640" cy="657720"/>
+            <a:ext cx="10879920" cy="657000"/>
           </a:xfrm>
           <a:prstGeom prst="rect">
             <a:avLst/>
@@ -9353,7 +9318,7 @@
         <p:spPr>
           <a:xfrm>
             <a:off x="640080" y="1353240"/>
-            <a:ext cx="10880640" cy="383400"/>
+            <a:ext cx="10879920" cy="382680"/>
           </a:xfrm>
           <a:prstGeom prst="rect">
             <a:avLst/>
@@ -9414,7 +9379,7 @@
         <p:spPr>
           <a:xfrm>
             <a:off x="640080" y="2011680"/>
-            <a:ext cx="5348520" cy="2285280"/>
+            <a:ext cx="5347800" cy="2284560"/>
           </a:xfrm>
           <a:prstGeom prst="roundRect">
             <a:avLst>
@@ -9469,7 +9434,7 @@
         <p:spPr>
           <a:xfrm>
             <a:off x="960120" y="2212920"/>
-            <a:ext cx="3656880" cy="310320"/>
+            <a:ext cx="3656160" cy="309600"/>
           </a:xfrm>
           <a:prstGeom prst="rect">
             <a:avLst/>
@@ -9530,7 +9495,7 @@
         <p:spPr>
           <a:xfrm>
             <a:off x="960120" y="2615040"/>
-            <a:ext cx="4754520" cy="1233720"/>
+            <a:ext cx="4753800" cy="1233000"/>
           </a:xfrm>
           <a:prstGeom prst="rect">
             <a:avLst/>
@@ -9591,7 +9556,7 @@
         <p:spPr>
           <a:xfrm>
             <a:off x="960120" y="3877200"/>
-            <a:ext cx="4708440" cy="273600"/>
+            <a:ext cx="4707720" cy="272880"/>
           </a:xfrm>
           <a:prstGeom prst="rect">
             <a:avLst/>
@@ -9652,7 +9617,7 @@
         <p:spPr>
           <a:xfrm>
             <a:off x="6263640" y="2011680"/>
-            <a:ext cx="5257080" cy="2285280"/>
+            <a:ext cx="5256360" cy="2284560"/>
           </a:xfrm>
           <a:prstGeom prst="roundRect">
             <a:avLst>
@@ -9707,7 +9672,7 @@
         <p:spPr>
           <a:xfrm>
             <a:off x="6583680" y="2212920"/>
-            <a:ext cx="3656880" cy="310320"/>
+            <a:ext cx="3656160" cy="309600"/>
           </a:xfrm>
           <a:prstGeom prst="rect">
             <a:avLst/>
@@ -9768,7 +9733,7 @@
         <p:spPr>
           <a:xfrm>
             <a:off x="6583680" y="2615040"/>
-            <a:ext cx="4617000" cy="1233720"/>
+            <a:ext cx="4616280" cy="1233000"/>
           </a:xfrm>
           <a:prstGeom prst="rect">
             <a:avLst/>
@@ -9829,7 +9794,7 @@
         <p:spPr>
           <a:xfrm>
             <a:off x="6583680" y="3877200"/>
-            <a:ext cx="4617000" cy="273600"/>
+            <a:ext cx="4616280" cy="272880"/>
           </a:xfrm>
           <a:prstGeom prst="rect">
             <a:avLst/>
@@ -9890,7 +9855,7 @@
         <p:spPr>
           <a:xfrm>
             <a:off x="640080" y="4526280"/>
-            <a:ext cx="10880640" cy="1188000"/>
+            <a:ext cx="10879920" cy="1187280"/>
           </a:xfrm>
           <a:prstGeom prst="roundRect">
             <a:avLst>
@@ -9945,7 +9910,7 @@
         <p:spPr>
           <a:xfrm>
             <a:off x="960120" y="4709160"/>
-            <a:ext cx="4571280" cy="273600"/>
+            <a:ext cx="4570560" cy="272880"/>
           </a:xfrm>
           <a:prstGeom prst="rect">
             <a:avLst/>
@@ -10006,7 +9971,7 @@
         <p:spPr>
           <a:xfrm>
             <a:off x="960120" y="5010840"/>
-            <a:ext cx="10240560" cy="602640"/>
+            <a:ext cx="10239840" cy="601920"/>
           </a:xfrm>
           <a:prstGeom prst="rect">
             <a:avLst/>
@@ -10104,7 +10069,7 @@
         <p:spPr>
           <a:xfrm>
             <a:off x="640080" y="311040"/>
-            <a:ext cx="7314480" cy="255240"/>
+            <a:ext cx="7313760" cy="254520"/>
           </a:xfrm>
           <a:prstGeom prst="rect">
             <a:avLst/>
@@ -10165,7 +10130,7 @@
         <p:spPr>
           <a:xfrm>
             <a:off x="640080" y="603360"/>
-            <a:ext cx="10880640" cy="657720"/>
+            <a:ext cx="10879920" cy="657000"/>
           </a:xfrm>
           <a:prstGeom prst="rect">
             <a:avLst/>
@@ -10226,7 +10191,7 @@
         <p:spPr>
           <a:xfrm>
             <a:off x="298440" y="1613520"/>
-            <a:ext cx="1112760" cy="1311480"/>
+            <a:ext cx="1112040" cy="1310760"/>
           </a:xfrm>
           <a:prstGeom prst="roundRect">
             <a:avLst>
@@ -10281,7 +10246,7 @@
         <p:spPr>
           <a:xfrm>
             <a:off x="298440" y="1733040"/>
-            <a:ext cx="1112760" cy="257400"/>
+            <a:ext cx="1112040" cy="256680"/>
           </a:xfrm>
           <a:prstGeom prst="rect">
             <a:avLst/>
@@ -10342,7 +10307,7 @@
         <p:spPr>
           <a:xfrm>
             <a:off x="338400" y="2011320"/>
-            <a:ext cx="1033200" cy="416520"/>
+            <a:ext cx="1032480" cy="415800"/>
           </a:xfrm>
           <a:prstGeom prst="rect">
             <a:avLst/>
@@ -10403,7 +10368,7 @@
         <p:spPr>
           <a:xfrm>
             <a:off x="328320" y="2448720"/>
-            <a:ext cx="1052640" cy="416880"/>
+            <a:ext cx="1051920" cy="416160"/>
           </a:xfrm>
           <a:prstGeom prst="rect">
             <a:avLst/>
@@ -10508,7 +10473,7 @@
         <p:spPr>
           <a:xfrm>
             <a:off x="1521000" y="1613520"/>
-            <a:ext cx="1112760" cy="1311480"/>
+            <a:ext cx="1112040" cy="1310760"/>
           </a:xfrm>
           <a:prstGeom prst="roundRect">
             <a:avLst>
@@ -10563,7 +10528,7 @@
         <p:spPr>
           <a:xfrm>
             <a:off x="1521000" y="1733040"/>
-            <a:ext cx="1112760" cy="257400"/>
+            <a:ext cx="1112040" cy="256680"/>
           </a:xfrm>
           <a:prstGeom prst="rect">
             <a:avLst/>
@@ -10624,7 +10589,7 @@
         <p:spPr>
           <a:xfrm>
             <a:off x="1560960" y="2011320"/>
-            <a:ext cx="1033200" cy="416520"/>
+            <a:ext cx="1032480" cy="415800"/>
           </a:xfrm>
           <a:prstGeom prst="rect">
             <a:avLst/>
@@ -10685,7 +10650,7 @@
         <p:spPr>
           <a:xfrm>
             <a:off x="1550880" y="2448720"/>
-            <a:ext cx="1052640" cy="416880"/>
+            <a:ext cx="1051920" cy="416160"/>
           </a:xfrm>
           <a:prstGeom prst="rect">
             <a:avLst/>
@@ -10790,7 +10755,7 @@
         <p:spPr>
           <a:xfrm>
             <a:off x="2743560" y="1613520"/>
-            <a:ext cx="1112760" cy="1311480"/>
+            <a:ext cx="1112040" cy="1310760"/>
           </a:xfrm>
           <a:prstGeom prst="roundRect">
             <a:avLst>
@@ -10845,7 +10810,7 @@
         <p:spPr>
           <a:xfrm>
             <a:off x="2743560" y="1733040"/>
-            <a:ext cx="1112760" cy="257400"/>
+            <a:ext cx="1112040" cy="256680"/>
           </a:xfrm>
           <a:prstGeom prst="rect">
             <a:avLst/>
@@ -10906,7 +10871,7 @@
         <p:spPr>
           <a:xfrm>
             <a:off x="2783520" y="2011320"/>
-            <a:ext cx="1033200" cy="416520"/>
+            <a:ext cx="1032480" cy="415800"/>
           </a:xfrm>
           <a:prstGeom prst="rect">
             <a:avLst/>
@@ -10967,7 +10932,7 @@
         <p:spPr>
           <a:xfrm>
             <a:off x="2773800" y="2448720"/>
-            <a:ext cx="1052640" cy="416880"/>
+            <a:ext cx="1051920" cy="416160"/>
           </a:xfrm>
           <a:prstGeom prst="rect">
             <a:avLst/>
@@ -11072,7 +11037,7 @@
         <p:spPr>
           <a:xfrm>
             <a:off x="3966840" y="1613520"/>
-            <a:ext cx="1112400" cy="1311480"/>
+            <a:ext cx="1111680" cy="1310760"/>
           </a:xfrm>
           <a:prstGeom prst="roundRect">
             <a:avLst>
@@ -11127,7 +11092,7 @@
         <p:spPr>
           <a:xfrm>
             <a:off x="3966840" y="1733040"/>
-            <a:ext cx="1112400" cy="257400"/>
+            <a:ext cx="1111680" cy="256680"/>
           </a:xfrm>
           <a:prstGeom prst="rect">
             <a:avLst/>
@@ -11188,7 +11153,7 @@
         <p:spPr>
           <a:xfrm>
             <a:off x="4006080" y="2011320"/>
-            <a:ext cx="1033200" cy="416520"/>
+            <a:ext cx="1032480" cy="415800"/>
           </a:xfrm>
           <a:prstGeom prst="rect">
             <a:avLst/>
@@ -11249,7 +11214,7 @@
         <p:spPr>
           <a:xfrm>
             <a:off x="3996360" y="2448720"/>
-            <a:ext cx="1053000" cy="416880"/>
+            <a:ext cx="1052280" cy="416160"/>
           </a:xfrm>
           <a:prstGeom prst="rect">
             <a:avLst/>
@@ -11354,7 +11319,7 @@
         <p:spPr>
           <a:xfrm>
             <a:off x="5189400" y="1613520"/>
-            <a:ext cx="1112400" cy="1311480"/>
+            <a:ext cx="1111680" cy="1310760"/>
           </a:xfrm>
           <a:prstGeom prst="roundRect">
             <a:avLst>
@@ -11409,7 +11374,7 @@
         <p:spPr>
           <a:xfrm>
             <a:off x="5189400" y="1733040"/>
-            <a:ext cx="1112400" cy="257400"/>
+            <a:ext cx="1111680" cy="256680"/>
           </a:xfrm>
           <a:prstGeom prst="rect">
             <a:avLst/>
@@ -11470,7 +11435,7 @@
         <p:spPr>
           <a:xfrm>
             <a:off x="5229000" y="2011320"/>
-            <a:ext cx="1033200" cy="416520"/>
+            <a:ext cx="1032480" cy="415800"/>
           </a:xfrm>
           <a:prstGeom prst="rect">
             <a:avLst/>
@@ -11531,7 +11496,7 @@
         <p:spPr>
           <a:xfrm>
             <a:off x="5218920" y="2448720"/>
-            <a:ext cx="1053000" cy="416880"/>
+            <a:ext cx="1052280" cy="416160"/>
           </a:xfrm>
           <a:prstGeom prst="rect">
             <a:avLst/>
@@ -11636,7 +11601,7 @@
         <p:spPr>
           <a:xfrm>
             <a:off x="6411960" y="1613520"/>
-            <a:ext cx="1112760" cy="1311480"/>
+            <a:ext cx="1112040" cy="1310760"/>
           </a:xfrm>
           <a:prstGeom prst="roundRect">
             <a:avLst>
@@ -11691,7 +11656,7 @@
         <p:spPr>
           <a:xfrm>
             <a:off x="6411960" y="1733040"/>
-            <a:ext cx="1112760" cy="257400"/>
+            <a:ext cx="1112040" cy="256680"/>
           </a:xfrm>
           <a:prstGeom prst="rect">
             <a:avLst/>
@@ -11752,7 +11717,7 @@
         <p:spPr>
           <a:xfrm>
             <a:off x="6451920" y="2011320"/>
-            <a:ext cx="1033200" cy="416520"/>
+            <a:ext cx="1032480" cy="415800"/>
           </a:xfrm>
           <a:prstGeom prst="rect">
             <a:avLst/>
@@ -11813,7 +11778,7 @@
         <p:spPr>
           <a:xfrm>
             <a:off x="6441480" y="2448720"/>
-            <a:ext cx="1053000" cy="416880"/>
+            <a:ext cx="1052280" cy="416160"/>
           </a:xfrm>
           <a:prstGeom prst="rect">
             <a:avLst/>
@@ -11874,7 +11839,7 @@
         <p:spPr>
           <a:xfrm>
             <a:off x="298440" y="3154320"/>
-            <a:ext cx="1112760" cy="1311480"/>
+            <a:ext cx="1112040" cy="1310760"/>
           </a:xfrm>
           <a:prstGeom prst="roundRect">
             <a:avLst>
@@ -11929,7 +11894,7 @@
         <p:spPr>
           <a:xfrm>
             <a:off x="298440" y="3273840"/>
-            <a:ext cx="1112760" cy="257400"/>
+            <a:ext cx="1112040" cy="256680"/>
           </a:xfrm>
           <a:prstGeom prst="rect">
             <a:avLst/>
@@ -11990,7 +11955,7 @@
         <p:spPr>
           <a:xfrm>
             <a:off x="338400" y="3551760"/>
-            <a:ext cx="1033200" cy="416880"/>
+            <a:ext cx="1032480" cy="416160"/>
           </a:xfrm>
           <a:prstGeom prst="rect">
             <a:avLst/>
@@ -12051,7 +12016,7 @@
         <p:spPr>
           <a:xfrm>
             <a:off x="328320" y="3989520"/>
-            <a:ext cx="1052640" cy="416880"/>
+            <a:ext cx="1051920" cy="416160"/>
           </a:xfrm>
           <a:prstGeom prst="rect">
             <a:avLst/>
@@ -12156,7 +12121,7 @@
         <p:spPr>
           <a:xfrm>
             <a:off x="1521000" y="3154320"/>
-            <a:ext cx="1112760" cy="1311480"/>
+            <a:ext cx="1112040" cy="1310760"/>
           </a:xfrm>
           <a:prstGeom prst="roundRect">
             <a:avLst>
@@ -12211,7 +12176,7 @@
         <p:spPr>
           <a:xfrm>
             <a:off x="1521000" y="3273840"/>
-            <a:ext cx="1112760" cy="257400"/>
+            <a:ext cx="1112040" cy="256680"/>
           </a:xfrm>
           <a:prstGeom prst="rect">
             <a:avLst/>
@@ -12272,7 +12237,7 @@
         <p:spPr>
           <a:xfrm>
             <a:off x="1560960" y="3551760"/>
-            <a:ext cx="1033200" cy="416880"/>
+            <a:ext cx="1032480" cy="416160"/>
           </a:xfrm>
           <a:prstGeom prst="rect">
             <a:avLst/>
@@ -12333,7 +12298,7 @@
         <p:spPr>
           <a:xfrm>
             <a:off x="1550880" y="3989520"/>
-            <a:ext cx="1052640" cy="416880"/>
+            <a:ext cx="1051920" cy="416160"/>
           </a:xfrm>
           <a:prstGeom prst="rect">
             <a:avLst/>
@@ -12438,7 +12403,7 @@
         <p:spPr>
           <a:xfrm>
             <a:off x="2743560" y="3154320"/>
-            <a:ext cx="1112760" cy="1311480"/>
+            <a:ext cx="1112040" cy="1310760"/>
           </a:xfrm>
           <a:prstGeom prst="roundRect">
             <a:avLst>
@@ -12493,7 +12458,7 @@
         <p:spPr>
           <a:xfrm>
             <a:off x="2743560" y="3273840"/>
-            <a:ext cx="1112760" cy="257400"/>
+            <a:ext cx="1112040" cy="256680"/>
           </a:xfrm>
           <a:prstGeom prst="rect">
             <a:avLst/>
@@ -12554,7 +12519,7 @@
         <p:spPr>
           <a:xfrm>
             <a:off x="2783520" y="3551760"/>
-            <a:ext cx="1033200" cy="416880"/>
+            <a:ext cx="1032480" cy="416160"/>
           </a:xfrm>
           <a:prstGeom prst="rect">
             <a:avLst/>
@@ -12615,7 +12580,7 @@
         <p:spPr>
           <a:xfrm>
             <a:off x="2773800" y="3989520"/>
-            <a:ext cx="1052640" cy="416880"/>
+            <a:ext cx="1051920" cy="416160"/>
           </a:xfrm>
           <a:prstGeom prst="rect">
             <a:avLst/>
@@ -12720,7 +12685,7 @@
         <p:spPr>
           <a:xfrm>
             <a:off x="3966840" y="3154320"/>
-            <a:ext cx="1112400" cy="1311480"/>
+            <a:ext cx="1111680" cy="1310760"/>
           </a:xfrm>
           <a:prstGeom prst="roundRect">
             <a:avLst>
@@ -12775,7 +12740,7 @@
         <p:spPr>
           <a:xfrm>
             <a:off x="3966840" y="3273840"/>
-            <a:ext cx="1112400" cy="257400"/>
+            <a:ext cx="1111680" cy="256680"/>
           </a:xfrm>
           <a:prstGeom prst="rect">
             <a:avLst/>
@@ -12836,7 +12801,7 @@
         <p:spPr>
           <a:xfrm>
             <a:off x="4006080" y="3551760"/>
-            <a:ext cx="1033200" cy="416880"/>
+            <a:ext cx="1032480" cy="416160"/>
           </a:xfrm>
           <a:prstGeom prst="rect">
             <a:avLst/>
@@ -12897,7 +12862,7 @@
         <p:spPr>
           <a:xfrm>
             <a:off x="3996360" y="3989520"/>
-            <a:ext cx="1053000" cy="416880"/>
+            <a:ext cx="1052280" cy="416160"/>
           </a:xfrm>
           <a:prstGeom prst="rect">
             <a:avLst/>
@@ -13002,7 +12967,7 @@
         <p:spPr>
           <a:xfrm>
             <a:off x="5189400" y="3154320"/>
-            <a:ext cx="1112400" cy="1311480"/>
+            <a:ext cx="1111680" cy="1310760"/>
           </a:xfrm>
           <a:prstGeom prst="roundRect">
             <a:avLst>
@@ -13057,7 +13022,7 @@
         <p:spPr>
           <a:xfrm>
             <a:off x="5189400" y="3273840"/>
-            <a:ext cx="1112400" cy="257400"/>
+            <a:ext cx="1111680" cy="256680"/>
           </a:xfrm>
           <a:prstGeom prst="rect">
             <a:avLst/>
@@ -13118,7 +13083,7 @@
         <p:spPr>
           <a:xfrm>
             <a:off x="5229000" y="3551760"/>
-            <a:ext cx="1033200" cy="416880"/>
+            <a:ext cx="1032480" cy="416160"/>
           </a:xfrm>
           <a:prstGeom prst="rect">
             <a:avLst/>
@@ -13179,7 +13144,7 @@
         <p:spPr>
           <a:xfrm>
             <a:off x="5218920" y="3989520"/>
-            <a:ext cx="1053000" cy="416880"/>
+            <a:ext cx="1052280" cy="416160"/>
           </a:xfrm>
           <a:prstGeom prst="rect">
             <a:avLst/>
@@ -13240,7 +13205,7 @@
         <p:spPr>
           <a:xfrm>
             <a:off x="7360920" y="3246120"/>
-            <a:ext cx="4159800" cy="1206360"/>
+            <a:ext cx="4159080" cy="1205640"/>
           </a:xfrm>
           <a:prstGeom prst="roundRect">
             <a:avLst>
@@ -13295,7 +13260,7 @@
         <p:spPr>
           <a:xfrm>
             <a:off x="7607880" y="3401640"/>
-            <a:ext cx="3656880" cy="273600"/>
+            <a:ext cx="3656160" cy="272880"/>
           </a:xfrm>
           <a:prstGeom prst="rect">
             <a:avLst/>
@@ -13356,7 +13321,7 @@
         <p:spPr>
           <a:xfrm>
             <a:off x="7607880" y="3694320"/>
-            <a:ext cx="3656880" cy="712440"/>
+            <a:ext cx="3656160" cy="711720"/>
           </a:xfrm>
           <a:prstGeom prst="rect">
             <a:avLst/>
@@ -13417,7 +13382,7 @@
         <p:spPr>
           <a:xfrm>
             <a:off x="640080" y="4846320"/>
-            <a:ext cx="10880640" cy="913680"/>
+            <a:ext cx="10879920" cy="912960"/>
           </a:xfrm>
           <a:prstGeom prst="roundRect">
             <a:avLst>
@@ -13472,7 +13437,7 @@
         <p:spPr>
           <a:xfrm>
             <a:off x="960120" y="5074920"/>
-            <a:ext cx="10240560" cy="502200"/>
+            <a:ext cx="10239840" cy="501480"/>
           </a:xfrm>
           <a:prstGeom prst="rect">
             <a:avLst/>
@@ -13570,7 +13535,7 @@
         <p:spPr>
           <a:xfrm>
             <a:off x="640080" y="311040"/>
-            <a:ext cx="7314480" cy="255240"/>
+            <a:ext cx="7313760" cy="254520"/>
           </a:xfrm>
           <a:prstGeom prst="rect">
             <a:avLst/>
@@ -13631,7 +13596,7 @@
         <p:spPr>
           <a:xfrm>
             <a:off x="640080" y="603360"/>
-            <a:ext cx="10880640" cy="657720"/>
+            <a:ext cx="10879920" cy="657000"/>
           </a:xfrm>
           <a:prstGeom prst="rect">
             <a:avLst/>
@@ -13692,7 +13657,7 @@
         <p:spPr>
           <a:xfrm>
             <a:off x="640080" y="1353240"/>
-            <a:ext cx="10880640" cy="383400"/>
+            <a:ext cx="10879920" cy="382680"/>
           </a:xfrm>
           <a:prstGeom prst="rect">
             <a:avLst/>
@@ -13753,7 +13718,7 @@
         <p:spPr>
           <a:xfrm>
             <a:off x="640080" y="2011680"/>
-            <a:ext cx="5348520" cy="2742480"/>
+            <a:ext cx="5347800" cy="2741760"/>
           </a:xfrm>
           <a:prstGeom prst="roundRect">
             <a:avLst>
@@ -13808,7 +13773,7 @@
         <p:spPr>
           <a:xfrm>
             <a:off x="960120" y="2212920"/>
-            <a:ext cx="3656880" cy="291960"/>
+            <a:ext cx="3656160" cy="291240"/>
           </a:xfrm>
           <a:prstGeom prst="rect">
             <a:avLst/>
@@ -13869,7 +13834,7 @@
         <p:spPr>
           <a:xfrm>
             <a:off x="960120" y="2615040"/>
-            <a:ext cx="1370880" cy="255240"/>
+            <a:ext cx="1370160" cy="254520"/>
           </a:xfrm>
           <a:prstGeom prst="rect">
             <a:avLst/>
@@ -13930,7 +13895,7 @@
         <p:spPr>
           <a:xfrm>
             <a:off x="2423160" y="2615040"/>
-            <a:ext cx="3291120" cy="255240"/>
+            <a:ext cx="3290400" cy="254520"/>
           </a:xfrm>
           <a:prstGeom prst="rect">
             <a:avLst/>
@@ -13991,7 +13956,7 @@
         <p:spPr>
           <a:xfrm>
             <a:off x="960120" y="3090600"/>
-            <a:ext cx="1370880" cy="255240"/>
+            <a:ext cx="1370160" cy="254520"/>
           </a:xfrm>
           <a:prstGeom prst="rect">
             <a:avLst/>
@@ -14052,7 +14017,7 @@
         <p:spPr>
           <a:xfrm>
             <a:off x="2423160" y="3090600"/>
-            <a:ext cx="3291120" cy="255240"/>
+            <a:ext cx="3290400" cy="254520"/>
           </a:xfrm>
           <a:prstGeom prst="rect">
             <a:avLst/>
@@ -14113,7 +14078,7 @@
         <p:spPr>
           <a:xfrm>
             <a:off x="960120" y="3566160"/>
-            <a:ext cx="1370880" cy="255240"/>
+            <a:ext cx="1370160" cy="254520"/>
           </a:xfrm>
           <a:prstGeom prst="rect">
             <a:avLst/>
@@ -14174,7 +14139,7 @@
         <p:spPr>
           <a:xfrm>
             <a:off x="2423160" y="3566160"/>
-            <a:ext cx="3291120" cy="255240"/>
+            <a:ext cx="3290400" cy="254520"/>
           </a:xfrm>
           <a:prstGeom prst="rect">
             <a:avLst/>
@@ -14235,7 +14200,7 @@
         <p:spPr>
           <a:xfrm>
             <a:off x="960120" y="4041720"/>
-            <a:ext cx="1370880" cy="255240"/>
+            <a:ext cx="1370160" cy="254520"/>
           </a:xfrm>
           <a:prstGeom prst="rect">
             <a:avLst/>
@@ -14296,7 +14261,7 @@
         <p:spPr>
           <a:xfrm>
             <a:off x="2423160" y="4041720"/>
-            <a:ext cx="3291120" cy="255240"/>
+            <a:ext cx="3290400" cy="254520"/>
           </a:xfrm>
           <a:prstGeom prst="rect">
             <a:avLst/>
@@ -14357,7 +14322,7 @@
         <p:spPr>
           <a:xfrm>
             <a:off x="6263640" y="2011680"/>
-            <a:ext cx="5257080" cy="2742480"/>
+            <a:ext cx="5256360" cy="2741760"/>
           </a:xfrm>
           <a:prstGeom prst="roundRect">
             <a:avLst>
@@ -14412,7 +14377,7 @@
         <p:spPr>
           <a:xfrm>
             <a:off x="6583680" y="2212920"/>
-            <a:ext cx="3656880" cy="291960"/>
+            <a:ext cx="3656160" cy="291240"/>
           </a:xfrm>
           <a:prstGeom prst="rect">
             <a:avLst/>
@@ -14473,7 +14438,7 @@
         <p:spPr>
           <a:xfrm>
             <a:off x="6583680" y="2615040"/>
-            <a:ext cx="1370880" cy="255240"/>
+            <a:ext cx="1370160" cy="254520"/>
           </a:xfrm>
           <a:prstGeom prst="rect">
             <a:avLst/>
@@ -14534,7 +14499,7 @@
         <p:spPr>
           <a:xfrm>
             <a:off x="8046720" y="2615040"/>
-            <a:ext cx="3199680" cy="255240"/>
+            <a:ext cx="3198960" cy="254520"/>
           </a:xfrm>
           <a:prstGeom prst="rect">
             <a:avLst/>
@@ -14595,7 +14560,7 @@
         <p:spPr>
           <a:xfrm>
             <a:off x="6583680" y="3090600"/>
-            <a:ext cx="1370880" cy="255240"/>
+            <a:ext cx="1370160" cy="254520"/>
           </a:xfrm>
           <a:prstGeom prst="rect">
             <a:avLst/>
@@ -14656,7 +14621,7 @@
         <p:spPr>
           <a:xfrm>
             <a:off x="8046720" y="3090600"/>
-            <a:ext cx="3199680" cy="255240"/>
+            <a:ext cx="3198960" cy="254520"/>
           </a:xfrm>
           <a:prstGeom prst="rect">
             <a:avLst/>
@@ -14717,7 +14682,7 @@
         <p:spPr>
           <a:xfrm>
             <a:off x="6583680" y="3566160"/>
-            <a:ext cx="1370880" cy="255240"/>
+            <a:ext cx="1370160" cy="254520"/>
           </a:xfrm>
           <a:prstGeom prst="rect">
             <a:avLst/>
@@ -14778,7 +14743,7 @@
         <p:spPr>
           <a:xfrm>
             <a:off x="8046720" y="3566160"/>
-            <a:ext cx="3199680" cy="255240"/>
+            <a:ext cx="3198960" cy="254520"/>
           </a:xfrm>
           <a:prstGeom prst="rect">
             <a:avLst/>
@@ -14839,7 +14804,7 @@
         <p:spPr>
           <a:xfrm>
             <a:off x="6583680" y="4041720"/>
-            <a:ext cx="1370880" cy="255240"/>
+            <a:ext cx="1370160" cy="254520"/>
           </a:xfrm>
           <a:prstGeom prst="rect">
             <a:avLst/>
@@ -14900,7 +14865,7 @@
         <p:spPr>
           <a:xfrm>
             <a:off x="8046720" y="4041720"/>
-            <a:ext cx="3199680" cy="255240"/>
+            <a:ext cx="3198960" cy="254520"/>
           </a:xfrm>
           <a:prstGeom prst="rect">
             <a:avLst/>
@@ -14961,7 +14926,7 @@
         <p:spPr>
           <a:xfrm>
             <a:off x="640080" y="4983480"/>
-            <a:ext cx="10880640" cy="959400"/>
+            <a:ext cx="10879920" cy="958680"/>
           </a:xfrm>
           <a:prstGeom prst="roundRect">
             <a:avLst>
@@ -15016,7 +14981,7 @@
         <p:spPr>
           <a:xfrm>
             <a:off x="960120" y="5212080"/>
-            <a:ext cx="10240560" cy="529560"/>
+            <a:ext cx="10239840" cy="528840"/>
           </a:xfrm>
           <a:prstGeom prst="rect">
             <a:avLst/>
@@ -15114,7 +15079,7 @@
         <p:spPr>
           <a:xfrm>
             <a:off x="640080" y="311040"/>
-            <a:ext cx="7314480" cy="255240"/>
+            <a:ext cx="7313760" cy="254520"/>
           </a:xfrm>
           <a:prstGeom prst="rect">
             <a:avLst/>
@@ -15175,7 +15140,7 @@
         <p:spPr>
           <a:xfrm>
             <a:off x="640080" y="603360"/>
-            <a:ext cx="10880640" cy="657720"/>
+            <a:ext cx="10879920" cy="657000"/>
           </a:xfrm>
           <a:prstGeom prst="rect">
             <a:avLst/>
@@ -15236,7 +15201,7 @@
         <p:spPr>
           <a:xfrm>
             <a:off x="640080" y="1353240"/>
-            <a:ext cx="10880640" cy="383400"/>
+            <a:ext cx="10879920" cy="382680"/>
           </a:xfrm>
           <a:prstGeom prst="rect">
             <a:avLst/>
@@ -15297,7 +15262,7 @@
         <p:spPr>
           <a:xfrm>
             <a:off x="640080" y="2030040"/>
-            <a:ext cx="10880640" cy="547920"/>
+            <a:ext cx="10879920" cy="547200"/>
           </a:xfrm>
           <a:prstGeom prst="roundRect">
             <a:avLst>
@@ -15352,7 +15317,7 @@
         <p:spPr>
           <a:xfrm>
             <a:off x="932760" y="2167200"/>
-            <a:ext cx="2651040" cy="273600"/>
+            <a:ext cx="2650320" cy="272880"/>
           </a:xfrm>
           <a:prstGeom prst="rect">
             <a:avLst/>
@@ -15413,7 +15378,7 @@
         <p:spPr>
           <a:xfrm>
             <a:off x="3749040" y="2176200"/>
-            <a:ext cx="7314480" cy="273600"/>
+            <a:ext cx="7313760" cy="272880"/>
           </a:xfrm>
           <a:prstGeom prst="rect">
             <a:avLst/>
@@ -15474,7 +15439,7 @@
         <p:spPr>
           <a:xfrm>
             <a:off x="640080" y="2651760"/>
-            <a:ext cx="10880640" cy="547920"/>
+            <a:ext cx="10879920" cy="547200"/>
           </a:xfrm>
           <a:prstGeom prst="roundRect">
             <a:avLst>
@@ -15529,7 +15494,7 @@
         <p:spPr>
           <a:xfrm>
             <a:off x="932760" y="2788920"/>
-            <a:ext cx="2651040" cy="273600"/>
+            <a:ext cx="2650320" cy="272880"/>
           </a:xfrm>
           <a:prstGeom prst="rect">
             <a:avLst/>
@@ -15590,7 +15555,7 @@
         <p:spPr>
           <a:xfrm>
             <a:off x="3749040" y="2797920"/>
-            <a:ext cx="7314480" cy="273600"/>
+            <a:ext cx="7313760" cy="272880"/>
           </a:xfrm>
           <a:prstGeom prst="rect">
             <a:avLst/>
@@ -15651,7 +15616,7 @@
         <p:spPr>
           <a:xfrm>
             <a:off x="640080" y="3273480"/>
-            <a:ext cx="10880640" cy="547920"/>
+            <a:ext cx="10879920" cy="547200"/>
           </a:xfrm>
           <a:prstGeom prst="roundRect">
             <a:avLst>
@@ -15706,7 +15671,7 @@
         <p:spPr>
           <a:xfrm>
             <a:off x="932760" y="3410640"/>
-            <a:ext cx="2651040" cy="273600"/>
+            <a:ext cx="2650320" cy="272880"/>
           </a:xfrm>
           <a:prstGeom prst="rect">
             <a:avLst/>
@@ -15767,7 +15732,7 @@
         <p:spPr>
           <a:xfrm>
             <a:off x="3749040" y="3420000"/>
-            <a:ext cx="7314480" cy="273600"/>
+            <a:ext cx="7313760" cy="272880"/>
           </a:xfrm>
           <a:prstGeom prst="rect">
             <a:avLst/>
@@ -15828,7 +15793,7 @@
         <p:spPr>
           <a:xfrm>
             <a:off x="640080" y="3895200"/>
-            <a:ext cx="10880640" cy="547920"/>
+            <a:ext cx="10879920" cy="547200"/>
           </a:xfrm>
           <a:prstGeom prst="roundRect">
             <a:avLst>
@@ -15883,7 +15848,7 @@
         <p:spPr>
           <a:xfrm>
             <a:off x="932760" y="4032360"/>
-            <a:ext cx="2651040" cy="273600"/>
+            <a:ext cx="2650320" cy="272880"/>
           </a:xfrm>
           <a:prstGeom prst="rect">
             <a:avLst/>
@@ -15944,7 +15909,7 @@
         <p:spPr>
           <a:xfrm>
             <a:off x="3749040" y="4041720"/>
-            <a:ext cx="7314480" cy="273600"/>
+            <a:ext cx="7313760" cy="272880"/>
           </a:xfrm>
           <a:prstGeom prst="rect">
             <a:avLst/>
@@ -16005,7 +15970,7 @@
         <p:spPr>
           <a:xfrm>
             <a:off x="640080" y="4517280"/>
-            <a:ext cx="10880640" cy="547920"/>
+            <a:ext cx="10879920" cy="547200"/>
           </a:xfrm>
           <a:prstGeom prst="roundRect">
             <a:avLst>
@@ -16060,7 +16025,7 @@
         <p:spPr>
           <a:xfrm>
             <a:off x="932760" y="4654440"/>
-            <a:ext cx="2651040" cy="273600"/>
+            <a:ext cx="2650320" cy="272880"/>
           </a:xfrm>
           <a:prstGeom prst="rect">
             <a:avLst/>
@@ -16121,7 +16086,7 @@
         <p:spPr>
           <a:xfrm>
             <a:off x="3749040" y="4663440"/>
-            <a:ext cx="7314480" cy="273600"/>
+            <a:ext cx="7313760" cy="272880"/>
           </a:xfrm>
           <a:prstGeom prst="rect">
             <a:avLst/>
@@ -16182,7 +16147,7 @@
         <p:spPr>
           <a:xfrm>
             <a:off x="640080" y="5139000"/>
-            <a:ext cx="10880640" cy="547920"/>
+            <a:ext cx="10879920" cy="547200"/>
           </a:xfrm>
           <a:prstGeom prst="roundRect">
             <a:avLst>
@@ -16237,7 +16202,7 @@
         <p:spPr>
           <a:xfrm>
             <a:off x="932760" y="5276160"/>
-            <a:ext cx="2651040" cy="273600"/>
+            <a:ext cx="2650320" cy="272880"/>
           </a:xfrm>
           <a:prstGeom prst="rect">
             <a:avLst/>
@@ -16298,7 +16263,7 @@
         <p:spPr>
           <a:xfrm>
             <a:off x="3749040" y="5285160"/>
-            <a:ext cx="7314480" cy="273600"/>
+            <a:ext cx="7313760" cy="272880"/>
           </a:xfrm>
           <a:prstGeom prst="rect">
             <a:avLst/>
@@ -16359,7 +16324,7 @@
         <p:spPr>
           <a:xfrm>
             <a:off x="640080" y="5760720"/>
-            <a:ext cx="10880640" cy="547920"/>
+            <a:ext cx="10879920" cy="547200"/>
           </a:xfrm>
           <a:prstGeom prst="roundRect">
             <a:avLst>
@@ -16414,7 +16379,7 @@
         <p:spPr>
           <a:xfrm>
             <a:off x="932760" y="5897880"/>
-            <a:ext cx="2651040" cy="273600"/>
+            <a:ext cx="2650320" cy="272880"/>
           </a:xfrm>
           <a:prstGeom prst="rect">
             <a:avLst/>
@@ -16475,7 +16440,7 @@
         <p:spPr>
           <a:xfrm>
             <a:off x="3749040" y="5906880"/>
-            <a:ext cx="7314480" cy="273600"/>
+            <a:ext cx="7313760" cy="272880"/>
           </a:xfrm>
           <a:prstGeom prst="rect">
             <a:avLst/>
@@ -16536,7 +16501,7 @@
         <p:spPr>
           <a:xfrm>
             <a:off x="640080" y="6291000"/>
-            <a:ext cx="10880640" cy="273600"/>
+            <a:ext cx="10879920" cy="272880"/>
           </a:xfrm>
           <a:prstGeom prst="rect">
             <a:avLst/>
@@ -16614,7 +16579,7 @@
         <p:spPr>
           <a:xfrm>
             <a:off x="640080" y="311040"/>
-            <a:ext cx="7314480" cy="255240"/>
+            <a:ext cx="7313760" cy="254520"/>
           </a:xfrm>
           <a:prstGeom prst="rect">
             <a:avLst/>
@@ -16675,7 +16640,7 @@
         <p:spPr>
           <a:xfrm>
             <a:off x="640080" y="603360"/>
-            <a:ext cx="10880640" cy="657720"/>
+            <a:ext cx="10879920" cy="657000"/>
           </a:xfrm>
           <a:prstGeom prst="rect">
             <a:avLst/>
@@ -16736,7 +16701,7 @@
         <p:spPr>
           <a:xfrm>
             <a:off x="640080" y="1691640"/>
-            <a:ext cx="3199680" cy="1370880"/>
+            <a:ext cx="3198960" cy="1370160"/>
           </a:xfrm>
           <a:prstGeom prst="roundRect">
             <a:avLst>
@@ -16791,7 +16756,7 @@
         <p:spPr>
           <a:xfrm>
             <a:off x="640080" y="1874520"/>
-            <a:ext cx="3199680" cy="273600"/>
+            <a:ext cx="3198960" cy="272880"/>
           </a:xfrm>
           <a:prstGeom prst="rect">
             <a:avLst/>
@@ -16852,7 +16817,7 @@
         <p:spPr>
           <a:xfrm>
             <a:off x="777240" y="2194560"/>
-            <a:ext cx="2925360" cy="547920"/>
+            <a:ext cx="2924640" cy="547200"/>
           </a:xfrm>
           <a:prstGeom prst="rect">
             <a:avLst/>
@@ -16987,7 +16952,7 @@
         <p:spPr>
           <a:xfrm>
             <a:off x="3858840" y="2450520"/>
-            <a:ext cx="1242720" cy="456480"/>
+            <a:ext cx="1242000" cy="455760"/>
           </a:xfrm>
           <a:prstGeom prst="rect">
             <a:avLst/>
@@ -17078,7 +17043,7 @@
         <p:spPr>
           <a:xfrm>
             <a:off x="5120640" y="1691640"/>
-            <a:ext cx="3199680" cy="1370880"/>
+            <a:ext cx="3198960" cy="1370160"/>
           </a:xfrm>
           <a:prstGeom prst="roundRect">
             <a:avLst>
@@ -17133,7 +17098,7 @@
         <p:spPr>
           <a:xfrm>
             <a:off x="5120640" y="1874520"/>
-            <a:ext cx="3199680" cy="273600"/>
+            <a:ext cx="3198960" cy="272880"/>
           </a:xfrm>
           <a:prstGeom prst="rect">
             <a:avLst/>
@@ -17194,7 +17159,7 @@
         <p:spPr>
           <a:xfrm>
             <a:off x="5257800" y="2194560"/>
-            <a:ext cx="2925360" cy="547920"/>
+            <a:ext cx="2924640" cy="547200"/>
           </a:xfrm>
           <a:prstGeom prst="rect">
             <a:avLst/>
@@ -17329,7 +17294,7 @@
         <p:spPr>
           <a:xfrm>
             <a:off x="9189720" y="1691640"/>
-            <a:ext cx="2331000" cy="1370880"/>
+            <a:ext cx="2330280" cy="1370160"/>
           </a:xfrm>
           <a:prstGeom prst="roundRect">
             <a:avLst>
@@ -17384,7 +17349,7 @@
         <p:spPr>
           <a:xfrm>
             <a:off x="9189720" y="1874520"/>
-            <a:ext cx="2331000" cy="273600"/>
+            <a:ext cx="2330280" cy="272880"/>
           </a:xfrm>
           <a:prstGeom prst="rect">
             <a:avLst/>
@@ -17445,7 +17410,7 @@
         <p:spPr>
           <a:xfrm>
             <a:off x="9326880" y="2194560"/>
-            <a:ext cx="2056680" cy="547920"/>
+            <a:ext cx="2055960" cy="547200"/>
           </a:xfrm>
           <a:prstGeom prst="rect">
             <a:avLst/>
@@ -17536,7 +17501,7 @@
         <p:spPr>
           <a:xfrm>
             <a:off x="640080" y="3383280"/>
-            <a:ext cx="10880640" cy="776520"/>
+            <a:ext cx="10879920" cy="775800"/>
           </a:xfrm>
           <a:prstGeom prst="roundRect">
             <a:avLst>
@@ -17591,7 +17556,7 @@
         <p:spPr>
           <a:xfrm>
             <a:off x="932760" y="3502080"/>
-            <a:ext cx="3016800" cy="255240"/>
+            <a:ext cx="3016080" cy="254520"/>
           </a:xfrm>
           <a:prstGeom prst="rect">
             <a:avLst/>
@@ -17652,7 +17617,7 @@
         <p:spPr>
           <a:xfrm>
             <a:off x="932760" y="3776400"/>
-            <a:ext cx="10295280" cy="310320"/>
+            <a:ext cx="10294560" cy="309600"/>
           </a:xfrm>
           <a:prstGeom prst="rect">
             <a:avLst/>
@@ -17713,7 +17678,7 @@
         <p:spPr>
           <a:xfrm>
             <a:off x="640080" y="4251960"/>
-            <a:ext cx="10880640" cy="776520"/>
+            <a:ext cx="10879920" cy="775800"/>
           </a:xfrm>
           <a:prstGeom prst="roundRect">
             <a:avLst>
@@ -17768,7 +17733,7 @@
         <p:spPr>
           <a:xfrm>
             <a:off x="932760" y="4370760"/>
-            <a:ext cx="3016800" cy="255240"/>
+            <a:ext cx="3016080" cy="254520"/>
           </a:xfrm>
           <a:prstGeom prst="rect">
             <a:avLst/>
@@ -17829,7 +17794,7 @@
         <p:spPr>
           <a:xfrm>
             <a:off x="932760" y="4645080"/>
-            <a:ext cx="10295280" cy="310320"/>
+            <a:ext cx="10294560" cy="309600"/>
           </a:xfrm>
           <a:prstGeom prst="rect">
             <a:avLst/>
@@ -17890,7 +17855,7 @@
         <p:spPr>
           <a:xfrm>
             <a:off x="640080" y="5120640"/>
-            <a:ext cx="10880640" cy="776520"/>
+            <a:ext cx="10879920" cy="775800"/>
           </a:xfrm>
           <a:prstGeom prst="roundRect">
             <a:avLst>
@@ -17945,7 +17910,7 @@
         <p:spPr>
           <a:xfrm>
             <a:off x="932760" y="5239440"/>
-            <a:ext cx="3016800" cy="255240"/>
+            <a:ext cx="3016080" cy="254520"/>
           </a:xfrm>
           <a:prstGeom prst="rect">
             <a:avLst/>
@@ -18006,7 +17971,7 @@
         <p:spPr>
           <a:xfrm>
             <a:off x="932760" y="5513760"/>
-            <a:ext cx="10295280" cy="310320"/>
+            <a:ext cx="10294560" cy="309600"/>
           </a:xfrm>
           <a:prstGeom prst="rect">
             <a:avLst/>
@@ -18104,7 +18069,7 @@
         <p:spPr>
           <a:xfrm>
             <a:off x="640080" y="311040"/>
-            <a:ext cx="7314480" cy="255240"/>
+            <a:ext cx="7313760" cy="254520"/>
           </a:xfrm>
           <a:prstGeom prst="rect">
             <a:avLst/>
@@ -18165,7 +18130,7 @@
         <p:spPr>
           <a:xfrm>
             <a:off x="640080" y="603360"/>
-            <a:ext cx="10880640" cy="657720"/>
+            <a:ext cx="10879920" cy="657000"/>
           </a:xfrm>
           <a:prstGeom prst="rect">
             <a:avLst/>
@@ -18226,7 +18191,7 @@
         <p:spPr>
           <a:xfrm>
             <a:off x="640080" y="1645920"/>
-            <a:ext cx="10880640" cy="1325160"/>
+            <a:ext cx="10879920" cy="1324440"/>
           </a:xfrm>
           <a:prstGeom prst="roundRect">
             <a:avLst>
@@ -18281,7 +18246,7 @@
         <p:spPr>
           <a:xfrm>
             <a:off x="960120" y="1828800"/>
-            <a:ext cx="3839760" cy="291960"/>
+            <a:ext cx="3839040" cy="291240"/>
           </a:xfrm>
           <a:prstGeom prst="rect">
             <a:avLst/>
@@ -18342,7 +18307,7 @@
         <p:spPr>
           <a:xfrm>
             <a:off x="9692640" y="1847160"/>
-            <a:ext cx="1462320" cy="273600"/>
+            <a:ext cx="1461600" cy="272880"/>
           </a:xfrm>
           <a:prstGeom prst="rect">
             <a:avLst/>
@@ -18403,7 +18368,7 @@
         <p:spPr>
           <a:xfrm>
             <a:off x="960120" y="2176200"/>
-            <a:ext cx="9966240" cy="657720"/>
+            <a:ext cx="9965520" cy="657000"/>
           </a:xfrm>
           <a:prstGeom prst="rect">
             <a:avLst/>
@@ -18464,7 +18429,7 @@
         <p:spPr>
           <a:xfrm>
             <a:off x="640080" y="3108960"/>
-            <a:ext cx="10880640" cy="1325160"/>
+            <a:ext cx="10879920" cy="1324440"/>
           </a:xfrm>
           <a:prstGeom prst="roundRect">
             <a:avLst>
@@ -18519,7 +18484,7 @@
         <p:spPr>
           <a:xfrm>
             <a:off x="960120" y="3291840"/>
-            <a:ext cx="3839760" cy="291960"/>
+            <a:ext cx="3839040" cy="291240"/>
           </a:xfrm>
           <a:prstGeom prst="rect">
             <a:avLst/>
@@ -18580,7 +18545,7 @@
         <p:spPr>
           <a:xfrm>
             <a:off x="9692640" y="3310200"/>
-            <a:ext cx="1462320" cy="273600"/>
+            <a:ext cx="1461600" cy="272880"/>
           </a:xfrm>
           <a:prstGeom prst="rect">
             <a:avLst/>
@@ -18641,7 +18606,7 @@
         <p:spPr>
           <a:xfrm>
             <a:off x="960120" y="3639240"/>
-            <a:ext cx="10240920" cy="657720"/>
+            <a:ext cx="10240200" cy="657000"/>
           </a:xfrm>
           <a:prstGeom prst="rect">
             <a:avLst/>
@@ -18702,7 +18667,7 @@
         <p:spPr>
           <a:xfrm>
             <a:off x="640080" y="4572000"/>
-            <a:ext cx="10880640" cy="1325160"/>
+            <a:ext cx="10879920" cy="1324440"/>
           </a:xfrm>
           <a:prstGeom prst="roundRect">
             <a:avLst>
@@ -18757,7 +18722,7 @@
         <p:spPr>
           <a:xfrm>
             <a:off x="960120" y="4754880"/>
-            <a:ext cx="3839760" cy="291960"/>
+            <a:ext cx="3839040" cy="291240"/>
           </a:xfrm>
           <a:prstGeom prst="rect">
             <a:avLst/>
@@ -18818,7 +18783,7 @@
         <p:spPr>
           <a:xfrm>
             <a:off x="9692640" y="4773240"/>
-            <a:ext cx="1462320" cy="273600"/>
+            <a:ext cx="1461600" cy="272880"/>
           </a:xfrm>
           <a:prstGeom prst="rect">
             <a:avLst/>
@@ -18879,7 +18844,7 @@
         <p:spPr>
           <a:xfrm>
             <a:off x="960120" y="5102280"/>
-            <a:ext cx="9966240" cy="657720"/>
+            <a:ext cx="9965520" cy="657000"/>
           </a:xfrm>
           <a:prstGeom prst="rect">
             <a:avLst/>
@@ -18977,7 +18942,7 @@
         <p:spPr>
           <a:xfrm>
             <a:off x="640080" y="311040"/>
-            <a:ext cx="7314480" cy="255240"/>
+            <a:ext cx="7313760" cy="254520"/>
           </a:xfrm>
           <a:prstGeom prst="rect">
             <a:avLst/>
@@ -19038,7 +19003,7 @@
         <p:spPr>
           <a:xfrm>
             <a:off x="640080" y="603360"/>
-            <a:ext cx="10880640" cy="657720"/>
+            <a:ext cx="10879920" cy="657000"/>
           </a:xfrm>
           <a:prstGeom prst="rect">
             <a:avLst/>
@@ -19099,7 +19064,7 @@
         <p:spPr>
           <a:xfrm>
             <a:off x="640080" y="1627560"/>
-            <a:ext cx="6765840" cy="2148120"/>
+            <a:ext cx="6765120" cy="2147400"/>
           </a:xfrm>
           <a:prstGeom prst="roundRect">
             <a:avLst>
@@ -19154,7 +19119,7 @@
         <p:spPr>
           <a:xfrm>
             <a:off x="914400" y="1783080"/>
-            <a:ext cx="4571280" cy="273600"/>
+            <a:ext cx="4570560" cy="272880"/>
           </a:xfrm>
           <a:prstGeom prst="rect">
             <a:avLst/>
@@ -19215,7 +19180,7 @@
         <p:spPr>
           <a:xfrm>
             <a:off x="932760" y="2219040"/>
-            <a:ext cx="295200" cy="295200"/>
+            <a:ext cx="294480" cy="294480"/>
           </a:xfrm>
           <a:prstGeom prst="ellipse">
             <a:avLst/>
@@ -19261,7 +19226,7 @@
         <p:spPr>
           <a:xfrm>
             <a:off x="932760" y="2219040"/>
-            <a:ext cx="295200" cy="295200"/>
+            <a:ext cx="294480" cy="294480"/>
           </a:xfrm>
           <a:prstGeom prst="rect">
             <a:avLst/>
@@ -19322,7 +19287,7 @@
         <p:spPr>
           <a:xfrm>
             <a:off x="1446480" y="2200680"/>
-            <a:ext cx="5668560" cy="273600"/>
+            <a:ext cx="5667840" cy="272880"/>
           </a:xfrm>
           <a:prstGeom prst="rect">
             <a:avLst/>
@@ -19383,7 +19348,7 @@
         <p:spPr>
           <a:xfrm>
             <a:off x="939240" y="2636640"/>
-            <a:ext cx="295200" cy="295200"/>
+            <a:ext cx="294480" cy="294480"/>
           </a:xfrm>
           <a:prstGeom prst="ellipse">
             <a:avLst/>
@@ -19429,7 +19394,7 @@
         <p:spPr>
           <a:xfrm>
             <a:off x="939240" y="2636640"/>
-            <a:ext cx="295200" cy="295200"/>
+            <a:ext cx="294480" cy="294480"/>
           </a:xfrm>
           <a:prstGeom prst="rect">
             <a:avLst/>
@@ -19490,7 +19455,7 @@
         <p:spPr>
           <a:xfrm>
             <a:off x="1446480" y="2603160"/>
-            <a:ext cx="5668560" cy="273600"/>
+            <a:ext cx="5667840" cy="272880"/>
           </a:xfrm>
           <a:prstGeom prst="rect">
             <a:avLst/>
@@ -19551,7 +19516,7 @@
         <p:spPr>
           <a:xfrm>
             <a:off x="951840" y="3014640"/>
-            <a:ext cx="295200" cy="295200"/>
+            <a:ext cx="294480" cy="294480"/>
           </a:xfrm>
           <a:prstGeom prst="ellipse">
             <a:avLst/>
@@ -19597,7 +19562,7 @@
         <p:spPr>
           <a:xfrm>
             <a:off x="951840" y="3014640"/>
-            <a:ext cx="295200" cy="295200"/>
+            <a:ext cx="294480" cy="294480"/>
           </a:xfrm>
           <a:prstGeom prst="rect">
             <a:avLst/>
@@ -19658,7 +19623,7 @@
         <p:spPr>
           <a:xfrm>
             <a:off x="1446480" y="3005280"/>
-            <a:ext cx="5668560" cy="273600"/>
+            <a:ext cx="5667840" cy="272880"/>
           </a:xfrm>
           <a:prstGeom prst="rect">
             <a:avLst/>
@@ -19719,7 +19684,7 @@
         <p:spPr>
           <a:xfrm>
             <a:off x="951840" y="3393000"/>
-            <a:ext cx="295200" cy="295200"/>
+            <a:ext cx="294480" cy="294480"/>
           </a:xfrm>
           <a:prstGeom prst="ellipse">
             <a:avLst/>
@@ -19765,7 +19730,7 @@
         <p:spPr>
           <a:xfrm>
             <a:off x="951840" y="3393000"/>
-            <a:ext cx="295200" cy="295200"/>
+            <a:ext cx="294480" cy="294480"/>
           </a:xfrm>
           <a:prstGeom prst="rect">
             <a:avLst/>
@@ -19826,7 +19791,7 @@
         <p:spPr>
           <a:xfrm>
             <a:off x="1446480" y="3407760"/>
-            <a:ext cx="5668560" cy="273600"/>
+            <a:ext cx="5667840" cy="272880"/>
           </a:xfrm>
           <a:prstGeom prst="rect">
             <a:avLst/>
@@ -19887,7 +19852,7 @@
         <p:spPr>
           <a:xfrm>
             <a:off x="7680960" y="1627560"/>
-            <a:ext cx="3839760" cy="2148120"/>
+            <a:ext cx="3839040" cy="2147400"/>
           </a:xfrm>
           <a:prstGeom prst="roundRect">
             <a:avLst>
@@ -19942,7 +19907,7 @@
         <p:spPr>
           <a:xfrm>
             <a:off x="7955280" y="1783080"/>
-            <a:ext cx="3291120" cy="273600"/>
+            <a:ext cx="3290400" cy="272880"/>
           </a:xfrm>
           <a:prstGeom prst="rect">
             <a:avLst/>
@@ -20003,7 +19968,7 @@
         <p:spPr>
           <a:xfrm>
             <a:off x="7955280" y="2148840"/>
-            <a:ext cx="3291120" cy="1096560"/>
+            <a:ext cx="3290400" cy="1095840"/>
           </a:xfrm>
           <a:prstGeom prst="rect">
             <a:avLst/>
@@ -20154,7 +20119,7 @@
         <p:spPr>
           <a:xfrm>
             <a:off x="7955280" y="3310200"/>
-            <a:ext cx="3291120" cy="310320"/>
+            <a:ext cx="3290400" cy="309600"/>
           </a:xfrm>
           <a:prstGeom prst="rect">
             <a:avLst/>
@@ -20215,7 +20180,7 @@
         <p:spPr>
           <a:xfrm>
             <a:off x="640080" y="3977640"/>
-            <a:ext cx="10880640" cy="1736640"/>
+            <a:ext cx="10879920" cy="1735920"/>
           </a:xfrm>
           <a:prstGeom prst="roundRect">
             <a:avLst>
@@ -20270,7 +20235,7 @@
         <p:spPr>
           <a:xfrm>
             <a:off x="960120" y="4160520"/>
-            <a:ext cx="4571280" cy="273600"/>
+            <a:ext cx="4570560" cy="272880"/>
           </a:xfrm>
           <a:prstGeom prst="rect">
             <a:avLst/>
@@ -20331,7 +20296,7 @@
         <p:spPr>
           <a:xfrm>
             <a:off x="960120" y="4480560"/>
-            <a:ext cx="10240560" cy="1142280"/>
+            <a:ext cx="10239840" cy="1141560"/>
           </a:xfrm>
           <a:prstGeom prst="rect">
             <a:avLst/>
@@ -20477,7 +20442,7 @@
         <p:spPr>
           <a:xfrm>
             <a:off x="640080" y="311040"/>
-            <a:ext cx="7314480" cy="255240"/>
+            <a:ext cx="7313760" cy="254520"/>
           </a:xfrm>
           <a:prstGeom prst="rect">
             <a:avLst/>
@@ -20538,7 +20503,7 @@
         <p:spPr>
           <a:xfrm>
             <a:off x="640080" y="603360"/>
-            <a:ext cx="10880640" cy="657720"/>
+            <a:ext cx="10879920" cy="657000"/>
           </a:xfrm>
           <a:prstGeom prst="rect">
             <a:avLst/>
@@ -20599,7 +20564,7 @@
         <p:spPr>
           <a:xfrm>
             <a:off x="640080" y="1353240"/>
-            <a:ext cx="10880640" cy="383400"/>
+            <a:ext cx="10879920" cy="382680"/>
           </a:xfrm>
           <a:prstGeom prst="rect">
             <a:avLst/>
@@ -20660,7 +20625,7 @@
         <p:spPr>
           <a:xfrm>
             <a:off x="640080" y="2011680"/>
-            <a:ext cx="4937040" cy="2879640"/>
+            <a:ext cx="4936320" cy="2878920"/>
           </a:xfrm>
           <a:prstGeom prst="roundRect">
             <a:avLst>
@@ -20715,7 +20680,7 @@
         <p:spPr>
           <a:xfrm>
             <a:off x="914400" y="2194560"/>
-            <a:ext cx="3656880" cy="273600"/>
+            <a:ext cx="3656160" cy="272880"/>
           </a:xfrm>
           <a:prstGeom prst="rect">
             <a:avLst/>
@@ -20776,7 +20741,7 @@
         <p:spPr>
           <a:xfrm>
             <a:off x="914400" y="2514600"/>
-            <a:ext cx="4388400" cy="913680"/>
+            <a:ext cx="4387680" cy="912960"/>
           </a:xfrm>
           <a:prstGeom prst="rect">
             <a:avLst/>
@@ -20837,7 +20802,7 @@
         <p:spPr>
           <a:xfrm>
             <a:off x="914400" y="3520440"/>
-            <a:ext cx="3656880" cy="273600"/>
+            <a:ext cx="3656160" cy="272880"/>
           </a:xfrm>
           <a:prstGeom prst="rect">
             <a:avLst/>
@@ -20898,7 +20863,7 @@
         <p:spPr>
           <a:xfrm>
             <a:off x="914400" y="3840480"/>
-            <a:ext cx="4388400" cy="913680"/>
+            <a:ext cx="4387680" cy="912960"/>
           </a:xfrm>
           <a:prstGeom prst="rect">
             <a:avLst/>
@@ -21069,7 +21034,7 @@
         <p:spPr>
           <a:xfrm>
             <a:off x="5852160" y="2011680"/>
-            <a:ext cx="5668560" cy="1370880"/>
+            <a:ext cx="5667840" cy="1370160"/>
           </a:xfrm>
           <a:prstGeom prst="roundRect">
             <a:avLst>
@@ -21124,7 +21089,7 @@
         <p:spPr>
           <a:xfrm>
             <a:off x="6126480" y="2194560"/>
-            <a:ext cx="4571280" cy="273600"/>
+            <a:ext cx="4570560" cy="272880"/>
           </a:xfrm>
           <a:prstGeom prst="rect">
             <a:avLst/>
@@ -21185,7 +21150,7 @@
         <p:spPr>
           <a:xfrm>
             <a:off x="6126480" y="2505600"/>
-            <a:ext cx="5119920" cy="776520"/>
+            <a:ext cx="5119200" cy="775800"/>
           </a:xfrm>
           <a:prstGeom prst="rect">
             <a:avLst/>
@@ -21246,7 +21211,7 @@
         <p:spPr>
           <a:xfrm>
             <a:off x="5852160" y="3520440"/>
-            <a:ext cx="5668560" cy="1370880"/>
+            <a:ext cx="5667840" cy="1370160"/>
           </a:xfrm>
           <a:prstGeom prst="roundRect">
             <a:avLst>
@@ -21301,7 +21266,7 @@
         <p:spPr>
           <a:xfrm>
             <a:off x="6126480" y="3703320"/>
-            <a:ext cx="4571280" cy="273600"/>
+            <a:ext cx="4570560" cy="272880"/>
           </a:xfrm>
           <a:prstGeom prst="rect">
             <a:avLst/>
@@ -21362,7 +21327,7 @@
         <p:spPr>
           <a:xfrm>
             <a:off x="6126480" y="4014360"/>
-            <a:ext cx="5303160" cy="776520"/>
+            <a:ext cx="5302440" cy="775800"/>
           </a:xfrm>
           <a:prstGeom prst="rect">
             <a:avLst/>
@@ -21423,7 +21388,7 @@
         <p:spPr>
           <a:xfrm>
             <a:off x="640080" y="6291000"/>
-            <a:ext cx="10880640" cy="273600"/>
+            <a:ext cx="10879920" cy="272880"/>
           </a:xfrm>
           <a:prstGeom prst="rect">
             <a:avLst/>
@@ -21521,7 +21486,7 @@
         <p:spPr>
           <a:xfrm>
             <a:off x="640080" y="311040"/>
-            <a:ext cx="7314480" cy="255240"/>
+            <a:ext cx="7313760" cy="254520"/>
           </a:xfrm>
           <a:prstGeom prst="rect">
             <a:avLst/>
@@ -21551,7 +21516,7 @@
               </a:tabLst>
             </a:pPr>
             <a:r>
-              <a:rPr lang="en-US" sz="1100" b="1" u="none" spc="221" strike="noStrike">
+              <a:rPr lang="en-US" sz="1400" b="1" u="none" spc="221" strike="noStrike">
                 <a:solidFill>
                   <a:srgbClr val="B85042"/>
                 </a:solidFill>
@@ -21562,7 +21527,7 @@
               </a:rPr>
               <a:t>THE PROBLEM</a:t>
             </a:r>
-            <a:endParaRPr lang="en-US" sz="1100" b="0" u="none" strike="noStrike">
+            <a:endParaRPr lang="en-US" sz="1400" b="0" u="none" strike="noStrike">
               <a:solidFill>
                 <a:srgbClr val="000000"/>
               </a:solidFill>
@@ -21582,7 +21547,7 @@
         <p:spPr>
           <a:xfrm>
             <a:off x="640080" y="603360"/>
-            <a:ext cx="10880640" cy="657720"/>
+            <a:ext cx="10879920" cy="657000"/>
           </a:xfrm>
           <a:prstGeom prst="rect">
             <a:avLst/>
@@ -21643,7 +21608,7 @@
         <p:spPr>
           <a:xfrm>
             <a:off x="640080" y="1353240"/>
-            <a:ext cx="10880640" cy="383400"/>
+            <a:ext cx="10879920" cy="382680"/>
           </a:xfrm>
           <a:prstGeom prst="rect">
             <a:avLst/>
@@ -21704,7 +21669,7 @@
         <p:spPr>
           <a:xfrm>
             <a:off x="640080" y="2030040"/>
-            <a:ext cx="383400" cy="383400"/>
+            <a:ext cx="382680" cy="382680"/>
           </a:xfrm>
           <a:prstGeom prst="ellipse">
             <a:avLst/>
@@ -21750,7 +21715,7 @@
         <p:spPr>
           <a:xfrm>
             <a:off x="640080" y="2030040"/>
-            <a:ext cx="383400" cy="383400"/>
+            <a:ext cx="382680" cy="382680"/>
           </a:xfrm>
           <a:prstGeom prst="rect">
             <a:avLst/>
@@ -21811,7 +21776,7 @@
         <p:spPr>
           <a:xfrm>
             <a:off x="1243440" y="1974960"/>
-            <a:ext cx="4571280" cy="310320"/>
+            <a:ext cx="4570560" cy="309600"/>
           </a:xfrm>
           <a:prstGeom prst="rect">
             <a:avLst/>
@@ -21872,7 +21837,7 @@
         <p:spPr>
           <a:xfrm>
             <a:off x="1243440" y="2267640"/>
-            <a:ext cx="9691920" cy="310320"/>
+            <a:ext cx="9691200" cy="309600"/>
           </a:xfrm>
           <a:prstGeom prst="rect">
             <a:avLst/>
@@ -21933,7 +21898,7 @@
         <p:spPr>
           <a:xfrm>
             <a:off x="640080" y="2807280"/>
-            <a:ext cx="383400" cy="383400"/>
+            <a:ext cx="382680" cy="382680"/>
           </a:xfrm>
           <a:prstGeom prst="ellipse">
             <a:avLst/>
@@ -21979,7 +21944,7 @@
         <p:spPr>
           <a:xfrm>
             <a:off x="640080" y="2807280"/>
-            <a:ext cx="383400" cy="383400"/>
+            <a:ext cx="382680" cy="382680"/>
           </a:xfrm>
           <a:prstGeom prst="rect">
             <a:avLst/>
@@ -22040,7 +22005,7 @@
         <p:spPr>
           <a:xfrm>
             <a:off x="1243440" y="2752200"/>
-            <a:ext cx="4571280" cy="310320"/>
+            <a:ext cx="4570560" cy="309600"/>
           </a:xfrm>
           <a:prstGeom prst="rect">
             <a:avLst/>
@@ -22101,7 +22066,7 @@
         <p:spPr>
           <a:xfrm>
             <a:off x="1243440" y="3044880"/>
-            <a:ext cx="9691920" cy="310320"/>
+            <a:ext cx="9691200" cy="309600"/>
           </a:xfrm>
           <a:prstGeom prst="rect">
             <a:avLst/>
@@ -22162,7 +22127,7 @@
         <p:spPr>
           <a:xfrm>
             <a:off x="640080" y="3584520"/>
-            <a:ext cx="383400" cy="383400"/>
+            <a:ext cx="382680" cy="382680"/>
           </a:xfrm>
           <a:prstGeom prst="ellipse">
             <a:avLst/>
@@ -22208,7 +22173,7 @@
         <p:spPr>
           <a:xfrm>
             <a:off x="640080" y="3584520"/>
-            <a:ext cx="383400" cy="383400"/>
+            <a:ext cx="382680" cy="382680"/>
           </a:xfrm>
           <a:prstGeom prst="rect">
             <a:avLst/>
@@ -22269,7 +22234,7 @@
         <p:spPr>
           <a:xfrm>
             <a:off x="1243440" y="3529440"/>
-            <a:ext cx="4571280" cy="310320"/>
+            <a:ext cx="4570560" cy="309600"/>
           </a:xfrm>
           <a:prstGeom prst="rect">
             <a:avLst/>
@@ -22330,7 +22295,7 @@
         <p:spPr>
           <a:xfrm>
             <a:off x="1243440" y="3822120"/>
-            <a:ext cx="9691920" cy="310320"/>
+            <a:ext cx="9691200" cy="309600"/>
           </a:xfrm>
           <a:prstGeom prst="rect">
             <a:avLst/>
@@ -22391,7 +22356,7 @@
         <p:spPr>
           <a:xfrm>
             <a:off x="640080" y="4361760"/>
-            <a:ext cx="383400" cy="383400"/>
+            <a:ext cx="382680" cy="382680"/>
           </a:xfrm>
           <a:prstGeom prst="ellipse">
             <a:avLst/>
@@ -22437,7 +22402,7 @@
         <p:spPr>
           <a:xfrm>
             <a:off x="640080" y="4361760"/>
-            <a:ext cx="383400" cy="383400"/>
+            <a:ext cx="382680" cy="382680"/>
           </a:xfrm>
           <a:prstGeom prst="rect">
             <a:avLst/>
@@ -22498,7 +22463,7 @@
         <p:spPr>
           <a:xfrm>
             <a:off x="1243440" y="4306680"/>
-            <a:ext cx="4571280" cy="310320"/>
+            <a:ext cx="4570560" cy="309600"/>
           </a:xfrm>
           <a:prstGeom prst="rect">
             <a:avLst/>
@@ -22559,7 +22524,7 @@
         <p:spPr>
           <a:xfrm>
             <a:off x="1243440" y="4599360"/>
-            <a:ext cx="9691920" cy="310320"/>
+            <a:ext cx="9691200" cy="309600"/>
           </a:xfrm>
           <a:prstGeom prst="rect">
             <a:avLst/>
@@ -22620,7 +22585,7 @@
         <p:spPr>
           <a:xfrm>
             <a:off x="640080" y="5139000"/>
-            <a:ext cx="383400" cy="383400"/>
+            <a:ext cx="382680" cy="382680"/>
           </a:xfrm>
           <a:prstGeom prst="ellipse">
             <a:avLst/>
@@ -22666,7 +22631,7 @@
         <p:spPr>
           <a:xfrm>
             <a:off x="640080" y="5139000"/>
-            <a:ext cx="383400" cy="383400"/>
+            <a:ext cx="382680" cy="382680"/>
           </a:xfrm>
           <a:prstGeom prst="rect">
             <a:avLst/>
@@ -22727,7 +22692,7 @@
         <p:spPr>
           <a:xfrm>
             <a:off x="1243440" y="5083920"/>
-            <a:ext cx="4571280" cy="310320"/>
+            <a:ext cx="4570560" cy="309600"/>
           </a:xfrm>
           <a:prstGeom prst="rect">
             <a:avLst/>
@@ -22788,7 +22753,7 @@
         <p:spPr>
           <a:xfrm>
             <a:off x="1243440" y="5376600"/>
-            <a:ext cx="9691920" cy="310320"/>
+            <a:ext cx="9691200" cy="309600"/>
           </a:xfrm>
           <a:prstGeom prst="rect">
             <a:avLst/>
@@ -22886,7 +22851,7 @@
         <p:spPr>
           <a:xfrm>
             <a:off x="640080" y="311040"/>
-            <a:ext cx="7314480" cy="255240"/>
+            <a:ext cx="7313760" cy="254520"/>
           </a:xfrm>
           <a:prstGeom prst="rect">
             <a:avLst/>
@@ -22947,7 +22912,7 @@
         <p:spPr>
           <a:xfrm>
             <a:off x="640080" y="603360"/>
-            <a:ext cx="10880640" cy="657720"/>
+            <a:ext cx="10879920" cy="657000"/>
           </a:xfrm>
           <a:prstGeom prst="rect">
             <a:avLst/>
@@ -23008,7 +22973,7 @@
         <p:spPr>
           <a:xfrm>
             <a:off x="640080" y="1353240"/>
-            <a:ext cx="10880640" cy="383400"/>
+            <a:ext cx="10879920" cy="382680"/>
           </a:xfrm>
           <a:prstGeom prst="rect">
             <a:avLst/>
@@ -23069,7 +23034,7 @@
         <p:spPr>
           <a:xfrm>
             <a:off x="640080" y="2057400"/>
-            <a:ext cx="3492360" cy="2285280"/>
+            <a:ext cx="3491640" cy="2284560"/>
           </a:xfrm>
           <a:prstGeom prst="roundRect">
             <a:avLst>
@@ -23124,7 +23089,7 @@
         <p:spPr>
           <a:xfrm>
             <a:off x="896040" y="2267640"/>
-            <a:ext cx="2925360" cy="291960"/>
+            <a:ext cx="2924640" cy="291240"/>
           </a:xfrm>
           <a:prstGeom prst="rect">
             <a:avLst/>
@@ -23185,7 +23150,7 @@
         <p:spPr>
           <a:xfrm>
             <a:off x="896040" y="2606040"/>
-            <a:ext cx="2980080" cy="1462320"/>
+            <a:ext cx="2979360" cy="1461600"/>
           </a:xfrm>
           <a:prstGeom prst="rect">
             <a:avLst/>
@@ -23294,7 +23259,7 @@
         <p:spPr>
           <a:xfrm>
             <a:off x="896040" y="3977640"/>
-            <a:ext cx="2980080" cy="273600"/>
+            <a:ext cx="2979360" cy="272880"/>
           </a:xfrm>
           <a:prstGeom prst="rect">
             <a:avLst/>
@@ -23355,7 +23320,7 @@
         <p:spPr>
           <a:xfrm>
             <a:off x="4352400" y="2057400"/>
-            <a:ext cx="3492360" cy="2285280"/>
+            <a:ext cx="3491640" cy="2284560"/>
           </a:xfrm>
           <a:prstGeom prst="roundRect">
             <a:avLst>
@@ -23410,7 +23375,7 @@
         <p:spPr>
           <a:xfrm>
             <a:off x="4608720" y="2267640"/>
-            <a:ext cx="2925360" cy="291960"/>
+            <a:ext cx="2924640" cy="291240"/>
           </a:xfrm>
           <a:prstGeom prst="rect">
             <a:avLst/>
@@ -23471,7 +23436,7 @@
         <p:spPr>
           <a:xfrm>
             <a:off x="4608720" y="2606040"/>
-            <a:ext cx="2980080" cy="1462320"/>
+            <a:ext cx="2979360" cy="1461600"/>
           </a:xfrm>
           <a:prstGeom prst="rect">
             <a:avLst/>
@@ -23580,7 +23545,7 @@
         <p:spPr>
           <a:xfrm>
             <a:off x="4608720" y="3977640"/>
-            <a:ext cx="2980080" cy="273600"/>
+            <a:ext cx="2979360" cy="272880"/>
           </a:xfrm>
           <a:prstGeom prst="rect">
             <a:avLst/>
@@ -23641,7 +23606,7 @@
         <p:spPr>
           <a:xfrm>
             <a:off x="8028360" y="2057400"/>
-            <a:ext cx="3492360" cy="2285280"/>
+            <a:ext cx="3491640" cy="2284560"/>
           </a:xfrm>
           <a:prstGeom prst="roundRect">
             <a:avLst>
@@ -23696,7 +23661,7 @@
         <p:spPr>
           <a:xfrm>
             <a:off x="8284320" y="2267640"/>
-            <a:ext cx="2925360" cy="291960"/>
+            <a:ext cx="2924640" cy="291240"/>
           </a:xfrm>
           <a:prstGeom prst="rect">
             <a:avLst/>
@@ -23757,7 +23722,7 @@
         <p:spPr>
           <a:xfrm>
             <a:off x="8284320" y="2606040"/>
-            <a:ext cx="2980080" cy="1462320"/>
+            <a:ext cx="2979360" cy="1461600"/>
           </a:xfrm>
           <a:prstGeom prst="rect">
             <a:avLst/>
@@ -23866,7 +23831,7 @@
         <p:spPr>
           <a:xfrm>
             <a:off x="8284320" y="3977640"/>
-            <a:ext cx="2980080" cy="273600"/>
+            <a:ext cx="2979360" cy="272880"/>
           </a:xfrm>
           <a:prstGeom prst="rect">
             <a:avLst/>
@@ -23927,7 +23892,7 @@
         <p:spPr>
           <a:xfrm>
             <a:off x="640080" y="4617720"/>
-            <a:ext cx="10880640" cy="1096560"/>
+            <a:ext cx="10879920" cy="1095840"/>
           </a:xfrm>
           <a:prstGeom prst="roundRect">
             <a:avLst>
@@ -23982,7 +23947,7 @@
         <p:spPr>
           <a:xfrm>
             <a:off x="960120" y="4864680"/>
-            <a:ext cx="10240560" cy="621000"/>
+            <a:ext cx="10239840" cy="620280"/>
           </a:xfrm>
           <a:prstGeom prst="rect">
             <a:avLst/>
@@ -24080,7 +24045,7 @@
         <p:spPr>
           <a:xfrm>
             <a:off x="640080" y="311040"/>
-            <a:ext cx="7314480" cy="255240"/>
+            <a:ext cx="7313760" cy="254520"/>
           </a:xfrm>
           <a:prstGeom prst="rect">
             <a:avLst/>
@@ -24141,7 +24106,7 @@
         <p:spPr>
           <a:xfrm>
             <a:off x="640080" y="603360"/>
-            <a:ext cx="10880640" cy="657720"/>
+            <a:ext cx="10879920" cy="657000"/>
           </a:xfrm>
           <a:prstGeom prst="rect">
             <a:avLst/>
@@ -24202,7 +24167,7 @@
         <p:spPr>
           <a:xfrm>
             <a:off x="640080" y="1691640"/>
-            <a:ext cx="3291120" cy="1370880"/>
+            <a:ext cx="3290400" cy="1370160"/>
           </a:xfrm>
           <a:prstGeom prst="roundRect">
             <a:avLst>
@@ -24257,7 +24222,7 @@
         <p:spPr>
           <a:xfrm>
             <a:off x="777240" y="1874520"/>
-            <a:ext cx="3016800" cy="291960"/>
+            <a:ext cx="3016080" cy="291240"/>
           </a:xfrm>
           <a:prstGeom prst="rect">
             <a:avLst/>
@@ -24318,7 +24283,7 @@
         <p:spPr>
           <a:xfrm>
             <a:off x="822960" y="2212920"/>
-            <a:ext cx="2925360" cy="685080"/>
+            <a:ext cx="2924640" cy="684360"/>
           </a:xfrm>
           <a:prstGeom prst="rect">
             <a:avLst/>
@@ -24423,7 +24388,7 @@
         <p:spPr>
           <a:xfrm>
             <a:off x="4590360" y="1691640"/>
-            <a:ext cx="3291120" cy="1370880"/>
+            <a:ext cx="3290400" cy="1370160"/>
           </a:xfrm>
           <a:prstGeom prst="roundRect">
             <a:avLst>
@@ -24478,7 +24443,7 @@
         <p:spPr>
           <a:xfrm>
             <a:off x="4727520" y="1874520"/>
-            <a:ext cx="3016800" cy="291960"/>
+            <a:ext cx="3016080" cy="291240"/>
           </a:xfrm>
           <a:prstGeom prst="rect">
             <a:avLst/>
@@ -24539,7 +24504,7 @@
         <p:spPr>
           <a:xfrm>
             <a:off x="4773240" y="2212920"/>
-            <a:ext cx="2925360" cy="685080"/>
+            <a:ext cx="2924640" cy="684360"/>
           </a:xfrm>
           <a:prstGeom prst="rect">
             <a:avLst/>
@@ -24644,7 +24609,7 @@
         <p:spPr>
           <a:xfrm>
             <a:off x="8540640" y="1691640"/>
-            <a:ext cx="3412080" cy="1370880"/>
+            <a:ext cx="3411360" cy="1370160"/>
           </a:xfrm>
           <a:prstGeom prst="roundRect">
             <a:avLst>
@@ -24699,7 +24664,7 @@
         <p:spPr>
           <a:xfrm>
             <a:off x="8677800" y="1874520"/>
-            <a:ext cx="3016800" cy="291960"/>
+            <a:ext cx="3016080" cy="291240"/>
           </a:xfrm>
           <a:prstGeom prst="rect">
             <a:avLst/>
@@ -24760,7 +24725,7 @@
         <p:spPr>
           <a:xfrm>
             <a:off x="8723520" y="2212920"/>
-            <a:ext cx="3108240" cy="685080"/>
+            <a:ext cx="3107520" cy="684360"/>
           </a:xfrm>
           <a:prstGeom prst="rect">
             <a:avLst/>
@@ -24821,7 +24786,7 @@
         <p:spPr>
           <a:xfrm>
             <a:off x="640080" y="3337560"/>
-            <a:ext cx="5348520" cy="1965240"/>
+            <a:ext cx="5347800" cy="1964520"/>
           </a:xfrm>
           <a:prstGeom prst="roundRect">
             <a:avLst>
@@ -24876,7 +24841,7 @@
         <p:spPr>
           <a:xfrm>
             <a:off x="914400" y="3520440"/>
-            <a:ext cx="4571280" cy="273600"/>
+            <a:ext cx="4570560" cy="272880"/>
           </a:xfrm>
           <a:prstGeom prst="rect">
             <a:avLst/>
@@ -24937,7 +24902,7 @@
         <p:spPr>
           <a:xfrm>
             <a:off x="914400" y="3858840"/>
-            <a:ext cx="4799880" cy="1279440"/>
+            <a:ext cx="4799160" cy="1278720"/>
           </a:xfrm>
           <a:prstGeom prst="rect">
             <a:avLst/>
@@ -25108,7 +25073,7 @@
         <p:spPr>
           <a:xfrm>
             <a:off x="6263640" y="3337560"/>
-            <a:ext cx="5257080" cy="1965240"/>
+            <a:ext cx="5256360" cy="1964520"/>
           </a:xfrm>
           <a:prstGeom prst="roundRect">
             <a:avLst>
@@ -25163,7 +25128,7 @@
         <p:spPr>
           <a:xfrm>
             <a:off x="6583680" y="3520440"/>
-            <a:ext cx="4571280" cy="273600"/>
+            <a:ext cx="4570560" cy="272880"/>
           </a:xfrm>
           <a:prstGeom prst="rect">
             <a:avLst/>
@@ -25224,7 +25189,7 @@
         <p:spPr>
           <a:xfrm>
             <a:off x="6583680" y="3858840"/>
-            <a:ext cx="4662720" cy="1279440"/>
+            <a:ext cx="4662000" cy="1278720"/>
           </a:xfrm>
           <a:prstGeom prst="rect">
             <a:avLst/>
@@ -25370,7 +25335,7 @@
         <p:spPr>
           <a:xfrm>
             <a:off x="640080" y="311040"/>
-            <a:ext cx="7314480" cy="255240"/>
+            <a:ext cx="7313760" cy="254520"/>
           </a:xfrm>
           <a:prstGeom prst="rect">
             <a:avLst/>
@@ -25431,7 +25396,7 @@
         <p:spPr>
           <a:xfrm>
             <a:off x="640080" y="603360"/>
-            <a:ext cx="10880640" cy="657720"/>
+            <a:ext cx="10879920" cy="657000"/>
           </a:xfrm>
           <a:prstGeom prst="rect">
             <a:avLst/>
@@ -25492,7 +25457,7 @@
         <p:spPr>
           <a:xfrm>
             <a:off x="640080" y="1353240"/>
-            <a:ext cx="10880640" cy="383400"/>
+            <a:ext cx="10879920" cy="382680"/>
           </a:xfrm>
           <a:prstGeom prst="rect">
             <a:avLst/>
@@ -25553,7 +25518,7 @@
         <p:spPr>
           <a:xfrm>
             <a:off x="640080" y="2103120"/>
-            <a:ext cx="10880640" cy="822240"/>
+            <a:ext cx="10879920" cy="821520"/>
           </a:xfrm>
           <a:prstGeom prst="roundRect">
             <a:avLst>
@@ -25608,7 +25573,7 @@
         <p:spPr>
           <a:xfrm>
             <a:off x="914400" y="2331720"/>
-            <a:ext cx="383400" cy="383400"/>
+            <a:ext cx="382680" cy="382680"/>
           </a:xfrm>
           <a:prstGeom prst="ellipse">
             <a:avLst/>
@@ -25654,7 +25619,7 @@
         <p:spPr>
           <a:xfrm>
             <a:off x="914400" y="2331720"/>
-            <a:ext cx="383400" cy="383400"/>
+            <a:ext cx="382680" cy="382680"/>
           </a:xfrm>
           <a:prstGeom prst="rect">
             <a:avLst/>
@@ -25715,7 +25680,7 @@
         <p:spPr>
           <a:xfrm>
             <a:off x="1508760" y="2249280"/>
-            <a:ext cx="3291120" cy="273600"/>
+            <a:ext cx="3290400" cy="272880"/>
           </a:xfrm>
           <a:prstGeom prst="rect">
             <a:avLst/>
@@ -25776,7 +25741,7 @@
         <p:spPr>
           <a:xfrm>
             <a:off x="1508760" y="2541960"/>
-            <a:ext cx="6034320" cy="273600"/>
+            <a:ext cx="6033600" cy="272880"/>
           </a:xfrm>
           <a:prstGeom prst="rect">
             <a:avLst/>
@@ -25837,7 +25802,7 @@
         <p:spPr>
           <a:xfrm>
             <a:off x="9509760" y="2359080"/>
-            <a:ext cx="1736640" cy="291960"/>
+            <a:ext cx="1735920" cy="291240"/>
           </a:xfrm>
           <a:prstGeom prst="rect">
             <a:avLst/>
@@ -25898,7 +25863,7 @@
         <p:spPr>
           <a:xfrm>
             <a:off x="640080" y="3017520"/>
-            <a:ext cx="10880640" cy="822240"/>
+            <a:ext cx="10879920" cy="821520"/>
           </a:xfrm>
           <a:prstGeom prst="roundRect">
             <a:avLst>
@@ -25953,7 +25918,7 @@
         <p:spPr>
           <a:xfrm>
             <a:off x="914400" y="3246120"/>
-            <a:ext cx="383400" cy="383400"/>
+            <a:ext cx="382680" cy="382680"/>
           </a:xfrm>
           <a:prstGeom prst="ellipse">
             <a:avLst/>
@@ -25999,7 +25964,7 @@
         <p:spPr>
           <a:xfrm>
             <a:off x="914400" y="3246120"/>
-            <a:ext cx="383400" cy="383400"/>
+            <a:ext cx="382680" cy="382680"/>
           </a:xfrm>
           <a:prstGeom prst="rect">
             <a:avLst/>
@@ -26060,7 +26025,7 @@
         <p:spPr>
           <a:xfrm>
             <a:off x="1508760" y="3163680"/>
-            <a:ext cx="3291120" cy="273600"/>
+            <a:ext cx="3290400" cy="272880"/>
           </a:xfrm>
           <a:prstGeom prst="rect">
             <a:avLst/>
@@ -26121,7 +26086,7 @@
         <p:spPr>
           <a:xfrm>
             <a:off x="1508760" y="3456360"/>
-            <a:ext cx="6034320" cy="273600"/>
+            <a:ext cx="6033600" cy="272880"/>
           </a:xfrm>
           <a:prstGeom prst="rect">
             <a:avLst/>
@@ -26182,7 +26147,7 @@
         <p:spPr>
           <a:xfrm>
             <a:off x="9509760" y="3273480"/>
-            <a:ext cx="1736640" cy="291960"/>
+            <a:ext cx="1735920" cy="291240"/>
           </a:xfrm>
           <a:prstGeom prst="rect">
             <a:avLst/>
@@ -26243,7 +26208,7 @@
         <p:spPr>
           <a:xfrm>
             <a:off x="640080" y="3931920"/>
-            <a:ext cx="10880640" cy="822240"/>
+            <a:ext cx="10879920" cy="821520"/>
           </a:xfrm>
           <a:prstGeom prst="roundRect">
             <a:avLst>
@@ -26298,7 +26263,7 @@
         <p:spPr>
           <a:xfrm>
             <a:off x="914400" y="4160520"/>
-            <a:ext cx="383400" cy="383400"/>
+            <a:ext cx="382680" cy="382680"/>
           </a:xfrm>
           <a:prstGeom prst="ellipse">
             <a:avLst/>
@@ -26344,7 +26309,7 @@
         <p:spPr>
           <a:xfrm>
             <a:off x="914400" y="4160520"/>
-            <a:ext cx="383400" cy="383400"/>
+            <a:ext cx="382680" cy="382680"/>
           </a:xfrm>
           <a:prstGeom prst="rect">
             <a:avLst/>
@@ -26405,7 +26370,7 @@
         <p:spPr>
           <a:xfrm>
             <a:off x="1508760" y="4078080"/>
-            <a:ext cx="3291120" cy="273600"/>
+            <a:ext cx="3290400" cy="272880"/>
           </a:xfrm>
           <a:prstGeom prst="rect">
             <a:avLst/>
@@ -26466,7 +26431,7 @@
         <p:spPr>
           <a:xfrm>
             <a:off x="1508760" y="4370760"/>
-            <a:ext cx="6034320" cy="273600"/>
+            <a:ext cx="6033600" cy="272880"/>
           </a:xfrm>
           <a:prstGeom prst="rect">
             <a:avLst/>
@@ -26527,7 +26492,7 @@
         <p:spPr>
           <a:xfrm>
             <a:off x="9509760" y="4187880"/>
-            <a:ext cx="1736640" cy="291960"/>
+            <a:ext cx="1735920" cy="291240"/>
           </a:xfrm>
           <a:prstGeom prst="rect">
             <a:avLst/>
@@ -26588,7 +26553,7 @@
         <p:spPr>
           <a:xfrm>
             <a:off x="640080" y="4846320"/>
-            <a:ext cx="10880640" cy="822240"/>
+            <a:ext cx="10879920" cy="821520"/>
           </a:xfrm>
           <a:prstGeom prst="roundRect">
             <a:avLst>
@@ -26643,7 +26608,7 @@
         <p:spPr>
           <a:xfrm>
             <a:off x="914400" y="5074920"/>
-            <a:ext cx="383400" cy="383400"/>
+            <a:ext cx="382680" cy="382680"/>
           </a:xfrm>
           <a:prstGeom prst="ellipse">
             <a:avLst/>
@@ -26689,7 +26654,7 @@
         <p:spPr>
           <a:xfrm>
             <a:off x="914400" y="5074920"/>
-            <a:ext cx="383400" cy="383400"/>
+            <a:ext cx="382680" cy="382680"/>
           </a:xfrm>
           <a:prstGeom prst="rect">
             <a:avLst/>
@@ -26750,7 +26715,7 @@
         <p:spPr>
           <a:xfrm>
             <a:off x="1508760" y="4992480"/>
-            <a:ext cx="3291120" cy="273600"/>
+            <a:ext cx="3290400" cy="272880"/>
           </a:xfrm>
           <a:prstGeom prst="rect">
             <a:avLst/>
@@ -26811,7 +26776,7 @@
         <p:spPr>
           <a:xfrm>
             <a:off x="1508760" y="5285160"/>
-            <a:ext cx="6034320" cy="273600"/>
+            <a:ext cx="6033600" cy="272880"/>
           </a:xfrm>
           <a:prstGeom prst="rect">
             <a:avLst/>
@@ -26872,7 +26837,7 @@
         <p:spPr>
           <a:xfrm>
             <a:off x="9509760" y="5102280"/>
-            <a:ext cx="1736640" cy="291960"/>
+            <a:ext cx="1735920" cy="291240"/>
           </a:xfrm>
           <a:prstGeom prst="rect">
             <a:avLst/>
@@ -26933,7 +26898,7 @@
         <p:spPr>
           <a:xfrm>
             <a:off x="640080" y="6291000"/>
-            <a:ext cx="10880640" cy="273600"/>
+            <a:ext cx="10879920" cy="272880"/>
           </a:xfrm>
           <a:prstGeom prst="rect">
             <a:avLst/>
@@ -27011,7 +26976,7 @@
         <p:spPr>
           <a:xfrm>
             <a:off x="640080" y="311040"/>
-            <a:ext cx="7314480" cy="255240"/>
+            <a:ext cx="7313760" cy="254520"/>
           </a:xfrm>
           <a:prstGeom prst="rect">
             <a:avLst/>
@@ -27072,7 +27037,7 @@
         <p:spPr>
           <a:xfrm>
             <a:off x="640080" y="603360"/>
-            <a:ext cx="10880640" cy="657720"/>
+            <a:ext cx="10879920" cy="657000"/>
           </a:xfrm>
           <a:prstGeom prst="rect">
             <a:avLst/>
@@ -27133,7 +27098,7 @@
         <p:spPr>
           <a:xfrm>
             <a:off x="640080" y="1645920"/>
-            <a:ext cx="5348520" cy="2193840"/>
+            <a:ext cx="5347800" cy="2193120"/>
           </a:xfrm>
           <a:prstGeom prst="roundRect">
             <a:avLst>
@@ -27188,7 +27153,7 @@
         <p:spPr>
           <a:xfrm>
             <a:off x="914400" y="1828800"/>
-            <a:ext cx="4571280" cy="273600"/>
+            <a:ext cx="4570560" cy="272880"/>
           </a:xfrm>
           <a:prstGeom prst="rect">
             <a:avLst/>
@@ -27249,7 +27214,7 @@
         <p:spPr>
           <a:xfrm>
             <a:off x="914400" y="2176200"/>
-            <a:ext cx="4799880" cy="1508040"/>
+            <a:ext cx="4799160" cy="1507320"/>
           </a:xfrm>
           <a:prstGeom prst="rect">
             <a:avLst/>
@@ -27420,7 +27385,7 @@
         <p:spPr>
           <a:xfrm>
             <a:off x="6263640" y="1645920"/>
-            <a:ext cx="5257080" cy="2193840"/>
+            <a:ext cx="5256360" cy="2193120"/>
           </a:xfrm>
           <a:prstGeom prst="roundRect">
             <a:avLst>
@@ -27475,7 +27440,7 @@
         <p:spPr>
           <a:xfrm>
             <a:off x="6583680" y="1828800"/>
-            <a:ext cx="4571280" cy="273600"/>
+            <a:ext cx="4570560" cy="272880"/>
           </a:xfrm>
           <a:prstGeom prst="rect">
             <a:avLst/>
@@ -27536,7 +27501,7 @@
         <p:spPr>
           <a:xfrm>
             <a:off x="6583680" y="2176200"/>
-            <a:ext cx="4845960" cy="1508040"/>
+            <a:ext cx="4845240" cy="1507320"/>
           </a:xfrm>
           <a:prstGeom prst="rect">
             <a:avLst/>
@@ -27693,7 +27658,7 @@
         <p:spPr>
           <a:xfrm>
             <a:off x="640080" y="4069080"/>
-            <a:ext cx="10880640" cy="1690920"/>
+            <a:ext cx="10879920" cy="1690200"/>
           </a:xfrm>
           <a:prstGeom prst="roundRect">
             <a:avLst>
@@ -27748,7 +27713,7 @@
         <p:spPr>
           <a:xfrm>
             <a:off x="960120" y="4251960"/>
-            <a:ext cx="5485680" cy="273600"/>
+            <a:ext cx="5484960" cy="272880"/>
           </a:xfrm>
           <a:prstGeom prst="rect">
             <a:avLst/>
@@ -27809,7 +27774,7 @@
         <p:spPr>
           <a:xfrm>
             <a:off x="960120" y="4572000"/>
-            <a:ext cx="10240560" cy="1096560"/>
+            <a:ext cx="10239840" cy="1095840"/>
           </a:xfrm>
           <a:prstGeom prst="rect">
             <a:avLst/>
@@ -27955,7 +27920,7 @@
         <p:spPr>
           <a:xfrm>
             <a:off x="640080" y="331560"/>
-            <a:ext cx="7314480" cy="305640"/>
+            <a:ext cx="7313760" cy="304920"/>
           </a:xfrm>
           <a:prstGeom prst="rect">
             <a:avLst/>
@@ -28016,7 +27981,7 @@
         <p:spPr>
           <a:xfrm>
             <a:off x="640080" y="672840"/>
-            <a:ext cx="10880640" cy="586440"/>
+            <a:ext cx="10879920" cy="585720"/>
           </a:xfrm>
           <a:prstGeom prst="rect">
             <a:avLst/>
@@ -28077,7 +28042,7 @@
         <p:spPr>
           <a:xfrm>
             <a:off x="640080" y="1572840"/>
-            <a:ext cx="10880640" cy="1480680"/>
+            <a:ext cx="10879920" cy="1479960"/>
           </a:xfrm>
           <a:prstGeom prst="roundRect">
             <a:avLst>
@@ -28132,7 +28097,7 @@
         <p:spPr>
           <a:xfrm>
             <a:off x="914400" y="1792080"/>
-            <a:ext cx="383400" cy="383400"/>
+            <a:ext cx="382680" cy="382680"/>
           </a:xfrm>
           <a:prstGeom prst="ellipse">
             <a:avLst/>
@@ -28178,7 +28143,7 @@
         <p:spPr>
           <a:xfrm>
             <a:off x="914400" y="1828800"/>
-            <a:ext cx="383400" cy="290520"/>
+            <a:ext cx="382680" cy="289800"/>
           </a:xfrm>
           <a:prstGeom prst="rect">
             <a:avLst/>
@@ -28239,7 +28204,7 @@
         <p:spPr>
           <a:xfrm>
             <a:off x="1508760" y="1744920"/>
-            <a:ext cx="9600480" cy="313200"/>
+            <a:ext cx="9599760" cy="312480"/>
           </a:xfrm>
           <a:prstGeom prst="rect">
             <a:avLst/>
@@ -28300,7 +28265,7 @@
         <p:spPr>
           <a:xfrm>
             <a:off x="1508760" y="2009880"/>
-            <a:ext cx="9691920" cy="660600"/>
+            <a:ext cx="9691200" cy="659880"/>
           </a:xfrm>
           <a:prstGeom prst="rect">
             <a:avLst/>
@@ -28361,7 +28326,7 @@
         <p:spPr>
           <a:xfrm>
             <a:off x="1508760" y="2682360"/>
-            <a:ext cx="9691920" cy="267480"/>
+            <a:ext cx="9691200" cy="266760"/>
           </a:xfrm>
           <a:prstGeom prst="rect">
             <a:avLst/>
@@ -28422,7 +28387,7 @@
         <p:spPr>
           <a:xfrm>
             <a:off x="640080" y="3173040"/>
-            <a:ext cx="10880640" cy="1480680"/>
+            <a:ext cx="10879920" cy="1479960"/>
           </a:xfrm>
           <a:prstGeom prst="roundRect">
             <a:avLst>
@@ -28477,7 +28442,7 @@
         <p:spPr>
           <a:xfrm>
             <a:off x="914400" y="3392280"/>
-            <a:ext cx="383400" cy="383400"/>
+            <a:ext cx="382680" cy="382680"/>
           </a:xfrm>
           <a:prstGeom prst="ellipse">
             <a:avLst/>
@@ -28523,7 +28488,7 @@
         <p:spPr>
           <a:xfrm>
             <a:off x="914400" y="3429000"/>
-            <a:ext cx="383400" cy="290520"/>
+            <a:ext cx="382680" cy="289800"/>
           </a:xfrm>
           <a:prstGeom prst="rect">
             <a:avLst/>
@@ -28584,7 +28549,7 @@
         <p:spPr>
           <a:xfrm>
             <a:off x="1508760" y="3345120"/>
-            <a:ext cx="9600480" cy="313200"/>
+            <a:ext cx="9599760" cy="312480"/>
           </a:xfrm>
           <a:prstGeom prst="rect">
             <a:avLst/>
@@ -28645,7 +28610,7 @@
         <p:spPr>
           <a:xfrm>
             <a:off x="1508760" y="3704400"/>
-            <a:ext cx="9691920" cy="470160"/>
+            <a:ext cx="9691200" cy="469440"/>
           </a:xfrm>
           <a:prstGeom prst="rect">
             <a:avLst/>
@@ -28706,7 +28671,7 @@
         <p:spPr>
           <a:xfrm>
             <a:off x="1508760" y="4282560"/>
-            <a:ext cx="9691920" cy="267480"/>
+            <a:ext cx="9691200" cy="266760"/>
           </a:xfrm>
           <a:prstGeom prst="rect">
             <a:avLst/>
@@ -28767,7 +28732,7 @@
         <p:spPr>
           <a:xfrm>
             <a:off x="640080" y="4773240"/>
-            <a:ext cx="10880640" cy="1480680"/>
+            <a:ext cx="10879920" cy="1479960"/>
           </a:xfrm>
           <a:prstGeom prst="roundRect">
             <a:avLst>
@@ -28822,7 +28787,7 @@
         <p:spPr>
           <a:xfrm>
             <a:off x="914400" y="4992480"/>
-            <a:ext cx="383400" cy="383400"/>
+            <a:ext cx="382680" cy="382680"/>
           </a:xfrm>
           <a:prstGeom prst="ellipse">
             <a:avLst/>
@@ -28868,7 +28833,7 @@
         <p:spPr>
           <a:xfrm>
             <a:off x="914400" y="5029200"/>
-            <a:ext cx="383400" cy="290520"/>
+            <a:ext cx="382680" cy="289800"/>
           </a:xfrm>
           <a:prstGeom prst="rect">
             <a:avLst/>
@@ -28929,7 +28894,7 @@
         <p:spPr>
           <a:xfrm>
             <a:off x="1508760" y="4945320"/>
-            <a:ext cx="9600480" cy="313200"/>
+            <a:ext cx="9599760" cy="312480"/>
           </a:xfrm>
           <a:prstGeom prst="rect">
             <a:avLst/>
@@ -28990,7 +28955,7 @@
         <p:spPr>
           <a:xfrm>
             <a:off x="1508760" y="5399640"/>
-            <a:ext cx="9691920" cy="279720"/>
+            <a:ext cx="9691200" cy="279000"/>
           </a:xfrm>
           <a:prstGeom prst="rect">
             <a:avLst/>
@@ -29051,7 +29016,7 @@
         <p:spPr>
           <a:xfrm>
             <a:off x="1508760" y="5882760"/>
-            <a:ext cx="9691920" cy="267480"/>
+            <a:ext cx="9691200" cy="266760"/>
           </a:xfrm>
           <a:prstGeom prst="rect">
             <a:avLst/>
@@ -29149,7 +29114,7 @@
         <p:spPr>
           <a:xfrm>
             <a:off x="640080" y="311040"/>
-            <a:ext cx="7314480" cy="255240"/>
+            <a:ext cx="7313760" cy="254520"/>
           </a:xfrm>
           <a:prstGeom prst="rect">
             <a:avLst/>
@@ -29210,7 +29175,7 @@
         <p:spPr>
           <a:xfrm>
             <a:off x="640080" y="603360"/>
-            <a:ext cx="10880640" cy="657720"/>
+            <a:ext cx="10879920" cy="657000"/>
           </a:xfrm>
           <a:prstGeom prst="rect">
             <a:avLst/>
@@ -29271,7 +29236,7 @@
         <p:spPr>
           <a:xfrm>
             <a:off x="640080" y="1353240"/>
-            <a:ext cx="10880640" cy="383400"/>
+            <a:ext cx="10879920" cy="382680"/>
           </a:xfrm>
           <a:prstGeom prst="rect">
             <a:avLst/>
@@ -29332,7 +29297,7 @@
         <p:spPr>
           <a:xfrm>
             <a:off x="640080" y="1965960"/>
-            <a:ext cx="10880640" cy="410760"/>
+            <a:ext cx="10879920" cy="410040"/>
           </a:xfrm>
           <a:prstGeom prst="roundRect">
             <a:avLst>
@@ -29387,7 +29352,7 @@
         <p:spPr>
           <a:xfrm>
             <a:off x="932760" y="2030040"/>
-            <a:ext cx="2376720" cy="273600"/>
+            <a:ext cx="2376000" cy="272880"/>
           </a:xfrm>
           <a:prstGeom prst="rect">
             <a:avLst/>
@@ -29448,7 +29413,7 @@
         <p:spPr>
           <a:xfrm>
             <a:off x="3657600" y="2030040"/>
-            <a:ext cx="3656880" cy="273600"/>
+            <a:ext cx="3656160" cy="272880"/>
           </a:xfrm>
           <a:prstGeom prst="rect">
             <a:avLst/>
@@ -29509,7 +29474,7 @@
         <p:spPr>
           <a:xfrm>
             <a:off x="7589520" y="2030040"/>
-            <a:ext cx="3839760" cy="273600"/>
+            <a:ext cx="3839040" cy="272880"/>
           </a:xfrm>
           <a:prstGeom prst="rect">
             <a:avLst/>
@@ -29570,7 +29535,7 @@
         <p:spPr>
           <a:xfrm>
             <a:off x="640080" y="2450520"/>
-            <a:ext cx="10880640" cy="566280"/>
+            <a:ext cx="10879920" cy="565560"/>
           </a:xfrm>
           <a:prstGeom prst="roundRect">
             <a:avLst>
@@ -29625,7 +29590,7 @@
         <p:spPr>
           <a:xfrm>
             <a:off x="932760" y="2597040"/>
-            <a:ext cx="2559600" cy="273600"/>
+            <a:ext cx="2558880" cy="272880"/>
           </a:xfrm>
           <a:prstGeom prst="rect">
             <a:avLst/>
@@ -29686,7 +29651,7 @@
         <p:spPr>
           <a:xfrm>
             <a:off x="3657600" y="2597040"/>
-            <a:ext cx="3748320" cy="273600"/>
+            <a:ext cx="3747600" cy="272880"/>
           </a:xfrm>
           <a:prstGeom prst="rect">
             <a:avLst/>
@@ -29747,7 +29712,7 @@
         <p:spPr>
           <a:xfrm>
             <a:off x="7589520" y="2597040"/>
-            <a:ext cx="3931200" cy="273600"/>
+            <a:ext cx="3930480" cy="272880"/>
           </a:xfrm>
           <a:prstGeom prst="rect">
             <a:avLst/>
@@ -29808,7 +29773,7 @@
         <p:spPr>
           <a:xfrm>
             <a:off x="640080" y="3090600"/>
-            <a:ext cx="10880640" cy="566280"/>
+            <a:ext cx="10879920" cy="565560"/>
           </a:xfrm>
           <a:prstGeom prst="roundRect">
             <a:avLst>
@@ -29863,7 +29828,7 @@
         <p:spPr>
           <a:xfrm>
             <a:off x="932760" y="3237120"/>
-            <a:ext cx="2559600" cy="273600"/>
+            <a:ext cx="2558880" cy="272880"/>
           </a:xfrm>
           <a:prstGeom prst="rect">
             <a:avLst/>
@@ -29924,7 +29889,7 @@
         <p:spPr>
           <a:xfrm>
             <a:off x="3657600" y="3237120"/>
-            <a:ext cx="3748320" cy="273600"/>
+            <a:ext cx="3747600" cy="272880"/>
           </a:xfrm>
           <a:prstGeom prst="rect">
             <a:avLst/>
@@ -29985,7 +29950,7 @@
         <p:spPr>
           <a:xfrm>
             <a:off x="7589520" y="3237120"/>
-            <a:ext cx="3931200" cy="273600"/>
+            <a:ext cx="3930480" cy="272880"/>
           </a:xfrm>
           <a:prstGeom prst="rect">
             <a:avLst/>
@@ -30046,7 +30011,7 @@
         <p:spPr>
           <a:xfrm>
             <a:off x="640080" y="3730680"/>
-            <a:ext cx="10880640" cy="566280"/>
+            <a:ext cx="10879920" cy="565560"/>
           </a:xfrm>
           <a:prstGeom prst="roundRect">
             <a:avLst>
@@ -30101,7 +30066,7 @@
         <p:spPr>
           <a:xfrm>
             <a:off x="932760" y="3877200"/>
-            <a:ext cx="2559600" cy="273600"/>
+            <a:ext cx="2558880" cy="272880"/>
           </a:xfrm>
           <a:prstGeom prst="rect">
             <a:avLst/>
@@ -30162,7 +30127,7 @@
         <p:spPr>
           <a:xfrm>
             <a:off x="3657600" y="3877200"/>
-            <a:ext cx="3748320" cy="273600"/>
+            <a:ext cx="3747600" cy="272880"/>
           </a:xfrm>
           <a:prstGeom prst="rect">
             <a:avLst/>
@@ -30223,7 +30188,7 @@
         <p:spPr>
           <a:xfrm>
             <a:off x="7589520" y="3877200"/>
-            <a:ext cx="3931200" cy="273600"/>
+            <a:ext cx="3930480" cy="272880"/>
           </a:xfrm>
           <a:prstGeom prst="rect">
             <a:avLst/>
@@ -30284,7 +30249,7 @@
         <p:spPr>
           <a:xfrm>
             <a:off x="640080" y="4370760"/>
-            <a:ext cx="10880640" cy="566280"/>
+            <a:ext cx="10879920" cy="565560"/>
           </a:xfrm>
           <a:prstGeom prst="roundRect">
             <a:avLst>
@@ -30339,7 +30304,7 @@
         <p:spPr>
           <a:xfrm>
             <a:off x="932760" y="4517280"/>
-            <a:ext cx="2559600" cy="273600"/>
+            <a:ext cx="2558880" cy="272880"/>
           </a:xfrm>
           <a:prstGeom prst="rect">
             <a:avLst/>
@@ -30400,7 +30365,7 @@
         <p:spPr>
           <a:xfrm>
             <a:off x="3657600" y="4517280"/>
-            <a:ext cx="3748320" cy="273600"/>
+            <a:ext cx="3747600" cy="272880"/>
           </a:xfrm>
           <a:prstGeom prst="rect">
             <a:avLst/>
@@ -30461,7 +30426,7 @@
         <p:spPr>
           <a:xfrm>
             <a:off x="7589520" y="4517280"/>
-            <a:ext cx="3931200" cy="273600"/>
+            <a:ext cx="3930480" cy="272880"/>
           </a:xfrm>
           <a:prstGeom prst="rect">
             <a:avLst/>
@@ -30522,7 +30487,7 @@
         <p:spPr>
           <a:xfrm>
             <a:off x="640080" y="5010840"/>
-            <a:ext cx="10880640" cy="566280"/>
+            <a:ext cx="10879920" cy="565560"/>
           </a:xfrm>
           <a:prstGeom prst="roundRect">
             <a:avLst>
@@ -30577,7 +30542,7 @@
         <p:spPr>
           <a:xfrm>
             <a:off x="932760" y="5157360"/>
-            <a:ext cx="2559600" cy="273600"/>
+            <a:ext cx="2558880" cy="272880"/>
           </a:xfrm>
           <a:prstGeom prst="rect">
             <a:avLst/>
@@ -30638,7 +30603,7 @@
         <p:spPr>
           <a:xfrm>
             <a:off x="3657600" y="5157360"/>
-            <a:ext cx="3748320" cy="273600"/>
+            <a:ext cx="3747600" cy="272880"/>
           </a:xfrm>
           <a:prstGeom prst="rect">
             <a:avLst/>
@@ -30699,7 +30664,7 @@
         <p:spPr>
           <a:xfrm>
             <a:off x="7589520" y="5157360"/>
-            <a:ext cx="3931200" cy="273600"/>
+            <a:ext cx="3930480" cy="272880"/>
           </a:xfrm>
           <a:prstGeom prst="rect">
             <a:avLst/>
@@ -30760,7 +30725,7 @@
         <p:spPr>
           <a:xfrm>
             <a:off x="640080" y="5650920"/>
-            <a:ext cx="10880640" cy="566280"/>
+            <a:ext cx="10879920" cy="565560"/>
           </a:xfrm>
           <a:prstGeom prst="roundRect">
             <a:avLst>
@@ -30815,7 +30780,7 @@
         <p:spPr>
           <a:xfrm>
             <a:off x="932760" y="5797440"/>
-            <a:ext cx="2559600" cy="273600"/>
+            <a:ext cx="2558880" cy="272880"/>
           </a:xfrm>
           <a:prstGeom prst="rect">
             <a:avLst/>
@@ -30876,7 +30841,7 @@
         <p:spPr>
           <a:xfrm>
             <a:off x="3657600" y="5797440"/>
-            <a:ext cx="3748320" cy="273600"/>
+            <a:ext cx="3747600" cy="272880"/>
           </a:xfrm>
           <a:prstGeom prst="rect">
             <a:avLst/>
@@ -30937,7 +30902,7 @@
         <p:spPr>
           <a:xfrm>
             <a:off x="7589520" y="5797440"/>
-            <a:ext cx="3931200" cy="273600"/>
+            <a:ext cx="3930480" cy="272880"/>
           </a:xfrm>
           <a:prstGeom prst="rect">
             <a:avLst/>
@@ -31035,7 +31000,7 @@
         <p:spPr>
           <a:xfrm>
             <a:off x="640080" y="457200"/>
-            <a:ext cx="7314480" cy="273600"/>
+            <a:ext cx="7313760" cy="272880"/>
           </a:xfrm>
           <a:prstGeom prst="rect">
             <a:avLst/>
@@ -31096,7 +31061,7 @@
         <p:spPr>
           <a:xfrm>
             <a:off x="640080" y="777240"/>
-            <a:ext cx="10057680" cy="547920"/>
+            <a:ext cx="10056960" cy="547200"/>
           </a:xfrm>
           <a:prstGeom prst="rect">
             <a:avLst/>
@@ -31157,7 +31122,7 @@
         <p:spPr>
           <a:xfrm>
             <a:off x="640080" y="1572840"/>
-            <a:ext cx="5028480" cy="959400"/>
+            <a:ext cx="5027760" cy="958680"/>
           </a:xfrm>
           <a:prstGeom prst="roundRect">
             <a:avLst>
@@ -31205,7 +31170,7 @@
         <p:spPr>
           <a:xfrm>
             <a:off x="868680" y="1691640"/>
-            <a:ext cx="2742480" cy="273600"/>
+            <a:ext cx="2741760" cy="272880"/>
           </a:xfrm>
           <a:prstGeom prst="rect">
             <a:avLst/>
@@ -31266,7 +31231,7 @@
         <p:spPr>
           <a:xfrm>
             <a:off x="868680" y="1938600"/>
-            <a:ext cx="4662720" cy="273600"/>
+            <a:ext cx="4662000" cy="272880"/>
           </a:xfrm>
           <a:prstGeom prst="rect">
             <a:avLst/>
@@ -31327,7 +31292,7 @@
         <p:spPr>
           <a:xfrm>
             <a:off x="868680" y="2194560"/>
-            <a:ext cx="4662720" cy="273600"/>
+            <a:ext cx="4662000" cy="272880"/>
           </a:xfrm>
           <a:prstGeom prst="rect">
             <a:avLst/>
@@ -31388,7 +31353,7 @@
         <p:spPr>
           <a:xfrm>
             <a:off x="5897880" y="1572840"/>
-            <a:ext cx="5622840" cy="959400"/>
+            <a:ext cx="5622120" cy="958680"/>
           </a:xfrm>
           <a:prstGeom prst="roundRect">
             <a:avLst>
@@ -31436,7 +31401,7 @@
         <p:spPr>
           <a:xfrm>
             <a:off x="6126480" y="1691640"/>
-            <a:ext cx="3656880" cy="273600"/>
+            <a:ext cx="3656160" cy="272880"/>
           </a:xfrm>
           <a:prstGeom prst="rect">
             <a:avLst/>
@@ -31497,7 +31462,7 @@
         <p:spPr>
           <a:xfrm>
             <a:off x="6126480" y="1938600"/>
-            <a:ext cx="5211360" cy="273600"/>
+            <a:ext cx="5210640" cy="272880"/>
           </a:xfrm>
           <a:prstGeom prst="rect">
             <a:avLst/>
@@ -31558,7 +31523,7 @@
         <p:spPr>
           <a:xfrm>
             <a:off x="6126480" y="2194560"/>
-            <a:ext cx="5211360" cy="273600"/>
+            <a:ext cx="5210640" cy="272880"/>
           </a:xfrm>
           <a:prstGeom prst="rect">
             <a:avLst/>
@@ -31619,7 +31584,7 @@
         <p:spPr>
           <a:xfrm>
             <a:off x="640080" y="2743200"/>
-            <a:ext cx="7771680" cy="2513880"/>
+            <a:ext cx="7770960" cy="2513160"/>
           </a:xfrm>
           <a:prstGeom prst="roundRect">
             <a:avLst>
@@ -31667,7 +31632,7 @@
         <p:spPr>
           <a:xfrm>
             <a:off x="868680" y="2880360"/>
-            <a:ext cx="5485680" cy="273600"/>
+            <a:ext cx="5484960" cy="272880"/>
           </a:xfrm>
           <a:prstGeom prst="rect">
             <a:avLst/>
@@ -31728,7 +31693,7 @@
         <p:spPr>
           <a:xfrm>
             <a:off x="868680" y="3200400"/>
-            <a:ext cx="1736640" cy="1233720"/>
+            <a:ext cx="1735920" cy="1233000"/>
           </a:xfrm>
           <a:prstGeom prst="roundRect">
             <a:avLst>
@@ -31776,7 +31741,7 @@
         <p:spPr>
           <a:xfrm>
             <a:off x="868680" y="3310200"/>
-            <a:ext cx="1736640" cy="236880"/>
+            <a:ext cx="1735920" cy="236160"/>
           </a:xfrm>
           <a:prstGeom prst="rect">
             <a:avLst/>
@@ -31837,7 +31802,7 @@
         <p:spPr>
           <a:xfrm>
             <a:off x="941760" y="3566160"/>
-            <a:ext cx="1590480" cy="547920"/>
+            <a:ext cx="1589760" cy="547200"/>
           </a:xfrm>
           <a:prstGeom prst="rect">
             <a:avLst/>
@@ -31928,7 +31893,7 @@
         <p:spPr>
           <a:xfrm>
             <a:off x="2724840" y="3200400"/>
-            <a:ext cx="1736640" cy="1233720"/>
+            <a:ext cx="1735920" cy="1233000"/>
           </a:xfrm>
           <a:prstGeom prst="roundRect">
             <a:avLst>
@@ -31976,7 +31941,7 @@
         <p:spPr>
           <a:xfrm>
             <a:off x="2724840" y="3310200"/>
-            <a:ext cx="1736640" cy="236880"/>
+            <a:ext cx="1735920" cy="236160"/>
           </a:xfrm>
           <a:prstGeom prst="rect">
             <a:avLst/>
@@ -32037,7 +32002,7 @@
         <p:spPr>
           <a:xfrm>
             <a:off x="2797920" y="3566160"/>
-            <a:ext cx="1590480" cy="547920"/>
+            <a:ext cx="1589760" cy="547200"/>
           </a:xfrm>
           <a:prstGeom prst="rect">
             <a:avLst/>
@@ -32128,7 +32093,7 @@
         <p:spPr>
           <a:xfrm>
             <a:off x="4581000" y="3200400"/>
-            <a:ext cx="1736640" cy="1233720"/>
+            <a:ext cx="1735920" cy="1233000"/>
           </a:xfrm>
           <a:prstGeom prst="roundRect">
             <a:avLst>
@@ -32176,7 +32141,7 @@
         <p:spPr>
           <a:xfrm>
             <a:off x="4581000" y="3310200"/>
-            <a:ext cx="1736640" cy="236880"/>
+            <a:ext cx="1735920" cy="236160"/>
           </a:xfrm>
           <a:prstGeom prst="rect">
             <a:avLst/>
@@ -32237,7 +32202,7 @@
         <p:spPr>
           <a:xfrm>
             <a:off x="4654440" y="3566160"/>
-            <a:ext cx="1590480" cy="547920"/>
+            <a:ext cx="1589760" cy="547200"/>
           </a:xfrm>
           <a:prstGeom prst="rect">
             <a:avLst/>
@@ -32328,7 +32293,7 @@
         <p:spPr>
           <a:xfrm>
             <a:off x="6437520" y="3200400"/>
-            <a:ext cx="1736640" cy="1233720"/>
+            <a:ext cx="1735920" cy="1233000"/>
           </a:xfrm>
           <a:prstGeom prst="roundRect">
             <a:avLst>
@@ -32376,7 +32341,7 @@
         <p:spPr>
           <a:xfrm>
             <a:off x="6437520" y="3310200"/>
-            <a:ext cx="1736640" cy="236880"/>
+            <a:ext cx="1735920" cy="236160"/>
           </a:xfrm>
           <a:prstGeom prst="rect">
             <a:avLst/>
@@ -32437,7 +32402,7 @@
         <p:spPr>
           <a:xfrm>
             <a:off x="6510600" y="3566160"/>
-            <a:ext cx="1590480" cy="547920"/>
+            <a:ext cx="1589760" cy="547200"/>
           </a:xfrm>
           <a:prstGeom prst="rect">
             <a:avLst/>
@@ -32528,7 +32493,7 @@
         <p:spPr>
           <a:xfrm>
             <a:off x="868680" y="4572000"/>
-            <a:ext cx="7314480" cy="273600"/>
+            <a:ext cx="7313760" cy="272880"/>
           </a:xfrm>
           <a:prstGeom prst="rect">
             <a:avLst/>
@@ -32589,7 +32554,7 @@
         <p:spPr>
           <a:xfrm>
             <a:off x="868680" y="4846320"/>
-            <a:ext cx="7314480" cy="273600"/>
+            <a:ext cx="7313760" cy="272880"/>
           </a:xfrm>
           <a:prstGeom prst="rect">
             <a:avLst/>
@@ -32650,7 +32615,7 @@
         <p:spPr>
           <a:xfrm>
             <a:off x="8595360" y="2743200"/>
-            <a:ext cx="2925360" cy="1169640"/>
+            <a:ext cx="2924640" cy="1168920"/>
           </a:xfrm>
           <a:prstGeom prst="roundRect">
             <a:avLst>
@@ -32698,7 +32663,7 @@
         <p:spPr>
           <a:xfrm>
             <a:off x="8823960" y="2880360"/>
-            <a:ext cx="1828080" cy="273600"/>
+            <a:ext cx="1827360" cy="272880"/>
           </a:xfrm>
           <a:prstGeom prst="rect">
             <a:avLst/>
@@ -32759,7 +32724,7 @@
         <p:spPr>
           <a:xfrm>
             <a:off x="8823960" y="3127320"/>
-            <a:ext cx="2468160" cy="273600"/>
+            <a:ext cx="2467440" cy="272880"/>
           </a:xfrm>
           <a:prstGeom prst="rect">
             <a:avLst/>
@@ -32820,7 +32785,7 @@
         <p:spPr>
           <a:xfrm>
             <a:off x="8823960" y="3346560"/>
-            <a:ext cx="2651040" cy="273600"/>
+            <a:ext cx="2650320" cy="272880"/>
           </a:xfrm>
           <a:prstGeom prst="rect">
             <a:avLst/>
@@ -32881,7 +32846,7 @@
         <p:spPr>
           <a:xfrm>
             <a:off x="8823960" y="3566160"/>
-            <a:ext cx="2651040" cy="273600"/>
+            <a:ext cx="2650320" cy="272880"/>
           </a:xfrm>
           <a:prstGeom prst="rect">
             <a:avLst/>
@@ -32942,7 +32907,7 @@
         <p:spPr>
           <a:xfrm>
             <a:off x="8595360" y="4087440"/>
-            <a:ext cx="2925360" cy="1169640"/>
+            <a:ext cx="2924640" cy="1168920"/>
           </a:xfrm>
           <a:prstGeom prst="roundRect">
             <a:avLst>
@@ -32990,7 +32955,7 @@
         <p:spPr>
           <a:xfrm>
             <a:off x="8823960" y="4224600"/>
-            <a:ext cx="2193840" cy="273600"/>
+            <a:ext cx="2193120" cy="272880"/>
           </a:xfrm>
           <a:prstGeom prst="rect">
             <a:avLst/>
@@ -33051,7 +33016,7 @@
         <p:spPr>
           <a:xfrm>
             <a:off x="8823960" y="4471560"/>
-            <a:ext cx="2468160" cy="273600"/>
+            <a:ext cx="2467440" cy="272880"/>
           </a:xfrm>
           <a:prstGeom prst="rect">
             <a:avLst/>
@@ -33112,7 +33077,7 @@
         <p:spPr>
           <a:xfrm>
             <a:off x="8823960" y="4690800"/>
-            <a:ext cx="2651040" cy="273600"/>
+            <a:ext cx="2650320" cy="272880"/>
           </a:xfrm>
           <a:prstGeom prst="rect">
             <a:avLst/>
@@ -33173,7 +33138,7 @@
         <p:spPr>
           <a:xfrm>
             <a:off x="8823960" y="4910400"/>
-            <a:ext cx="2651040" cy="273600"/>
+            <a:ext cx="2650320" cy="272880"/>
           </a:xfrm>
           <a:prstGeom prst="rect">
             <a:avLst/>
@@ -33234,7 +33199,7 @@
         <p:spPr>
           <a:xfrm>
             <a:off x="640080" y="5440680"/>
-            <a:ext cx="10880640" cy="657720"/>
+            <a:ext cx="10879920" cy="657000"/>
           </a:xfrm>
           <a:prstGeom prst="roundRect">
             <a:avLst>
@@ -33282,7 +33247,7 @@
         <p:spPr>
           <a:xfrm>
             <a:off x="868680" y="5559480"/>
-            <a:ext cx="1828080" cy="273600"/>
+            <a:ext cx="1827360" cy="272880"/>
           </a:xfrm>
           <a:prstGeom prst="rect">
             <a:avLst/>
@@ -33343,7 +33308,7 @@
         <p:spPr>
           <a:xfrm>
             <a:off x="868680" y="5797440"/>
-            <a:ext cx="10423440" cy="273600"/>
+            <a:ext cx="10422720" cy="272880"/>
           </a:xfrm>
           <a:prstGeom prst="rect">
             <a:avLst/>
@@ -33441,7 +33406,7 @@
         <p:spPr>
           <a:xfrm>
             <a:off x="640080" y="311040"/>
-            <a:ext cx="7314480" cy="255240"/>
+            <a:ext cx="7313760" cy="254520"/>
           </a:xfrm>
           <a:prstGeom prst="rect">
             <a:avLst/>
@@ -33502,7 +33467,7 @@
         <p:spPr>
           <a:xfrm>
             <a:off x="640080" y="603360"/>
-            <a:ext cx="10880640" cy="657720"/>
+            <a:ext cx="10879920" cy="657000"/>
           </a:xfrm>
           <a:prstGeom prst="rect">
             <a:avLst/>
@@ -33563,7 +33528,7 @@
         <p:spPr>
           <a:xfrm>
             <a:off x="640080" y="1691640"/>
-            <a:ext cx="10880640" cy="840600"/>
+            <a:ext cx="10879920" cy="839880"/>
           </a:xfrm>
           <a:prstGeom prst="roundRect">
             <a:avLst>
@@ -33618,7 +33583,7 @@
         <p:spPr>
           <a:xfrm>
             <a:off x="932760" y="1929240"/>
-            <a:ext cx="383400" cy="383400"/>
+            <a:ext cx="382680" cy="382680"/>
           </a:xfrm>
           <a:prstGeom prst="ellipse">
             <a:avLst/>
@@ -33664,7 +33629,7 @@
         <p:spPr>
           <a:xfrm>
             <a:off x="932760" y="1929240"/>
-            <a:ext cx="383400" cy="383400"/>
+            <a:ext cx="382680" cy="382680"/>
           </a:xfrm>
           <a:prstGeom prst="rect">
             <a:avLst/>
@@ -33725,7 +33690,7 @@
         <p:spPr>
           <a:xfrm>
             <a:off x="1536120" y="1856160"/>
-            <a:ext cx="3108240" cy="291960"/>
+            <a:ext cx="3107520" cy="291240"/>
           </a:xfrm>
           <a:prstGeom prst="rect">
             <a:avLst/>
@@ -33786,7 +33751,7 @@
         <p:spPr>
           <a:xfrm>
             <a:off x="4754880" y="1874520"/>
-            <a:ext cx="6400080" cy="456480"/>
+            <a:ext cx="6399360" cy="455760"/>
           </a:xfrm>
           <a:prstGeom prst="rect">
             <a:avLst/>
@@ -33847,7 +33812,7 @@
         <p:spPr>
           <a:xfrm>
             <a:off x="640080" y="2624400"/>
-            <a:ext cx="10880640" cy="840600"/>
+            <a:ext cx="10879920" cy="839880"/>
           </a:xfrm>
           <a:prstGeom prst="roundRect">
             <a:avLst>
@@ -33902,7 +33867,7 @@
         <p:spPr>
           <a:xfrm>
             <a:off x="932760" y="2862000"/>
-            <a:ext cx="383400" cy="383400"/>
+            <a:ext cx="382680" cy="382680"/>
           </a:xfrm>
           <a:prstGeom prst="ellipse">
             <a:avLst/>
@@ -33948,7 +33913,7 @@
         <p:spPr>
           <a:xfrm>
             <a:off x="932760" y="2862000"/>
-            <a:ext cx="383400" cy="383400"/>
+            <a:ext cx="382680" cy="382680"/>
           </a:xfrm>
           <a:prstGeom prst="rect">
             <a:avLst/>
@@ -34009,7 +33974,7 @@
         <p:spPr>
           <a:xfrm>
             <a:off x="1536120" y="2788920"/>
-            <a:ext cx="3108240" cy="291960"/>
+            <a:ext cx="3107520" cy="291240"/>
           </a:xfrm>
           <a:prstGeom prst="rect">
             <a:avLst/>
@@ -34070,7 +34035,7 @@
         <p:spPr>
           <a:xfrm>
             <a:off x="4754880" y="2807280"/>
-            <a:ext cx="6400080" cy="456480"/>
+            <a:ext cx="6399360" cy="455760"/>
           </a:xfrm>
           <a:prstGeom prst="rect">
             <a:avLst/>
@@ -34131,7 +34096,7 @@
         <p:spPr>
           <a:xfrm>
             <a:off x="640080" y="3557160"/>
-            <a:ext cx="10880640" cy="840600"/>
+            <a:ext cx="10879920" cy="839880"/>
           </a:xfrm>
           <a:prstGeom prst="roundRect">
             <a:avLst>
@@ -34186,7 +34151,7 @@
         <p:spPr>
           <a:xfrm>
             <a:off x="932760" y="3794760"/>
-            <a:ext cx="383400" cy="383400"/>
+            <a:ext cx="382680" cy="382680"/>
           </a:xfrm>
           <a:prstGeom prst="ellipse">
             <a:avLst/>
@@ -34232,7 +34197,7 @@
         <p:spPr>
           <a:xfrm>
             <a:off x="932760" y="3794760"/>
-            <a:ext cx="383400" cy="383400"/>
+            <a:ext cx="382680" cy="382680"/>
           </a:xfrm>
           <a:prstGeom prst="rect">
             <a:avLst/>
@@ -34293,7 +34258,7 @@
         <p:spPr>
           <a:xfrm>
             <a:off x="1536120" y="3721680"/>
-            <a:ext cx="3108240" cy="291960"/>
+            <a:ext cx="3107520" cy="291240"/>
           </a:xfrm>
           <a:prstGeom prst="rect">
             <a:avLst/>
@@ -34354,7 +34319,7 @@
         <p:spPr>
           <a:xfrm>
             <a:off x="4754880" y="3740040"/>
-            <a:ext cx="6400080" cy="456480"/>
+            <a:ext cx="6399360" cy="455760"/>
           </a:xfrm>
           <a:prstGeom prst="rect">
             <a:avLst/>
@@ -34415,7 +34380,7 @@
         <p:spPr>
           <a:xfrm>
             <a:off x="640080" y="4489560"/>
-            <a:ext cx="10880640" cy="840600"/>
+            <a:ext cx="10879920" cy="839880"/>
           </a:xfrm>
           <a:prstGeom prst="roundRect">
             <a:avLst>
@@ -34470,7 +34435,7 @@
         <p:spPr>
           <a:xfrm>
             <a:off x="932760" y="4727520"/>
-            <a:ext cx="383400" cy="383400"/>
+            <a:ext cx="382680" cy="382680"/>
           </a:xfrm>
           <a:prstGeom prst="ellipse">
             <a:avLst/>
@@ -34516,7 +34481,7 @@
         <p:spPr>
           <a:xfrm>
             <a:off x="932760" y="4727520"/>
-            <a:ext cx="383400" cy="383400"/>
+            <a:ext cx="382680" cy="382680"/>
           </a:xfrm>
           <a:prstGeom prst="rect">
             <a:avLst/>
@@ -34577,7 +34542,7 @@
         <p:spPr>
           <a:xfrm>
             <a:off x="1536120" y="4654440"/>
-            <a:ext cx="3108240" cy="291960"/>
+            <a:ext cx="3107520" cy="291240"/>
           </a:xfrm>
           <a:prstGeom prst="rect">
             <a:avLst/>
@@ -34638,7 +34603,7 @@
         <p:spPr>
           <a:xfrm>
             <a:off x="4754880" y="4672440"/>
-            <a:ext cx="6400080" cy="456480"/>
+            <a:ext cx="6399360" cy="455760"/>
           </a:xfrm>
           <a:prstGeom prst="rect">
             <a:avLst/>
@@ -34699,7 +34664,7 @@
         <p:spPr>
           <a:xfrm>
             <a:off x="640080" y="5440680"/>
-            <a:ext cx="10880640" cy="776520"/>
+            <a:ext cx="10879920" cy="775800"/>
           </a:xfrm>
           <a:prstGeom prst="roundRect">
             <a:avLst>
@@ -34754,7 +34719,7 @@
         <p:spPr>
           <a:xfrm>
             <a:off x="960120" y="5614560"/>
-            <a:ext cx="4571280" cy="291960"/>
+            <a:ext cx="4570560" cy="291240"/>
           </a:xfrm>
           <a:prstGeom prst="rect">
             <a:avLst/>
@@ -34815,7 +34780,7 @@
         <p:spPr>
           <a:xfrm>
             <a:off x="5577840" y="5650920"/>
-            <a:ext cx="5622840" cy="291960"/>
+            <a:ext cx="5622120" cy="291240"/>
           </a:xfrm>
           <a:prstGeom prst="rect">
             <a:avLst/>
@@ -34913,7 +34878,7 @@
         <p:spPr>
           <a:xfrm>
             <a:off x="640080" y="311040"/>
-            <a:ext cx="7314840" cy="255600"/>
+            <a:ext cx="7314120" cy="254880"/>
           </a:xfrm>
           <a:prstGeom prst="rect">
             <a:avLst/>
@@ -34974,7 +34939,7 @@
         <p:spPr>
           <a:xfrm>
             <a:off x="640080" y="603360"/>
-            <a:ext cx="10881000" cy="658080"/>
+            <a:ext cx="10880280" cy="657360"/>
           </a:xfrm>
           <a:prstGeom prst="rect">
             <a:avLst/>
@@ -35035,7 +35000,7 @@
         <p:spPr>
           <a:xfrm>
             <a:off x="4084200" y="1719000"/>
-            <a:ext cx="4023000" cy="4562640"/>
+            <a:ext cx="4022280" cy="4561920"/>
           </a:xfrm>
           <a:prstGeom prst="roundRect">
             <a:avLst>
@@ -35094,7 +35059,7 @@
         <p:spPr>
           <a:xfrm>
             <a:off x="4838760" y="2286000"/>
-            <a:ext cx="2514240" cy="2514240"/>
+            <a:ext cx="2513520" cy="2513520"/>
           </a:xfrm>
           <a:prstGeom prst="rect">
             <a:avLst/>
@@ -35114,7 +35079,7 @@
         <p:spPr>
           <a:xfrm>
             <a:off x="4084200" y="5166360"/>
-            <a:ext cx="4023000" cy="255600"/>
+            <a:ext cx="4022280" cy="254880"/>
           </a:xfrm>
           <a:prstGeom prst="rect">
             <a:avLst/>
@@ -35175,7 +35140,7 @@
         <p:spPr>
           <a:xfrm>
             <a:off x="4084200" y="5513760"/>
-            <a:ext cx="4023000" cy="237240"/>
+            <a:ext cx="4022280" cy="236520"/>
           </a:xfrm>
           <a:prstGeom prst="rect">
             <a:avLst/>
@@ -35273,7 +35238,7 @@
         <p:spPr>
           <a:xfrm>
             <a:off x="640080" y="311040"/>
-            <a:ext cx="7314480" cy="255240"/>
+            <a:ext cx="7313760" cy="254520"/>
           </a:xfrm>
           <a:prstGeom prst="rect">
             <a:avLst/>
@@ -35334,7 +35299,7 @@
         <p:spPr>
           <a:xfrm>
             <a:off x="640080" y="603360"/>
-            <a:ext cx="10880640" cy="657720"/>
+            <a:ext cx="10879920" cy="657000"/>
           </a:xfrm>
           <a:prstGeom prst="rect">
             <a:avLst/>
@@ -35395,7 +35360,7 @@
         <p:spPr>
           <a:xfrm>
             <a:off x="640080" y="1353240"/>
-            <a:ext cx="10880640" cy="383400"/>
+            <a:ext cx="10879920" cy="382680"/>
           </a:xfrm>
           <a:prstGeom prst="rect">
             <a:avLst/>
@@ -35456,7 +35421,7 @@
         <p:spPr>
           <a:xfrm>
             <a:off x="640080" y="1965960"/>
-            <a:ext cx="3492360" cy="1480680"/>
+            <a:ext cx="3491640" cy="1479960"/>
           </a:xfrm>
           <a:prstGeom prst="roundRect">
             <a:avLst>
@@ -35511,7 +35476,7 @@
         <p:spPr>
           <a:xfrm>
             <a:off x="914400" y="2167200"/>
-            <a:ext cx="2943720" cy="291960"/>
+            <a:ext cx="2943000" cy="291240"/>
           </a:xfrm>
           <a:prstGeom prst="rect">
             <a:avLst/>
@@ -35572,7 +35537,7 @@
         <p:spPr>
           <a:xfrm>
             <a:off x="914400" y="2514600"/>
-            <a:ext cx="2943720" cy="785520"/>
+            <a:ext cx="2943000" cy="784800"/>
           </a:xfrm>
           <a:prstGeom prst="rect">
             <a:avLst/>
@@ -35633,7 +35598,7 @@
         <p:spPr>
           <a:xfrm>
             <a:off x="4352400" y="1965960"/>
-            <a:ext cx="3492360" cy="1480680"/>
+            <a:ext cx="3491640" cy="1479960"/>
           </a:xfrm>
           <a:prstGeom prst="roundRect">
             <a:avLst>
@@ -35688,7 +35653,7 @@
         <p:spPr>
           <a:xfrm>
             <a:off x="4626720" y="2167200"/>
-            <a:ext cx="2943720" cy="291960"/>
+            <a:ext cx="2943000" cy="291240"/>
           </a:xfrm>
           <a:prstGeom prst="rect">
             <a:avLst/>
@@ -35749,7 +35714,7 @@
         <p:spPr>
           <a:xfrm>
             <a:off x="4626720" y="2514600"/>
-            <a:ext cx="2943720" cy="785520"/>
+            <a:ext cx="2943000" cy="784800"/>
           </a:xfrm>
           <a:prstGeom prst="rect">
             <a:avLst/>
@@ -35810,7 +35775,7 @@
         <p:spPr>
           <a:xfrm>
             <a:off x="8065080" y="1965960"/>
-            <a:ext cx="3492360" cy="1480680"/>
+            <a:ext cx="3491640" cy="1479960"/>
           </a:xfrm>
           <a:prstGeom prst="roundRect">
             <a:avLst>
@@ -35865,7 +35830,7 @@
         <p:spPr>
           <a:xfrm>
             <a:off x="8339400" y="2167200"/>
-            <a:ext cx="2943720" cy="291960"/>
+            <a:ext cx="2943000" cy="291240"/>
           </a:xfrm>
           <a:prstGeom prst="rect">
             <a:avLst/>
@@ -35926,7 +35891,7 @@
         <p:spPr>
           <a:xfrm>
             <a:off x="8339400" y="2514600"/>
-            <a:ext cx="2943720" cy="785520"/>
+            <a:ext cx="2943000" cy="784800"/>
           </a:xfrm>
           <a:prstGeom prst="rect">
             <a:avLst/>
@@ -35987,7 +35952,7 @@
         <p:spPr>
           <a:xfrm>
             <a:off x="640080" y="3684960"/>
-            <a:ext cx="3492360" cy="1480680"/>
+            <a:ext cx="3491640" cy="1479960"/>
           </a:xfrm>
           <a:prstGeom prst="roundRect">
             <a:avLst>
@@ -36042,7 +36007,7 @@
         <p:spPr>
           <a:xfrm>
             <a:off x="914400" y="3886200"/>
-            <a:ext cx="2943720" cy="291960"/>
+            <a:ext cx="2943000" cy="291240"/>
           </a:xfrm>
           <a:prstGeom prst="rect">
             <a:avLst/>
@@ -36103,7 +36068,7 @@
         <p:spPr>
           <a:xfrm>
             <a:off x="914400" y="4233600"/>
-            <a:ext cx="2943720" cy="785520"/>
+            <a:ext cx="2943000" cy="784800"/>
           </a:xfrm>
           <a:prstGeom prst="rect">
             <a:avLst/>
@@ -36164,7 +36129,7 @@
         <p:spPr>
           <a:xfrm>
             <a:off x="4352400" y="3684960"/>
-            <a:ext cx="3492360" cy="1480680"/>
+            <a:ext cx="3491640" cy="1479960"/>
           </a:xfrm>
           <a:prstGeom prst="roundRect">
             <a:avLst>
@@ -36219,7 +36184,7 @@
         <p:spPr>
           <a:xfrm>
             <a:off x="4626720" y="3886200"/>
-            <a:ext cx="2943720" cy="291960"/>
+            <a:ext cx="2943000" cy="291240"/>
           </a:xfrm>
           <a:prstGeom prst="rect">
             <a:avLst/>
@@ -36280,7 +36245,7 @@
         <p:spPr>
           <a:xfrm>
             <a:off x="4626720" y="4233600"/>
-            <a:ext cx="2943720" cy="785520"/>
+            <a:ext cx="2943000" cy="784800"/>
           </a:xfrm>
           <a:prstGeom prst="rect">
             <a:avLst/>
@@ -36341,7 +36306,7 @@
         <p:spPr>
           <a:xfrm>
             <a:off x="8065080" y="3684960"/>
-            <a:ext cx="3492360" cy="1480680"/>
+            <a:ext cx="3491640" cy="1479960"/>
           </a:xfrm>
           <a:prstGeom prst="roundRect">
             <a:avLst>
@@ -36396,7 +36361,7 @@
         <p:spPr>
           <a:xfrm>
             <a:off x="8339400" y="3886200"/>
-            <a:ext cx="2943720" cy="291960"/>
+            <a:ext cx="2943000" cy="291240"/>
           </a:xfrm>
           <a:prstGeom prst="rect">
             <a:avLst/>
@@ -36457,7 +36422,7 @@
         <p:spPr>
           <a:xfrm>
             <a:off x="8339400" y="4233600"/>
-            <a:ext cx="2943720" cy="785520"/>
+            <a:ext cx="2943000" cy="784800"/>
           </a:xfrm>
           <a:prstGeom prst="rect">
             <a:avLst/>
@@ -36555,7 +36520,7 @@
         <p:spPr>
           <a:xfrm>
             <a:off x="640080" y="311040"/>
-            <a:ext cx="7314480" cy="255240"/>
+            <a:ext cx="7313760" cy="254520"/>
           </a:xfrm>
           <a:prstGeom prst="rect">
             <a:avLst/>
@@ -36616,7 +36581,7 @@
         <p:spPr>
           <a:xfrm>
             <a:off x="640080" y="603360"/>
-            <a:ext cx="10880640" cy="657720"/>
+            <a:ext cx="10879920" cy="657000"/>
           </a:xfrm>
           <a:prstGeom prst="rect">
             <a:avLst/>
@@ -36677,7 +36642,7 @@
         <p:spPr>
           <a:xfrm>
             <a:off x="640080" y="1600200"/>
-            <a:ext cx="1919520" cy="776520"/>
+            <a:ext cx="1918800" cy="775800"/>
           </a:xfrm>
           <a:prstGeom prst="roundRect">
             <a:avLst>
@@ -36732,7 +36697,7 @@
         <p:spPr>
           <a:xfrm>
             <a:off x="640080" y="1600200"/>
-            <a:ext cx="1919520" cy="776520"/>
+            <a:ext cx="1918800" cy="775800"/>
           </a:xfrm>
           <a:prstGeom prst="rect">
             <a:avLst/>
@@ -36823,7 +36788,7 @@
         <p:spPr>
           <a:xfrm>
             <a:off x="2971800" y="1600200"/>
-            <a:ext cx="1919520" cy="776520"/>
+            <a:ext cx="1918800" cy="775800"/>
           </a:xfrm>
           <a:prstGeom prst="roundRect">
             <a:avLst>
@@ -36878,7 +36843,7 @@
         <p:spPr>
           <a:xfrm>
             <a:off x="2971800" y="1600200"/>
-            <a:ext cx="1919520" cy="776520"/>
+            <a:ext cx="1918800" cy="775800"/>
           </a:xfrm>
           <a:prstGeom prst="rect">
             <a:avLst/>
@@ -36969,7 +36934,7 @@
         <p:spPr>
           <a:xfrm>
             <a:off x="5257800" y="1600200"/>
-            <a:ext cx="1919520" cy="776520"/>
+            <a:ext cx="1918800" cy="775800"/>
           </a:xfrm>
           <a:prstGeom prst="roundRect">
             <a:avLst>
@@ -37024,7 +36989,7 @@
         <p:spPr>
           <a:xfrm>
             <a:off x="5029200" y="1600200"/>
-            <a:ext cx="2285640" cy="776520"/>
+            <a:ext cx="2284920" cy="775800"/>
           </a:xfrm>
           <a:prstGeom prst="rect">
             <a:avLst/>
@@ -37247,7 +37212,7 @@
         <p:spPr>
           <a:xfrm>
             <a:off x="457200" y="2834640"/>
-            <a:ext cx="8046360" cy="2742480"/>
+            <a:ext cx="8045640" cy="2741760"/>
           </a:xfrm>
           <a:prstGeom prst="roundRect">
             <a:avLst>
@@ -37302,7 +37267,7 @@
         <p:spPr>
           <a:xfrm>
             <a:off x="914400" y="2980800"/>
-            <a:ext cx="4571280" cy="291960"/>
+            <a:ext cx="4570560" cy="291240"/>
           </a:xfrm>
           <a:prstGeom prst="rect">
             <a:avLst/>
@@ -37363,7 +37328,7 @@
         <p:spPr>
           <a:xfrm>
             <a:off x="914400" y="3401640"/>
-            <a:ext cx="2331000" cy="1050840"/>
+            <a:ext cx="2330280" cy="1050120"/>
           </a:xfrm>
           <a:prstGeom prst="roundRect">
             <a:avLst>
@@ -37418,7 +37383,7 @@
         <p:spPr>
           <a:xfrm>
             <a:off x="914400" y="3529440"/>
-            <a:ext cx="2331000" cy="255240"/>
+            <a:ext cx="2330280" cy="254520"/>
           </a:xfrm>
           <a:prstGeom prst="rect">
             <a:avLst/>
@@ -37479,7 +37444,7 @@
         <p:spPr>
           <a:xfrm>
             <a:off x="969120" y="3803760"/>
-            <a:ext cx="2221200" cy="547920"/>
+            <a:ext cx="2220480" cy="547200"/>
           </a:xfrm>
           <a:prstGeom prst="rect">
             <a:avLst/>
@@ -37570,7 +37535,7 @@
         <p:spPr>
           <a:xfrm>
             <a:off x="3429000" y="3401640"/>
-            <a:ext cx="1517040" cy="1050840"/>
+            <a:ext cx="1516320" cy="1050120"/>
           </a:xfrm>
           <a:prstGeom prst="roundRect">
             <a:avLst>
@@ -37625,7 +37590,7 @@
         <p:spPr>
           <a:xfrm>
             <a:off x="3429000" y="3529440"/>
-            <a:ext cx="1517040" cy="255240"/>
+            <a:ext cx="1516320" cy="254520"/>
           </a:xfrm>
           <a:prstGeom prst="rect">
             <a:avLst/>
@@ -37686,7 +37651,7 @@
         <p:spPr>
           <a:xfrm>
             <a:off x="3483720" y="3803760"/>
-            <a:ext cx="1407600" cy="547920"/>
+            <a:ext cx="1406880" cy="547200"/>
           </a:xfrm>
           <a:prstGeom prst="rect">
             <a:avLst/>
@@ -37777,7 +37742,7 @@
         <p:spPr>
           <a:xfrm>
             <a:off x="5129640" y="3401640"/>
-            <a:ext cx="1517040" cy="1050840"/>
+            <a:ext cx="1516320" cy="1050120"/>
           </a:xfrm>
           <a:prstGeom prst="roundRect">
             <a:avLst>
@@ -37832,7 +37797,7 @@
         <p:spPr>
           <a:xfrm>
             <a:off x="5129640" y="3529440"/>
-            <a:ext cx="1517040" cy="255240"/>
+            <a:ext cx="1516320" cy="254520"/>
           </a:xfrm>
           <a:prstGeom prst="rect">
             <a:avLst/>
@@ -37893,7 +37858,7 @@
         <p:spPr>
           <a:xfrm>
             <a:off x="5184720" y="3803760"/>
-            <a:ext cx="1407600" cy="547920"/>
+            <a:ext cx="1406880" cy="547200"/>
           </a:xfrm>
           <a:prstGeom prst="rect">
             <a:avLst/>
@@ -37954,7 +37919,7 @@
         <p:spPr>
           <a:xfrm>
             <a:off x="6830640" y="3401640"/>
-            <a:ext cx="1517040" cy="1050840"/>
+            <a:ext cx="1516320" cy="1050120"/>
           </a:xfrm>
           <a:prstGeom prst="roundRect">
             <a:avLst>
@@ -38009,7 +37974,7 @@
         <p:spPr>
           <a:xfrm>
             <a:off x="6830640" y="3529440"/>
-            <a:ext cx="1517040" cy="255240"/>
+            <a:ext cx="1516320" cy="254520"/>
           </a:xfrm>
           <a:prstGeom prst="rect">
             <a:avLst/>
@@ -38070,7 +38035,7 @@
         <p:spPr>
           <a:xfrm>
             <a:off x="6885360" y="3803760"/>
-            <a:ext cx="1407600" cy="547920"/>
+            <a:ext cx="1406880" cy="547200"/>
           </a:xfrm>
           <a:prstGeom prst="rect">
             <a:avLst/>
@@ -38131,7 +38096,7 @@
         <p:spPr>
           <a:xfrm>
             <a:off x="914400" y="4827960"/>
-            <a:ext cx="7223040" cy="273600"/>
+            <a:ext cx="7222320" cy="272880"/>
           </a:xfrm>
           <a:prstGeom prst="rect">
             <a:avLst/>
@@ -38192,7 +38157,7 @@
         <p:spPr>
           <a:xfrm>
             <a:off x="914400" y="5139000"/>
-            <a:ext cx="7223040" cy="273600"/>
+            <a:ext cx="7222320" cy="272880"/>
           </a:xfrm>
           <a:prstGeom prst="rect">
             <a:avLst/>
@@ -38253,7 +38218,7 @@
         <p:spPr>
           <a:xfrm>
             <a:off x="8915400" y="2834640"/>
-            <a:ext cx="2605320" cy="1188000"/>
+            <a:ext cx="2604600" cy="1187280"/>
           </a:xfrm>
           <a:prstGeom prst="roundRect">
             <a:avLst>
@@ -38308,7 +38273,7 @@
         <p:spPr>
           <a:xfrm>
             <a:off x="8915400" y="2999160"/>
-            <a:ext cx="2605320" cy="273600"/>
+            <a:ext cx="2604600" cy="272880"/>
           </a:xfrm>
           <a:prstGeom prst="rect">
             <a:avLst/>
@@ -38369,7 +38334,7 @@
         <p:spPr>
           <a:xfrm>
             <a:off x="9006840" y="3310200"/>
-            <a:ext cx="2422440" cy="547920"/>
+            <a:ext cx="2421720" cy="547200"/>
           </a:xfrm>
           <a:prstGeom prst="rect">
             <a:avLst/>
@@ -38504,7 +38469,7 @@
         <p:spPr>
           <a:xfrm>
             <a:off x="8915400" y="4251960"/>
-            <a:ext cx="2605320" cy="1325160"/>
+            <a:ext cx="2604600" cy="1324440"/>
           </a:xfrm>
           <a:prstGeom prst="roundRect">
             <a:avLst>
@@ -38559,7 +38524,7 @@
         <p:spPr>
           <a:xfrm>
             <a:off x="9006840" y="4389120"/>
-            <a:ext cx="2422440" cy="255240"/>
+            <a:ext cx="2421720" cy="254520"/>
           </a:xfrm>
           <a:prstGeom prst="rect">
             <a:avLst/>
@@ -38620,7 +38585,7 @@
         <p:spPr>
           <a:xfrm>
             <a:off x="9006840" y="4681800"/>
-            <a:ext cx="2422440" cy="776520"/>
+            <a:ext cx="2421720" cy="775800"/>
           </a:xfrm>
           <a:prstGeom prst="rect">
             <a:avLst/>
@@ -38778,7 +38743,7 @@
         <p:spPr>
           <a:xfrm>
             <a:off x="640080" y="311040"/>
-            <a:ext cx="7314480" cy="255240"/>
+            <a:ext cx="7313760" cy="254520"/>
           </a:xfrm>
           <a:prstGeom prst="rect">
             <a:avLst/>
@@ -38839,7 +38804,7 @@
         <p:spPr>
           <a:xfrm>
             <a:off x="640080" y="603360"/>
-            <a:ext cx="10880640" cy="657720"/>
+            <a:ext cx="10879920" cy="657000"/>
           </a:xfrm>
           <a:prstGeom prst="rect">
             <a:avLst/>
@@ -38900,7 +38865,7 @@
         <p:spPr>
           <a:xfrm>
             <a:off x="640080" y="1353240"/>
-            <a:ext cx="10880640" cy="383400"/>
+            <a:ext cx="10879920" cy="382680"/>
           </a:xfrm>
           <a:prstGeom prst="rect">
             <a:avLst/>
@@ -38961,7 +38926,7 @@
         <p:spPr>
           <a:xfrm>
             <a:off x="640080" y="2286000"/>
-            <a:ext cx="1699920" cy="1370880"/>
+            <a:ext cx="1699200" cy="1370160"/>
           </a:xfrm>
           <a:prstGeom prst="roundRect">
             <a:avLst>
@@ -39016,7 +38981,7 @@
         <p:spPr>
           <a:xfrm>
             <a:off x="1298520" y="2121480"/>
-            <a:ext cx="383400" cy="383400"/>
+            <a:ext cx="382680" cy="382680"/>
           </a:xfrm>
           <a:prstGeom prst="ellipse">
             <a:avLst/>
@@ -39062,7 +39027,7 @@
         <p:spPr>
           <a:xfrm>
             <a:off x="1298520" y="2121480"/>
-            <a:ext cx="383400" cy="383400"/>
+            <a:ext cx="382680" cy="382680"/>
           </a:xfrm>
           <a:prstGeom prst="rect">
             <a:avLst/>
@@ -39123,7 +39088,7 @@
         <p:spPr>
           <a:xfrm>
             <a:off x="731520" y="2788920"/>
-            <a:ext cx="1517040" cy="273600"/>
+            <a:ext cx="1516320" cy="272880"/>
           </a:xfrm>
           <a:prstGeom prst="rect">
             <a:avLst/>
@@ -39184,7 +39149,7 @@
         <p:spPr>
           <a:xfrm>
             <a:off x="749880" y="3072240"/>
-            <a:ext cx="1480680" cy="547920"/>
+            <a:ext cx="1479960" cy="547200"/>
           </a:xfrm>
           <a:prstGeom prst="rect">
             <a:avLst/>
@@ -39289,7 +39254,7 @@
         <p:spPr>
           <a:xfrm>
             <a:off x="2487240" y="2286000"/>
-            <a:ext cx="1699920" cy="1370880"/>
+            <a:ext cx="1699200" cy="1370160"/>
           </a:xfrm>
           <a:prstGeom prst="roundRect">
             <a:avLst>
@@ -39344,7 +39309,7 @@
         <p:spPr>
           <a:xfrm>
             <a:off x="3145680" y="2121480"/>
-            <a:ext cx="383400" cy="383400"/>
+            <a:ext cx="382680" cy="382680"/>
           </a:xfrm>
           <a:prstGeom prst="ellipse">
             <a:avLst/>
@@ -39390,7 +39355,7 @@
         <p:spPr>
           <a:xfrm>
             <a:off x="3145680" y="2121480"/>
-            <a:ext cx="383400" cy="383400"/>
+            <a:ext cx="382680" cy="382680"/>
           </a:xfrm>
           <a:prstGeom prst="rect">
             <a:avLst/>
@@ -39451,7 +39416,7 @@
         <p:spPr>
           <a:xfrm>
             <a:off x="2578680" y="2788920"/>
-            <a:ext cx="1517040" cy="273600"/>
+            <a:ext cx="1516320" cy="272880"/>
           </a:xfrm>
           <a:prstGeom prst="rect">
             <a:avLst/>
@@ -39512,7 +39477,7 @@
         <p:spPr>
           <a:xfrm>
             <a:off x="2597040" y="3072240"/>
-            <a:ext cx="1480680" cy="547920"/>
+            <a:ext cx="1479960" cy="547200"/>
           </a:xfrm>
           <a:prstGeom prst="rect">
             <a:avLst/>
@@ -39617,7 +39582,7 @@
         <p:spPr>
           <a:xfrm>
             <a:off x="4334400" y="2286000"/>
-            <a:ext cx="1699920" cy="1370880"/>
+            <a:ext cx="1699200" cy="1370160"/>
           </a:xfrm>
           <a:prstGeom prst="roundRect">
             <a:avLst>
@@ -39672,7 +39637,7 @@
         <p:spPr>
           <a:xfrm>
             <a:off x="4992480" y="2121480"/>
-            <a:ext cx="383400" cy="383400"/>
+            <a:ext cx="382680" cy="382680"/>
           </a:xfrm>
           <a:prstGeom prst="ellipse">
             <a:avLst/>
@@ -39718,7 +39683,7 @@
         <p:spPr>
           <a:xfrm>
             <a:off x="4992480" y="2121480"/>
-            <a:ext cx="383400" cy="383400"/>
+            <a:ext cx="382680" cy="382680"/>
           </a:xfrm>
           <a:prstGeom prst="rect">
             <a:avLst/>
@@ -39779,7 +39744,7 @@
         <p:spPr>
           <a:xfrm>
             <a:off x="4425840" y="2788920"/>
-            <a:ext cx="1517040" cy="273600"/>
+            <a:ext cx="1516320" cy="272880"/>
           </a:xfrm>
           <a:prstGeom prst="rect">
             <a:avLst/>
@@ -39840,7 +39805,7 @@
         <p:spPr>
           <a:xfrm>
             <a:off x="4443840" y="3072240"/>
-            <a:ext cx="1480680" cy="547920"/>
+            <a:ext cx="1479960" cy="547200"/>
           </a:xfrm>
           <a:prstGeom prst="rect">
             <a:avLst/>
@@ -39945,7 +39910,7 @@
         <p:spPr>
           <a:xfrm>
             <a:off x="6181200" y="2286000"/>
-            <a:ext cx="1699920" cy="1370880"/>
+            <a:ext cx="1699200" cy="1370160"/>
           </a:xfrm>
           <a:prstGeom prst="roundRect">
             <a:avLst>
@@ -40000,7 +39965,7 @@
         <p:spPr>
           <a:xfrm>
             <a:off x="6839640" y="2121480"/>
-            <a:ext cx="383400" cy="383400"/>
+            <a:ext cx="382680" cy="382680"/>
           </a:xfrm>
           <a:prstGeom prst="ellipse">
             <a:avLst/>
@@ -40046,7 +40011,7 @@
         <p:spPr>
           <a:xfrm>
             <a:off x="6839640" y="2121480"/>
-            <a:ext cx="383400" cy="383400"/>
+            <a:ext cx="382680" cy="382680"/>
           </a:xfrm>
           <a:prstGeom prst="rect">
             <a:avLst/>
@@ -40107,7 +40072,7 @@
         <p:spPr>
           <a:xfrm>
             <a:off x="6272640" y="2788920"/>
-            <a:ext cx="1517040" cy="273600"/>
+            <a:ext cx="1516320" cy="272880"/>
           </a:xfrm>
           <a:prstGeom prst="rect">
             <a:avLst/>
@@ -40168,7 +40133,7 @@
         <p:spPr>
           <a:xfrm>
             <a:off x="6291000" y="3072240"/>
-            <a:ext cx="1480680" cy="547920"/>
+            <a:ext cx="1479960" cy="547200"/>
           </a:xfrm>
           <a:prstGeom prst="rect">
             <a:avLst/>
@@ -40273,7 +40238,7 @@
         <p:spPr>
           <a:xfrm>
             <a:off x="8028360" y="2286000"/>
-            <a:ext cx="1699920" cy="1370880"/>
+            <a:ext cx="1699200" cy="1370160"/>
           </a:xfrm>
           <a:prstGeom prst="roundRect">
             <a:avLst>
@@ -40328,7 +40293,7 @@
         <p:spPr>
           <a:xfrm>
             <a:off x="8686800" y="2121480"/>
-            <a:ext cx="383400" cy="383400"/>
+            <a:ext cx="382680" cy="382680"/>
           </a:xfrm>
           <a:prstGeom prst="ellipse">
             <a:avLst/>
@@ -40374,7 +40339,7 @@
         <p:spPr>
           <a:xfrm>
             <a:off x="8686800" y="2121480"/>
-            <a:ext cx="383400" cy="383400"/>
+            <a:ext cx="382680" cy="382680"/>
           </a:xfrm>
           <a:prstGeom prst="rect">
             <a:avLst/>
@@ -40435,7 +40400,7 @@
         <p:spPr>
           <a:xfrm>
             <a:off x="8119800" y="2788920"/>
-            <a:ext cx="1517040" cy="273600"/>
+            <a:ext cx="1516320" cy="272880"/>
           </a:xfrm>
           <a:prstGeom prst="rect">
             <a:avLst/>
@@ -40496,7 +40461,7 @@
         <p:spPr>
           <a:xfrm>
             <a:off x="8138160" y="3072240"/>
-            <a:ext cx="1480680" cy="547920"/>
+            <a:ext cx="1479960" cy="547200"/>
           </a:xfrm>
           <a:prstGeom prst="rect">
             <a:avLst/>
@@ -40601,7 +40566,7 @@
         <p:spPr>
           <a:xfrm>
             <a:off x="9875520" y="2286000"/>
-            <a:ext cx="1699920" cy="1370880"/>
+            <a:ext cx="1699200" cy="1370160"/>
           </a:xfrm>
           <a:prstGeom prst="roundRect">
             <a:avLst>
@@ -40656,7 +40621,7 @@
         <p:spPr>
           <a:xfrm>
             <a:off x="10533960" y="2121480"/>
-            <a:ext cx="383400" cy="383400"/>
+            <a:ext cx="382680" cy="382680"/>
           </a:xfrm>
           <a:prstGeom prst="ellipse">
             <a:avLst/>
@@ -40702,7 +40667,7 @@
         <p:spPr>
           <a:xfrm>
             <a:off x="10533960" y="2121480"/>
-            <a:ext cx="383400" cy="383400"/>
+            <a:ext cx="382680" cy="382680"/>
           </a:xfrm>
           <a:prstGeom prst="rect">
             <a:avLst/>
@@ -40763,7 +40728,7 @@
         <p:spPr>
           <a:xfrm>
             <a:off x="9966960" y="2788920"/>
-            <a:ext cx="1517040" cy="273600"/>
+            <a:ext cx="1516320" cy="272880"/>
           </a:xfrm>
           <a:prstGeom prst="rect">
             <a:avLst/>
@@ -40824,7 +40789,7 @@
         <p:spPr>
           <a:xfrm>
             <a:off x="9985320" y="3072240"/>
-            <a:ext cx="1480680" cy="547920"/>
+            <a:ext cx="1479960" cy="547200"/>
           </a:xfrm>
           <a:prstGeom prst="rect">
             <a:avLst/>
@@ -40885,7 +40850,7 @@
         <p:spPr>
           <a:xfrm>
             <a:off x="640080" y="4114800"/>
-            <a:ext cx="10880640" cy="1416600"/>
+            <a:ext cx="10879920" cy="1415880"/>
           </a:xfrm>
           <a:prstGeom prst="roundRect">
             <a:avLst>
@@ -40940,7 +40905,7 @@
         <p:spPr>
           <a:xfrm>
             <a:off x="960120" y="4297680"/>
-            <a:ext cx="4571280" cy="291960"/>
+            <a:ext cx="4570560" cy="291240"/>
           </a:xfrm>
           <a:prstGeom prst="rect">
             <a:avLst/>
@@ -41001,7 +40966,7 @@
         <p:spPr>
           <a:xfrm>
             <a:off x="960120" y="4617720"/>
-            <a:ext cx="10240560" cy="822240"/>
+            <a:ext cx="10239840" cy="821520"/>
           </a:xfrm>
           <a:prstGeom prst="rect">
             <a:avLst/>
@@ -41174,7 +41139,7 @@
         <p:spPr>
           <a:xfrm>
             <a:off x="640080" y="311040"/>
-            <a:ext cx="7314480" cy="255240"/>
+            <a:ext cx="7313760" cy="254520"/>
           </a:xfrm>
           <a:prstGeom prst="rect">
             <a:avLst/>
@@ -41235,7 +41200,7 @@
         <p:spPr>
           <a:xfrm>
             <a:off x="640080" y="603360"/>
-            <a:ext cx="10880640" cy="657720"/>
+            <a:ext cx="10879920" cy="657000"/>
           </a:xfrm>
           <a:prstGeom prst="rect">
             <a:avLst/>
@@ -41296,7 +41261,7 @@
         <p:spPr>
           <a:xfrm>
             <a:off x="640080" y="1353240"/>
-            <a:ext cx="10880640" cy="383400"/>
+            <a:ext cx="10879920" cy="382680"/>
           </a:xfrm>
           <a:prstGeom prst="rect">
             <a:avLst/>
@@ -41357,7 +41322,7 @@
         <p:spPr>
           <a:xfrm>
             <a:off x="640080" y="2011680"/>
-            <a:ext cx="10880640" cy="749160"/>
+            <a:ext cx="10879920" cy="748440"/>
           </a:xfrm>
           <a:prstGeom prst="roundRect">
             <a:avLst>
@@ -41412,7 +41377,7 @@
         <p:spPr>
           <a:xfrm>
             <a:off x="914400" y="2194560"/>
-            <a:ext cx="383400" cy="383400"/>
+            <a:ext cx="382680" cy="382680"/>
           </a:xfrm>
           <a:prstGeom prst="ellipse">
             <a:avLst/>
@@ -41458,7 +41423,7 @@
         <p:spPr>
           <a:xfrm>
             <a:off x="914400" y="2194560"/>
-            <a:ext cx="383400" cy="383400"/>
+            <a:ext cx="382680" cy="382680"/>
           </a:xfrm>
           <a:prstGeom prst="rect">
             <a:avLst/>
@@ -41519,7 +41484,7 @@
         <p:spPr>
           <a:xfrm>
             <a:off x="1481400" y="2130480"/>
-            <a:ext cx="2102400" cy="273600"/>
+            <a:ext cx="2101680" cy="272880"/>
           </a:xfrm>
           <a:prstGeom prst="rect">
             <a:avLst/>
@@ -41580,7 +41545,7 @@
         <p:spPr>
           <a:xfrm>
             <a:off x="1481400" y="2414160"/>
-            <a:ext cx="2925360" cy="255240"/>
+            <a:ext cx="2924640" cy="254520"/>
           </a:xfrm>
           <a:prstGeom prst="rect">
             <a:avLst/>
@@ -41641,7 +41606,7 @@
         <p:spPr>
           <a:xfrm>
             <a:off x="4663440" y="2249280"/>
-            <a:ext cx="6217200" cy="310320"/>
+            <a:ext cx="6216480" cy="309600"/>
           </a:xfrm>
           <a:prstGeom prst="rect">
             <a:avLst/>
@@ -41702,7 +41667,7 @@
         <p:spPr>
           <a:xfrm>
             <a:off x="640080" y="2871360"/>
-            <a:ext cx="10880640" cy="749160"/>
+            <a:ext cx="10879920" cy="748440"/>
           </a:xfrm>
           <a:prstGeom prst="roundRect">
             <a:avLst>
@@ -41757,7 +41722,7 @@
         <p:spPr>
           <a:xfrm>
             <a:off x="914400" y="3054240"/>
-            <a:ext cx="383400" cy="383400"/>
+            <a:ext cx="382680" cy="382680"/>
           </a:xfrm>
           <a:prstGeom prst="ellipse">
             <a:avLst/>
@@ -41803,7 +41768,7 @@
         <p:spPr>
           <a:xfrm>
             <a:off x="914400" y="3054240"/>
-            <a:ext cx="383400" cy="383400"/>
+            <a:ext cx="382680" cy="382680"/>
           </a:xfrm>
           <a:prstGeom prst="rect">
             <a:avLst/>
@@ -41864,7 +41829,7 @@
         <p:spPr>
           <a:xfrm>
             <a:off x="1481400" y="2990160"/>
-            <a:ext cx="2102400" cy="273600"/>
+            <a:ext cx="2101680" cy="272880"/>
           </a:xfrm>
           <a:prstGeom prst="rect">
             <a:avLst/>
@@ -41925,7 +41890,7 @@
         <p:spPr>
           <a:xfrm>
             <a:off x="1481400" y="3273480"/>
-            <a:ext cx="2925360" cy="255240"/>
+            <a:ext cx="2924640" cy="254520"/>
           </a:xfrm>
           <a:prstGeom prst="rect">
             <a:avLst/>
@@ -41986,7 +41951,7 @@
         <p:spPr>
           <a:xfrm>
             <a:off x="4663440" y="3108960"/>
-            <a:ext cx="6217200" cy="310320"/>
+            <a:ext cx="6216480" cy="309600"/>
           </a:xfrm>
           <a:prstGeom prst="rect">
             <a:avLst/>
@@ -42047,7 +42012,7 @@
         <p:spPr>
           <a:xfrm>
             <a:off x="640080" y="3730680"/>
-            <a:ext cx="10880640" cy="749160"/>
+            <a:ext cx="10879920" cy="748440"/>
           </a:xfrm>
           <a:prstGeom prst="roundRect">
             <a:avLst>
@@ -42102,7 +42067,7 @@
         <p:spPr>
           <a:xfrm>
             <a:off x="914400" y="3913560"/>
-            <a:ext cx="383400" cy="383400"/>
+            <a:ext cx="382680" cy="382680"/>
           </a:xfrm>
           <a:prstGeom prst="ellipse">
             <a:avLst/>
@@ -42148,7 +42113,7 @@
         <p:spPr>
           <a:xfrm>
             <a:off x="914400" y="3913560"/>
-            <a:ext cx="383400" cy="383400"/>
+            <a:ext cx="382680" cy="382680"/>
           </a:xfrm>
           <a:prstGeom prst="rect">
             <a:avLst/>
@@ -42209,7 +42174,7 @@
         <p:spPr>
           <a:xfrm>
             <a:off x="1481400" y="3849480"/>
-            <a:ext cx="2102400" cy="273600"/>
+            <a:ext cx="2101680" cy="272880"/>
           </a:xfrm>
           <a:prstGeom prst="rect">
             <a:avLst/>
@@ -42270,7 +42235,7 @@
         <p:spPr>
           <a:xfrm>
             <a:off x="1481400" y="4133160"/>
-            <a:ext cx="2925360" cy="255240"/>
+            <a:ext cx="2924640" cy="254520"/>
           </a:xfrm>
           <a:prstGeom prst="rect">
             <a:avLst/>
@@ -42331,7 +42296,7 @@
         <p:spPr>
           <a:xfrm>
             <a:off x="4663440" y="3968640"/>
-            <a:ext cx="6217200" cy="310320"/>
+            <a:ext cx="6216480" cy="309600"/>
           </a:xfrm>
           <a:prstGeom prst="rect">
             <a:avLst/>
@@ -42392,7 +42357,7 @@
         <p:spPr>
           <a:xfrm>
             <a:off x="640080" y="4590360"/>
-            <a:ext cx="10880640" cy="749160"/>
+            <a:ext cx="10879920" cy="748440"/>
           </a:xfrm>
           <a:prstGeom prst="roundRect">
             <a:avLst>
@@ -42447,7 +42412,7 @@
         <p:spPr>
           <a:xfrm>
             <a:off x="914400" y="4773240"/>
-            <a:ext cx="383400" cy="383400"/>
+            <a:ext cx="382680" cy="382680"/>
           </a:xfrm>
           <a:prstGeom prst="ellipse">
             <a:avLst/>
@@ -42493,7 +42458,7 @@
         <p:spPr>
           <a:xfrm>
             <a:off x="914400" y="4773240"/>
-            <a:ext cx="383400" cy="383400"/>
+            <a:ext cx="382680" cy="382680"/>
           </a:xfrm>
           <a:prstGeom prst="rect">
             <a:avLst/>
@@ -42554,7 +42519,7 @@
         <p:spPr>
           <a:xfrm>
             <a:off x="1481400" y="4709160"/>
-            <a:ext cx="2102400" cy="273600"/>
+            <a:ext cx="2101680" cy="272880"/>
           </a:xfrm>
           <a:prstGeom prst="rect">
             <a:avLst/>
@@ -42615,7 +42580,7 @@
         <p:spPr>
           <a:xfrm>
             <a:off x="1481400" y="4992480"/>
-            <a:ext cx="2925360" cy="255240"/>
+            <a:ext cx="2924640" cy="254520"/>
           </a:xfrm>
           <a:prstGeom prst="rect">
             <a:avLst/>
@@ -42676,7 +42641,7 @@
         <p:spPr>
           <a:xfrm>
             <a:off x="4663440" y="4827960"/>
-            <a:ext cx="6217200" cy="310320"/>
+            <a:ext cx="6216480" cy="309600"/>
           </a:xfrm>
           <a:prstGeom prst="rect">
             <a:avLst/>
@@ -42737,7 +42702,7 @@
         <p:spPr>
           <a:xfrm>
             <a:off x="640080" y="5449680"/>
-            <a:ext cx="10880640" cy="749160"/>
+            <a:ext cx="10879920" cy="748440"/>
           </a:xfrm>
           <a:prstGeom prst="roundRect">
             <a:avLst>
@@ -42792,7 +42757,7 @@
         <p:spPr>
           <a:xfrm>
             <a:off x="914400" y="5632560"/>
-            <a:ext cx="383400" cy="383400"/>
+            <a:ext cx="382680" cy="382680"/>
           </a:xfrm>
           <a:prstGeom prst="ellipse">
             <a:avLst/>
@@ -42838,7 +42803,7 @@
         <p:spPr>
           <a:xfrm>
             <a:off x="914400" y="5632560"/>
-            <a:ext cx="383400" cy="383400"/>
+            <a:ext cx="382680" cy="382680"/>
           </a:xfrm>
           <a:prstGeom prst="rect">
             <a:avLst/>
@@ -42899,7 +42864,7 @@
         <p:spPr>
           <a:xfrm>
             <a:off x="1481400" y="5568840"/>
-            <a:ext cx="2102400" cy="273600"/>
+            <a:ext cx="2101680" cy="272880"/>
           </a:xfrm>
           <a:prstGeom prst="rect">
             <a:avLst/>
@@ -42960,7 +42925,7 @@
         <p:spPr>
           <a:xfrm>
             <a:off x="1481400" y="5852160"/>
-            <a:ext cx="2925360" cy="255240"/>
+            <a:ext cx="2924640" cy="254520"/>
           </a:xfrm>
           <a:prstGeom prst="rect">
             <a:avLst/>
@@ -43021,7 +42986,7 @@
         <p:spPr>
           <a:xfrm>
             <a:off x="4663440" y="5687640"/>
-            <a:ext cx="6217200" cy="310320"/>
+            <a:ext cx="6216480" cy="309600"/>
           </a:xfrm>
           <a:prstGeom prst="rect">
             <a:avLst/>
@@ -43119,7 +43084,7 @@
         <p:spPr>
           <a:xfrm>
             <a:off x="640080" y="311040"/>
-            <a:ext cx="7314480" cy="255240"/>
+            <a:ext cx="7313760" cy="254520"/>
           </a:xfrm>
           <a:prstGeom prst="rect">
             <a:avLst/>
@@ -43180,7 +43145,7 @@
         <p:spPr>
           <a:xfrm>
             <a:off x="640080" y="603360"/>
-            <a:ext cx="10880640" cy="657720"/>
+            <a:ext cx="10879920" cy="657000"/>
           </a:xfrm>
           <a:prstGeom prst="rect">
             <a:avLst/>
@@ -43241,7 +43206,7 @@
         <p:spPr>
           <a:xfrm>
             <a:off x="640080" y="1572840"/>
-            <a:ext cx="5348520" cy="2102400"/>
+            <a:ext cx="5347800" cy="2101680"/>
           </a:xfrm>
           <a:prstGeom prst="roundRect">
             <a:avLst>
@@ -43296,7 +43261,7 @@
         <p:spPr>
           <a:xfrm>
             <a:off x="960120" y="1783080"/>
-            <a:ext cx="3656880" cy="310320"/>
+            <a:ext cx="3656160" cy="309600"/>
           </a:xfrm>
           <a:prstGeom prst="rect">
             <a:avLst/>
@@ -43357,7 +43322,7 @@
         <p:spPr>
           <a:xfrm>
             <a:off x="960120" y="2194560"/>
-            <a:ext cx="4708440" cy="1325160"/>
+            <a:ext cx="4707720" cy="1324440"/>
           </a:xfrm>
           <a:prstGeom prst="rect">
             <a:avLst/>
@@ -43528,7 +43493,7 @@
         <p:spPr>
           <a:xfrm>
             <a:off x="6263640" y="1572840"/>
-            <a:ext cx="5257080" cy="2102400"/>
+            <a:ext cx="5256360" cy="2101680"/>
           </a:xfrm>
           <a:prstGeom prst="roundRect">
             <a:avLst>
@@ -43583,7 +43548,7 @@
         <p:spPr>
           <a:xfrm>
             <a:off x="6583680" y="1783080"/>
-            <a:ext cx="3656880" cy="310320"/>
+            <a:ext cx="3656160" cy="309600"/>
           </a:xfrm>
           <a:prstGeom prst="rect">
             <a:avLst/>
@@ -43644,7 +43609,7 @@
         <p:spPr>
           <a:xfrm>
             <a:off x="6583680" y="2194560"/>
-            <a:ext cx="4617000" cy="1325160"/>
+            <a:ext cx="4616280" cy="1324440"/>
           </a:xfrm>
           <a:prstGeom prst="rect">
             <a:avLst/>
@@ -43815,7 +43780,7 @@
         <p:spPr>
           <a:xfrm>
             <a:off x="640080" y="3931920"/>
-            <a:ext cx="10880640" cy="1599480"/>
+            <a:ext cx="10879920" cy="1598760"/>
           </a:xfrm>
           <a:prstGeom prst="roundRect">
             <a:avLst>
@@ -43870,7 +43835,7 @@
         <p:spPr>
           <a:xfrm>
             <a:off x="960120" y="4114800"/>
-            <a:ext cx="3656880" cy="291960"/>
+            <a:ext cx="3656160" cy="291240"/>
           </a:xfrm>
           <a:prstGeom prst="rect">
             <a:avLst/>
@@ -43931,7 +43896,7 @@
         <p:spPr>
           <a:xfrm>
             <a:off x="960120" y="4443840"/>
-            <a:ext cx="10240560" cy="913680"/>
+            <a:ext cx="10239840" cy="912960"/>
           </a:xfrm>
           <a:prstGeom prst="rect">
             <a:avLst/>
@@ -44029,7 +43994,7 @@
         <p:spPr>
           <a:xfrm>
             <a:off x="640080" y="311040"/>
-            <a:ext cx="7314480" cy="255240"/>
+            <a:ext cx="7313760" cy="254520"/>
           </a:xfrm>
           <a:prstGeom prst="rect">
             <a:avLst/>
@@ -44090,7 +44055,7 @@
         <p:spPr>
           <a:xfrm>
             <a:off x="640080" y="603360"/>
-            <a:ext cx="10880640" cy="657720"/>
+            <a:ext cx="10879920" cy="657000"/>
           </a:xfrm>
           <a:prstGeom prst="rect">
             <a:avLst/>
@@ -44151,7 +44116,7 @@
         <p:spPr>
           <a:xfrm>
             <a:off x="640080" y="1572840"/>
-            <a:ext cx="3492360" cy="3062520"/>
+            <a:ext cx="3491640" cy="3061800"/>
           </a:xfrm>
           <a:prstGeom prst="roundRect">
             <a:avLst>
@@ -44206,7 +44171,7 @@
         <p:spPr>
           <a:xfrm>
             <a:off x="868680" y="1719000"/>
-            <a:ext cx="1828080" cy="273600"/>
+            <a:ext cx="1827360" cy="272880"/>
           </a:xfrm>
           <a:prstGeom prst="rect">
             <a:avLst/>
@@ -44267,7 +44232,7 @@
         <p:spPr>
           <a:xfrm>
             <a:off x="868680" y="2103120"/>
-            <a:ext cx="3035160" cy="959400"/>
+            <a:ext cx="3034440" cy="958680"/>
           </a:xfrm>
           <a:prstGeom prst="roundRect">
             <a:avLst>
@@ -44322,7 +44287,7 @@
         <p:spPr>
           <a:xfrm>
             <a:off x="1024200" y="2212920"/>
-            <a:ext cx="1828080" cy="236880"/>
+            <a:ext cx="1827360" cy="236160"/>
           </a:xfrm>
           <a:prstGeom prst="rect">
             <a:avLst/>
@@ -44383,7 +44348,7 @@
         <p:spPr>
           <a:xfrm>
             <a:off x="1024200" y="2468880"/>
-            <a:ext cx="2715120" cy="502200"/>
+            <a:ext cx="2714400" cy="501480"/>
           </a:xfrm>
           <a:prstGeom prst="rect">
             <a:avLst/>
@@ -44474,7 +44439,7 @@
         <p:spPr>
           <a:xfrm>
             <a:off x="868680" y="3246120"/>
-            <a:ext cx="3035160" cy="1188000"/>
+            <a:ext cx="3034440" cy="1187280"/>
           </a:xfrm>
           <a:prstGeom prst="roundRect">
             <a:avLst>
@@ -44529,7 +44494,7 @@
         <p:spPr>
           <a:xfrm>
             <a:off x="1024200" y="3355920"/>
-            <a:ext cx="1828080" cy="236880"/>
+            <a:ext cx="1827360" cy="236160"/>
           </a:xfrm>
           <a:prstGeom prst="rect">
             <a:avLst/>
@@ -44590,7 +44555,7 @@
         <p:spPr>
           <a:xfrm>
             <a:off x="1024200" y="3611880"/>
-            <a:ext cx="2715120" cy="730800"/>
+            <a:ext cx="2714400" cy="730080"/>
           </a:xfrm>
           <a:prstGeom prst="rect">
             <a:avLst/>
@@ -44711,7 +44676,7 @@
         <p:spPr>
           <a:xfrm>
             <a:off x="4352400" y="1572840"/>
-            <a:ext cx="3492360" cy="3062520"/>
+            <a:ext cx="3491640" cy="3061800"/>
           </a:xfrm>
           <a:prstGeom prst="roundRect">
             <a:avLst>
@@ -44766,7 +44731,7 @@
         <p:spPr>
           <a:xfrm>
             <a:off x="4581000" y="1719000"/>
-            <a:ext cx="1828080" cy="273600"/>
+            <a:ext cx="1827360" cy="272880"/>
           </a:xfrm>
           <a:prstGeom prst="rect">
             <a:avLst/>
@@ -44827,7 +44792,7 @@
         <p:spPr>
           <a:xfrm>
             <a:off x="4581000" y="2103120"/>
-            <a:ext cx="3035160" cy="959400"/>
+            <a:ext cx="3034440" cy="958680"/>
           </a:xfrm>
           <a:prstGeom prst="roundRect">
             <a:avLst>
@@ -44882,7 +44847,7 @@
         <p:spPr>
           <a:xfrm>
             <a:off x="4736520" y="2212920"/>
-            <a:ext cx="1828080" cy="236880"/>
+            <a:ext cx="1827360" cy="236160"/>
           </a:xfrm>
           <a:prstGeom prst="rect">
             <a:avLst/>
@@ -44943,7 +44908,7 @@
         <p:spPr>
           <a:xfrm>
             <a:off x="4736520" y="2468880"/>
-            <a:ext cx="2715120" cy="502200"/>
+            <a:ext cx="2714400" cy="501480"/>
           </a:xfrm>
           <a:prstGeom prst="rect">
             <a:avLst/>
@@ -45034,7 +44999,7 @@
         <p:spPr>
           <a:xfrm>
             <a:off x="4581000" y="3246120"/>
-            <a:ext cx="3035160" cy="1188000"/>
+            <a:ext cx="3034440" cy="1187280"/>
           </a:xfrm>
           <a:prstGeom prst="roundRect">
             <a:avLst>
@@ -45089,7 +45054,7 @@
         <p:spPr>
           <a:xfrm>
             <a:off x="4736520" y="3355920"/>
-            <a:ext cx="1828080" cy="236880"/>
+            <a:ext cx="1827360" cy="236160"/>
           </a:xfrm>
           <a:prstGeom prst="rect">
             <a:avLst/>
@@ -45150,7 +45115,7 @@
         <p:spPr>
           <a:xfrm>
             <a:off x="4736520" y="3611880"/>
-            <a:ext cx="2715120" cy="730800"/>
+            <a:ext cx="2714400" cy="730080"/>
           </a:xfrm>
           <a:prstGeom prst="rect">
             <a:avLst/>
@@ -45271,7 +45236,7 @@
         <p:spPr>
           <a:xfrm>
             <a:off x="8065080" y="1572840"/>
-            <a:ext cx="3492360" cy="3062520"/>
+            <a:ext cx="3491640" cy="3061800"/>
           </a:xfrm>
           <a:prstGeom prst="roundRect">
             <a:avLst>
@@ -45326,7 +45291,7 @@
         <p:spPr>
           <a:xfrm>
             <a:off x="8293680" y="1719000"/>
-            <a:ext cx="1828080" cy="273600"/>
+            <a:ext cx="1827360" cy="272880"/>
           </a:xfrm>
           <a:prstGeom prst="rect">
             <a:avLst/>
@@ -45387,7 +45352,7 @@
         <p:spPr>
           <a:xfrm>
             <a:off x="8293680" y="2103120"/>
-            <a:ext cx="3035160" cy="959400"/>
+            <a:ext cx="3034440" cy="958680"/>
           </a:xfrm>
           <a:prstGeom prst="roundRect">
             <a:avLst>
@@ -45442,7 +45407,7 @@
         <p:spPr>
           <a:xfrm>
             <a:off x="8449200" y="2212920"/>
-            <a:ext cx="1828080" cy="236880"/>
+            <a:ext cx="1827360" cy="236160"/>
           </a:xfrm>
           <a:prstGeom prst="rect">
             <a:avLst/>
@@ -45503,7 +45468,7 @@
         <p:spPr>
           <a:xfrm>
             <a:off x="8449200" y="2468880"/>
-            <a:ext cx="2715120" cy="502200"/>
+            <a:ext cx="2714400" cy="501480"/>
           </a:xfrm>
           <a:prstGeom prst="rect">
             <a:avLst/>
@@ -45594,7 +45559,7 @@
         <p:spPr>
           <a:xfrm>
             <a:off x="8293680" y="3246120"/>
-            <a:ext cx="3035160" cy="1188000"/>
+            <a:ext cx="3034440" cy="1187280"/>
           </a:xfrm>
           <a:prstGeom prst="roundRect">
             <a:avLst>
@@ -45649,7 +45614,7 @@
         <p:spPr>
           <a:xfrm>
             <a:off x="8449200" y="3355920"/>
-            <a:ext cx="1828080" cy="236880"/>
+            <a:ext cx="1827360" cy="236160"/>
           </a:xfrm>
           <a:prstGeom prst="rect">
             <a:avLst/>
@@ -45710,7 +45675,7 @@
         <p:spPr>
           <a:xfrm>
             <a:off x="8449200" y="3611880"/>
-            <a:ext cx="2715120" cy="730800"/>
+            <a:ext cx="2714400" cy="730080"/>
           </a:xfrm>
           <a:prstGeom prst="rect">
             <a:avLst/>
@@ -45831,7 +45796,7 @@
         <p:spPr>
           <a:xfrm>
             <a:off x="640080" y="4864680"/>
-            <a:ext cx="10880640" cy="1206360"/>
+            <a:ext cx="10879920" cy="1205640"/>
           </a:xfrm>
           <a:prstGeom prst="roundRect">
             <a:avLst>
@@ -45886,7 +45851,7 @@
         <p:spPr>
           <a:xfrm>
             <a:off x="960120" y="5029200"/>
-            <a:ext cx="4571280" cy="273600"/>
+            <a:ext cx="4570560" cy="272880"/>
           </a:xfrm>
           <a:prstGeom prst="rect">
             <a:avLst/>
@@ -45947,7 +45912,7 @@
         <p:spPr>
           <a:xfrm>
             <a:off x="960120" y="5321880"/>
-            <a:ext cx="10240560" cy="657720"/>
+            <a:ext cx="10239840" cy="657000"/>
           </a:xfrm>
           <a:prstGeom prst="rect">
             <a:avLst/>
@@ -46045,7 +46010,7 @@
         <p:spPr>
           <a:xfrm>
             <a:off x="640080" y="311040"/>
-            <a:ext cx="7314480" cy="255240"/>
+            <a:ext cx="7313760" cy="254520"/>
           </a:xfrm>
           <a:prstGeom prst="rect">
             <a:avLst/>
@@ -46106,7 +46071,7 @@
         <p:spPr>
           <a:xfrm>
             <a:off x="640080" y="603360"/>
-            <a:ext cx="10880640" cy="657720"/>
+            <a:ext cx="10879920" cy="657000"/>
           </a:xfrm>
           <a:prstGeom prst="rect">
             <a:avLst/>
@@ -46167,7 +46132,7 @@
         <p:spPr>
           <a:xfrm>
             <a:off x="640080" y="1353240"/>
-            <a:ext cx="10880640" cy="383400"/>
+            <a:ext cx="10879920" cy="382680"/>
           </a:xfrm>
           <a:prstGeom prst="rect">
             <a:avLst/>
@@ -46228,7 +46193,7 @@
         <p:spPr>
           <a:xfrm>
             <a:off x="640080" y="2103120"/>
-            <a:ext cx="10880640" cy="657720"/>
+            <a:ext cx="10879920" cy="657000"/>
           </a:xfrm>
           <a:prstGeom prst="roundRect">
             <a:avLst>
@@ -46283,7 +46248,7 @@
         <p:spPr>
           <a:xfrm>
             <a:off x="960120" y="2286000"/>
-            <a:ext cx="1919520" cy="291960"/>
+            <a:ext cx="1918800" cy="291240"/>
           </a:xfrm>
           <a:prstGeom prst="rect">
             <a:avLst/>
@@ -46344,7 +46309,7 @@
         <p:spPr>
           <a:xfrm>
             <a:off x="3108960" y="2295000"/>
-            <a:ext cx="7863120" cy="310320"/>
+            <a:ext cx="7862400" cy="309600"/>
           </a:xfrm>
           <a:prstGeom prst="rect">
             <a:avLst/>
@@ -46405,7 +46370,7 @@
         <p:spPr>
           <a:xfrm>
             <a:off x="640080" y="2862000"/>
-            <a:ext cx="10880640" cy="657720"/>
+            <a:ext cx="10879920" cy="657000"/>
           </a:xfrm>
           <a:prstGeom prst="roundRect">
             <a:avLst>
@@ -46460,7 +46425,7 @@
         <p:spPr>
           <a:xfrm>
             <a:off x="960120" y="3044880"/>
-            <a:ext cx="1919520" cy="291960"/>
+            <a:ext cx="1918800" cy="291240"/>
           </a:xfrm>
           <a:prstGeom prst="rect">
             <a:avLst/>
@@ -46521,7 +46486,7 @@
         <p:spPr>
           <a:xfrm>
             <a:off x="3108960" y="3054240"/>
-            <a:ext cx="7863120" cy="310320"/>
+            <a:ext cx="7862400" cy="309600"/>
           </a:xfrm>
           <a:prstGeom prst="rect">
             <a:avLst/>
@@ -46582,7 +46547,7 @@
         <p:spPr>
           <a:xfrm>
             <a:off x="640080" y="3620880"/>
-            <a:ext cx="10880640" cy="657720"/>
+            <a:ext cx="10879920" cy="657000"/>
           </a:xfrm>
           <a:prstGeom prst="roundRect">
             <a:avLst>
@@ -46637,7 +46602,7 @@
         <p:spPr>
           <a:xfrm>
             <a:off x="960120" y="3803760"/>
-            <a:ext cx="1919520" cy="291960"/>
+            <a:ext cx="1918800" cy="291240"/>
           </a:xfrm>
           <a:prstGeom prst="rect">
             <a:avLst/>
@@ -46698,7 +46663,7 @@
         <p:spPr>
           <a:xfrm>
             <a:off x="3108960" y="3813120"/>
-            <a:ext cx="7863120" cy="310320"/>
+            <a:ext cx="7862400" cy="309600"/>
           </a:xfrm>
           <a:prstGeom prst="rect">
             <a:avLst/>
@@ -46759,7 +46724,7 @@
         <p:spPr>
           <a:xfrm>
             <a:off x="640080" y="4380120"/>
-            <a:ext cx="10880640" cy="657720"/>
+            <a:ext cx="10879920" cy="657000"/>
           </a:xfrm>
           <a:prstGeom prst="roundRect">
             <a:avLst>
@@ -46814,7 +46779,7 @@
         <p:spPr>
           <a:xfrm>
             <a:off x="960120" y="4563000"/>
-            <a:ext cx="1919520" cy="291960"/>
+            <a:ext cx="1918800" cy="291240"/>
           </a:xfrm>
           <a:prstGeom prst="rect">
             <a:avLst/>
@@ -46875,7 +46840,7 @@
         <p:spPr>
           <a:xfrm>
             <a:off x="3108960" y="4572000"/>
-            <a:ext cx="7863120" cy="310320"/>
+            <a:ext cx="7862400" cy="309600"/>
           </a:xfrm>
           <a:prstGeom prst="rect">
             <a:avLst/>
@@ -46936,7 +46901,7 @@
         <p:spPr>
           <a:xfrm>
             <a:off x="640080" y="5139000"/>
-            <a:ext cx="10880640" cy="657720"/>
+            <a:ext cx="10879920" cy="657000"/>
           </a:xfrm>
           <a:prstGeom prst="roundRect">
             <a:avLst>
@@ -46991,7 +46956,7 @@
         <p:spPr>
           <a:xfrm>
             <a:off x="960120" y="5321880"/>
-            <a:ext cx="1919520" cy="291960"/>
+            <a:ext cx="1918800" cy="291240"/>
           </a:xfrm>
           <a:prstGeom prst="rect">
             <a:avLst/>
@@ -47052,7 +47017,7 @@
         <p:spPr>
           <a:xfrm>
             <a:off x="3108960" y="5330880"/>
-            <a:ext cx="7863120" cy="310320"/>
+            <a:ext cx="7862400" cy="309600"/>
           </a:xfrm>
           <a:prstGeom prst="rect">
             <a:avLst/>
